--- a/Presentacion_Rosa_Pastel_Metodos_Numericos.pptx
+++ b/Presentacion_Rosa_Pastel_Metodos_Numericos.pptx
@@ -15,6 +15,7 @@
     <p:sldId id="263" r:id="rId14"/>
     <p:sldId id="264" r:id="rId15"/>
     <p:sldId id="265" r:id="rId16"/>
+    <p:sldId id="266" r:id="rId17"/>
   </p:sldIdLst>
   <p:sldSz cx="12191695" cy="6858000" type="screen4x3"/>
   <p:notesSz cx="6858000" cy="9144000"/>
@@ -3248,6 +3249,167 @@
       <p:grpSpPr/>
       <p:sp>
         <p:nvSpPr>
+          <p:cNvPr id="2" name="TextBox 1"/>
+          <p:cNvSpPr txBox="1"/>
+          <p:nvPr/>
+        </p:nvSpPr>
+        <p:spPr>
+          <a:xfrm>
+            <a:off x="731520" y="365760"/>
+            <a:ext cx="10698480" cy="1005840"/>
+          </a:xfrm>
+          <a:prstGeom prst="rect">
+            <a:avLst/>
+          </a:prstGeom>
+          <a:noFill/>
+        </p:spPr>
+        <p:txBody>
+          <a:bodyPr wrap="square" lIns="0" tIns="0" rIns="0" bIns="0">
+            <a:spAutoFit/>
+          </a:bodyPr>
+          <a:lstStyle/>
+          <a:p>
+            <a:pPr>
+              <a:defRPr sz="1100" b="1">
+                <a:solidFill>
+                  <a:srgbClr val="E91E63"/>
+                </a:solidFill>
+                <a:latin typeface="Calibri"/>
+              </a:defRPr>
+            </a:pPr>
+            <a:r>
+              <a:t>SÍNTESIS FINAL</a:t>
+            </a:r>
+          </a:p>
+          <a:p>
+            <a:pPr>
+              <a:defRPr sz="2300" b="1">
+                <a:solidFill>
+                  <a:srgbClr val="1F4E79"/>
+                </a:solidFill>
+                <a:latin typeface="Calibri"/>
+              </a:defRPr>
+            </a:pPr>
+            <a:r>
+              <a:t>Conclusiones del Proyecto Integrador</a:t>
+            </a:r>
+          </a:p>
+        </p:txBody>
+      </p:sp>
+      <p:sp>
+        <p:nvSpPr>
+          <p:cNvPr id="3" name="Rounded Rectangle 2"/>
+          <p:cNvSpPr/>
+          <p:nvPr/>
+        </p:nvSpPr>
+        <p:spPr>
+          <a:xfrm>
+            <a:off x="731520" y="1645920"/>
+            <a:ext cx="10698480" cy="4663440"/>
+          </a:xfrm>
+          <a:prstGeom prst="roundRect">
+            <a:avLst/>
+          </a:prstGeom>
+          <a:solidFill>
+            <a:srgbClr val="F5F7FA"/>
+          </a:solidFill>
+          <a:ln>
+            <a:solidFill>
+              <a:srgbClr val="D9E1F2"/>
+            </a:solidFill>
+          </a:ln>
+        </p:spPr>
+        <p:style>
+          <a:lnRef idx="1">
+            <a:schemeClr val="accent1"/>
+          </a:lnRef>
+          <a:fillRef idx="3">
+            <a:schemeClr val="accent1"/>
+          </a:fillRef>
+          <a:effectRef idx="2">
+            <a:schemeClr val="accent1"/>
+          </a:effectRef>
+          <a:fontRef idx="minor">
+            <a:schemeClr val="lt1"/>
+          </a:fontRef>
+        </p:style>
+        <p:txBody>
+          <a:bodyPr rtlCol="0" anchor="ctr" wrap="square" lIns="365760" tIns="365760"/>
+          <a:lstStyle/>
+          <a:p>
+            <a:pPr algn="ctr">
+              <a:spcAft>
+                <a:spcPts val="1000"/>
+              </a:spcAft>
+              <a:defRPr sz="1700" b="1">
+                <a:solidFill>
+                  <a:srgbClr val="1F4E79"/>
+                </a:solidFill>
+              </a:defRPr>
+            </a:pPr>
+            <a:r>
+              <a:t>Principales Aprendizajes y Conclusiones:</a:t>
+            </a:r>
+          </a:p>
+          <a:p>
+            <a:pPr>
+              <a:defRPr sz="1100">
+                <a:solidFill>
+                  <a:srgbClr val="282828"/>
+                </a:solidFill>
+              </a:defRPr>
+            </a:pPr>
+            <a:r>
+              <a:t>1. Ajuste confiable: La regresión polinómica cúbica ofreció una muy buena aproximación global (R² = 0.9995, Sy/x = 0.927 M) para representar la acumulación de reproducciones a lo largo del año.</a:t>
+            </a:r>
+            <a:br/>
+            <a:br/>
+            <a:r>
+              <a:t>2. Eficiencia comparada de raíces: Newton-Raphson demostró ser 5 veces más rápido que Bisección (3 iteraciones frente a 15) para alcanzar la tolerancia de 10⁻⁴ %, convergiendo a la misma raíz (t* ≈ 35.52 semanas).</a:t>
+            </a:r>
+            <a:br/>
+            <a:br/>
+            <a:r>
+              <a:t>3. Validación del modelo: La discrepancia de 2.75 días respecto a la interpolación lineal directa confirma la coherencia física y estadística del ajuste dentro del error estándar.</a:t>
+            </a:r>
+            <a:br/>
+            <a:br/>
+            <a:r>
+              <a:t>4. Dinámica del consumo: La diferenciación numérica reveló que el pico real de streams ocurrió en la semana 26 (fines de julio de 2023, 4.171 M), y evidenció cómo el modelo cúbico suaviza la respuesta temporal.</a:t>
+            </a:r>
+            <a:br/>
+            <a:br/>
+            <a:r>
+              <a:t>5. Aporte a la ingeniería: El modelado numérico permite convertir datos discretos de telemetría en funciones continuas útiles para dimensionar infraestructura y servidores de streaming ante variaciones de demanda.</a:t>
+            </a:r>
+            <a:br/>
+            <a:br/>
+            <a:r>
+              <a:t>6. Generalización y validación automática: El método resultó reutilizable para otras canciones; demostró que un R² alto (&gt; 0.996) no basta para validar un modelo físico y que el sistema alerta cuándo la cúbica no aplica (estrenos con a &gt; 0).</a:t>
+            </a:r>
+          </a:p>
+        </p:txBody>
+      </p:sp>
+    </p:spTree>
+  </p:cSld>
+  <p:clrMapOvr>
+    <a:masterClrMapping/>
+  </p:clrMapOvr>
+</p:sld>
+</file>
+
+<file path=ppt/slides/slide11.xml><?xml version="1.0" encoding="utf-8"?>
+<p:sld xmlns:a="http://schemas.openxmlformats.org/drawingml/2006/main" xmlns:p="http://schemas.openxmlformats.org/presentationml/2006/main" xmlns:r="http://schemas.openxmlformats.org/officeDocument/2006/relationships">
+  <p:cSld>
+    <p:spTree>
+      <p:nvGrpSpPr>
+        <p:cNvPr id="1" name=""/>
+        <p:cNvGrpSpPr/>
+        <p:nvPr/>
+      </p:nvGrpSpPr>
+      <p:grpSpPr/>
+      <p:sp>
+        <p:nvSpPr>
           <p:cNvPr id="2" name="Rectangle 1"/>
           <p:cNvSpPr/>
           <p:nvPr/>
@@ -4632,6 +4794,194 @@
               </a:defRPr>
             </a:pPr>
             <a:r>
+              <a:t>VALIDACIÓN DEL MODELO Y GENERALIZACIÓN</a:t>
+            </a:r>
+          </a:p>
+          <a:p>
+            <a:pPr>
+              <a:defRPr sz="2300" b="1">
+                <a:solidFill>
+                  <a:srgbClr val="1F4E79"/>
+                </a:solidFill>
+                <a:latin typeface="Calibri"/>
+              </a:defRPr>
+            </a:pPr>
+            <a:r>
+              <a:t>Generalización: ¿sirve para cualquier canción?</a:t>
+            </a:r>
+          </a:p>
+        </p:txBody>
+      </p:sp>
+      <p:sp>
+        <p:nvSpPr>
+          <p:cNvPr id="3" name="TextBox 2"/>
+          <p:cNvSpPr txBox="1"/>
+          <p:nvPr/>
+        </p:nvSpPr>
+        <p:spPr>
+          <a:xfrm>
+            <a:off x="731520" y="1645920"/>
+            <a:ext cx="6400800" cy="4663440"/>
+          </a:xfrm>
+          <a:prstGeom prst="rect">
+            <a:avLst/>
+          </a:prstGeom>
+          <a:noFill/>
+        </p:spPr>
+        <p:txBody>
+          <a:bodyPr wrap="square">
+            <a:spAutoFit/>
+          </a:bodyPr>
+          <a:lstStyle/>
+          <a:p>
+            <a:pPr>
+              <a:spcAft>
+                <a:spcPts val="800"/>
+              </a:spcAft>
+              <a:defRPr sz="1500" b="1">
+                <a:solidFill>
+                  <a:srgbClr val="1F4E79"/>
+                </a:solidFill>
+              </a:defRPr>
+            </a:pPr>
+            <a:r>
+              <a:t>Evaluación en 3 Canciones (Resurgimiento vs. Estrenos):</a:t>
+            </a:r>
+          </a:p>
+          <a:p>
+            <a:pPr>
+              <a:defRPr sz="1100">
+                <a:solidFill>
+                  <a:srgbClr val="282828"/>
+                </a:solidFill>
+              </a:defRPr>
+            </a:pPr>
+            <a:r>
+              <a:t>• Regla matemática de validación:</a:t>
+            </a:r>
+            <a:br/>
+            <a:r>
+              <a:t>  - Punto de inflexión: t = -b / (3a). Es MÁXIMO del ritmo S'(t) sólo si a &lt; 0.</a:t>
+            </a:r>
+            <a:br/>
+            <a:r>
+              <a:t>  - Si a &gt; 0, es un MÍNIMO: la cúbica no puede representar el pico de demanda.</a:t>
+            </a:r>
+            <a:br/>
+            <a:br/>
+            <a:r>
+              <a:t>• Resurgimiento gradual vs. Estrenos masivos:</a:t>
+            </a:r>
+            <a:br/>
+            <a:r>
+              <a:t>  - Rosa Pastel: sube meses y baja (a = -0.000839 &lt; 0) → Aplica (pico en sem. 30.6).</a:t>
+            </a:r>
+            <a:br/>
+            <a:r>
+              <a:t>  - Estrenos (Ella Baila Sola, Tití): arrancan en pico y sólo bajan (a &gt; 0) → No aplica.</a:t>
+            </a:r>
+            <a:br/>
+            <a:r>
+              <a:t>    La derivada parabólica vuelve a subir al final (rebote irreal en el gráfico).</a:t>
+            </a:r>
+            <a:br/>
+            <a:br/>
+            <a:r>
+              <a:t>• Un R² alto no garantiza validez física:</a:t>
+            </a:r>
+            <a:br/>
+            <a:r>
+              <a:t>  - En los estrenos R² es casi perfecto (0.996 y 0.9997), pero el modelo falla para el pico.</a:t>
+            </a:r>
+            <a:br/>
+            <a:br/>
+            <a:r>
+              <a:t>• Herramienta general de ingeniería reutilizable:</a:t>
+            </a:r>
+            <a:br/>
+            <a:r>
+              <a:t>  - Hito 100M (Newton en 3 iteraciones) y pico de datos funcionan para todas.</a:t>
+            </a:r>
+            <a:br/>
+            <a:r>
+              <a:t>  - El programa avisa automáticamente cuándo no aplica en lugar de arrojar un resultado falso.</a:t>
+            </a:r>
+          </a:p>
+        </p:txBody>
+      </p:sp>
+      <p:pic>
+        <p:nvPicPr>
+          <p:cNvPr id="4" name="Picture 3" descr="grafico_4_comparacion_canciones.png"/>
+          <p:cNvPicPr>
+            <a:picLocks noChangeAspect="1"/>
+          </p:cNvPicPr>
+          <p:nvPr/>
+        </p:nvPicPr>
+        <p:blipFill>
+          <a:blip r:embed="rId2"/>
+          <a:stretch>
+            <a:fillRect/>
+          </a:stretch>
+        </p:blipFill>
+        <p:spPr>
+          <a:xfrm>
+            <a:off x="7406640" y="1645920"/>
+            <a:ext cx="3886200" cy="4663440"/>
+          </a:xfrm>
+          <a:prstGeom prst="rect">
+            <a:avLst/>
+          </a:prstGeom>
+        </p:spPr>
+      </p:pic>
+    </p:spTree>
+  </p:cSld>
+  <p:clrMapOvr>
+    <a:masterClrMapping/>
+  </p:clrMapOvr>
+</p:sld>
+</file>
+
+<file path=ppt/slides/slide9.xml><?xml version="1.0" encoding="utf-8"?>
+<p:sld xmlns:a="http://schemas.openxmlformats.org/drawingml/2006/main" xmlns:p="http://schemas.openxmlformats.org/presentationml/2006/main" xmlns:r="http://schemas.openxmlformats.org/officeDocument/2006/relationships">
+  <p:cSld>
+    <p:spTree>
+      <p:nvGrpSpPr>
+        <p:cNvPr id="1" name=""/>
+        <p:cNvGrpSpPr/>
+        <p:nvPr/>
+      </p:nvGrpSpPr>
+      <p:grpSpPr/>
+      <p:sp>
+        <p:nvSpPr>
+          <p:cNvPr id="2" name="TextBox 1"/>
+          <p:cNvSpPr txBox="1"/>
+          <p:nvPr/>
+        </p:nvSpPr>
+        <p:spPr>
+          <a:xfrm>
+            <a:off x="731520" y="365760"/>
+            <a:ext cx="10698480" cy="1005840"/>
+          </a:xfrm>
+          <a:prstGeom prst="rect">
+            <a:avLst/>
+          </a:prstGeom>
+          <a:noFill/>
+        </p:spPr>
+        <p:txBody>
+          <a:bodyPr wrap="square" lIns="0" tIns="0" rIns="0" bIns="0">
+            <a:spAutoFit/>
+          </a:bodyPr>
+          <a:lstStyle/>
+          <a:p>
+            <a:pPr>
+              <a:defRPr sz="1100" b="1">
+                <a:solidFill>
+                  <a:srgbClr val="E91E63"/>
+                </a:solidFill>
+                <a:latin typeface="Calibri"/>
+              </a:defRPr>
+            </a:pPr>
+            <a:r>
               <a:t>ANÁLISIS CRÍTICO</a:t>
             </a:r>
           </a:p>
@@ -4922,162 +5272,6 @@
             </a:pPr>
             <a:r>
               <a:t>El modelo cúbico solo es válido dentro del rango de 2023 (t ∈ [0, 46]). Dado que su coeficiente cúbico es negativo (a = -0.000839), extrapolar fuera del año haría tender los streams acumulados a -∞.</a:t>
-            </a:r>
-          </a:p>
-        </p:txBody>
-      </p:sp>
-    </p:spTree>
-  </p:cSld>
-  <p:clrMapOvr>
-    <a:masterClrMapping/>
-  </p:clrMapOvr>
-</p:sld>
-</file>
-
-<file path=ppt/slides/slide9.xml><?xml version="1.0" encoding="utf-8"?>
-<p:sld xmlns:a="http://schemas.openxmlformats.org/drawingml/2006/main" xmlns:p="http://schemas.openxmlformats.org/presentationml/2006/main" xmlns:r="http://schemas.openxmlformats.org/officeDocument/2006/relationships">
-  <p:cSld>
-    <p:spTree>
-      <p:nvGrpSpPr>
-        <p:cNvPr id="1" name=""/>
-        <p:cNvGrpSpPr/>
-        <p:nvPr/>
-      </p:nvGrpSpPr>
-      <p:grpSpPr/>
-      <p:sp>
-        <p:nvSpPr>
-          <p:cNvPr id="2" name="TextBox 1"/>
-          <p:cNvSpPr txBox="1"/>
-          <p:nvPr/>
-        </p:nvSpPr>
-        <p:spPr>
-          <a:xfrm>
-            <a:off x="731520" y="365760"/>
-            <a:ext cx="10698480" cy="1005840"/>
-          </a:xfrm>
-          <a:prstGeom prst="rect">
-            <a:avLst/>
-          </a:prstGeom>
-          <a:noFill/>
-        </p:spPr>
-        <p:txBody>
-          <a:bodyPr wrap="square" lIns="0" tIns="0" rIns="0" bIns="0">
-            <a:spAutoFit/>
-          </a:bodyPr>
-          <a:lstStyle/>
-          <a:p>
-            <a:pPr>
-              <a:defRPr sz="1100" b="1">
-                <a:solidFill>
-                  <a:srgbClr val="E91E63"/>
-                </a:solidFill>
-                <a:latin typeface="Calibri"/>
-              </a:defRPr>
-            </a:pPr>
-            <a:r>
-              <a:t>SÍNTESIS FINAL</a:t>
-            </a:r>
-          </a:p>
-          <a:p>
-            <a:pPr>
-              <a:defRPr sz="2300" b="1">
-                <a:solidFill>
-                  <a:srgbClr val="1F4E79"/>
-                </a:solidFill>
-                <a:latin typeface="Calibri"/>
-              </a:defRPr>
-            </a:pPr>
-            <a:r>
-              <a:t>Conclusiones del Proyecto Integrador</a:t>
-            </a:r>
-          </a:p>
-        </p:txBody>
-      </p:sp>
-      <p:sp>
-        <p:nvSpPr>
-          <p:cNvPr id="3" name="Rounded Rectangle 2"/>
-          <p:cNvSpPr/>
-          <p:nvPr/>
-        </p:nvSpPr>
-        <p:spPr>
-          <a:xfrm>
-            <a:off x="731520" y="1645920"/>
-            <a:ext cx="10698480" cy="4663440"/>
-          </a:xfrm>
-          <a:prstGeom prst="roundRect">
-            <a:avLst/>
-          </a:prstGeom>
-          <a:solidFill>
-            <a:srgbClr val="F5F7FA"/>
-          </a:solidFill>
-          <a:ln>
-            <a:solidFill>
-              <a:srgbClr val="D9E1F2"/>
-            </a:solidFill>
-          </a:ln>
-        </p:spPr>
-        <p:style>
-          <a:lnRef idx="1">
-            <a:schemeClr val="accent1"/>
-          </a:lnRef>
-          <a:fillRef idx="3">
-            <a:schemeClr val="accent1"/>
-          </a:fillRef>
-          <a:effectRef idx="2">
-            <a:schemeClr val="accent1"/>
-          </a:effectRef>
-          <a:fontRef idx="minor">
-            <a:schemeClr val="lt1"/>
-          </a:fontRef>
-        </p:style>
-        <p:txBody>
-          <a:bodyPr rtlCol="0" anchor="ctr" wrap="square" lIns="365760" tIns="365760"/>
-          <a:lstStyle/>
-          <a:p>
-            <a:pPr algn="ctr">
-              <a:spcAft>
-                <a:spcPts val="1200"/>
-              </a:spcAft>
-              <a:defRPr sz="1700" b="1">
-                <a:solidFill>
-                  <a:srgbClr val="1F4E79"/>
-                </a:solidFill>
-              </a:defRPr>
-            </a:pPr>
-            <a:r>
-              <a:t>Principales Aprendizajes y Conclusiones:</a:t>
-            </a:r>
-          </a:p>
-          <a:p>
-            <a:pPr>
-              <a:defRPr sz="1250">
-                <a:solidFill>
-                  <a:srgbClr val="282828"/>
-                </a:solidFill>
-              </a:defRPr>
-            </a:pPr>
-            <a:r>
-              <a:t>1. Ajuste confiable: La regresión polinómica cúbica ofreció una muy buena aproximación global (R² = 0.9995, Sy/x = 0.927 M) para representar la acumulación de reproducciones a lo largo del año.</a:t>
-            </a:r>
-            <a:br/>
-            <a:br/>
-            <a:r>
-              <a:t>2. Eficiencia comparada de raíces: Newton-Raphson demostró ser 5 veces más rápido que Bisección (3 iteraciones frente a 15) para alcanzar la tolerancia de 10⁻⁴ %, convergiendo a la misma raíz (t* ≈ 35.52 semanas).</a:t>
-            </a:r>
-            <a:br/>
-            <a:br/>
-            <a:r>
-              <a:t>3. Validación del modelo: La discrepancia de 2.75 días respecto a la interpolación lineal directa confirma la coherencia física y estadística del ajuste dentro del error estándar.</a:t>
-            </a:r>
-            <a:br/>
-            <a:br/>
-            <a:r>
-              <a:t>4. Dinámica del consumo: La diferenciación numérica reveló que el pico real de streams ocurrió en la semana 26 (fines de julio de 2023, 4.171 M), y evidenció cómo el modelo cúbico suaviza la respuesta temporal.</a:t>
-            </a:r>
-            <a:br/>
-            <a:br/>
-            <a:r>
-              <a:t>5. Aporte a la ingeniería: El modelado numérico permite convertir datos discretos de telemetría en funciones continuas útiles para dimensionar infraestructura y servidores de streaming ante variaciones de demanda.</a:t>
             </a:r>
           </a:p>
         </p:txBody>

--- a/Presentacion_Rosa_Pastel_Metodos_Numericos.pptx
+++ b/Presentacion_Rosa_Pastel_Metodos_Numericos.pptx
@@ -1,6 +1,6 @@
 
 <file path=ppt/presentation.xml><?xml version="1.0" encoding="utf-8"?>
-<p:presentation xmlns:a="http://schemas.openxmlformats.org/drawingml/2006/main" xmlns:r="http://schemas.openxmlformats.org/officeDocument/2006/relationships" xmlns:p="http://schemas.openxmlformats.org/presentationml/2006/main" saveSubsetFonts="1" autoCompressPictures="0">
+<p:presentation xmlns:p="http://schemas.openxmlformats.org/presentationml/2006/main" xmlns:r="http://schemas.openxmlformats.org/officeDocument/2006/relationships" xmlns:a="http://schemas.openxmlformats.org/drawingml/2006/main" saveSubsetFonts="1" autoCompressPictures="0" embedTrueTypeFonts="1">
   <p:sldMasterIdLst>
     <p:sldMasterId id="2147483648" r:id="rId1"/>
   </p:sldMasterIdLst>
@@ -11,14 +11,28 @@
     <p:sldId id="259" r:id="rId10"/>
     <p:sldId id="260" r:id="rId11"/>
     <p:sldId id="261" r:id="rId12"/>
+    <p:sldId id="268" r:id="rId19"/>
     <p:sldId id="262" r:id="rId13"/>
     <p:sldId id="263" r:id="rId14"/>
+    <p:sldId id="269" r:id="rId20"/>
     <p:sldId id="264" r:id="rId15"/>
     <p:sldId id="265" r:id="rId16"/>
     <p:sldId id="266" r:id="rId17"/>
+    <p:sldId id="267" r:id="rId18"/>
   </p:sldIdLst>
-  <p:sldSz cx="12191695" cy="6858000" type="screen4x3"/>
+  <p:sldSz cx="12192000" cy="6858000" type="screen4x3"/>
   <p:notesSz cx="6858000" cy="9144000"/>
+  <p:embeddedFontLst>
+    <p:embeddedFont>
+      <p:font typeface="Space Grotesk"/>
+      <p:bold r:id="rIdFont19"/>
+    </p:embeddedFont>
+    <p:embeddedFont>
+      <p:font typeface="Plus Jakarta Sans"/>
+      <p:regular r:id="rIdFont21"/>
+      <p:bold r:id="rIdFont20"/>
+    </p:embeddedFont>
+  </p:embeddedFontLst>
   <p:defaultTextStyle>
     <a:defPPr>
       <a:defRPr lang="en-US"/>
@@ -3091,6 +3105,14 @@
 <file path=ppt/slides/slide1.xml><?xml version="1.0" encoding="utf-8"?>
 <p:sld xmlns:a="http://schemas.openxmlformats.org/drawingml/2006/main" xmlns:p="http://schemas.openxmlformats.org/presentationml/2006/main" xmlns:r="http://schemas.openxmlformats.org/officeDocument/2006/relationships">
   <p:cSld>
+    <p:bg>
+      <p:bgPr>
+        <a:solidFill>
+          <a:srgbClr val="0F172A"/>
+        </a:solidFill>
+        <a:effectLst/>
+      </p:bgPr>
+    </p:bg>
     <p:spTree>
       <p:nvGrpSpPr>
         <p:cNvPr id="1" name=""/>
@@ -3106,18 +3128,17 @@
         </p:nvSpPr>
         <p:spPr>
           <a:xfrm>
-            <a:off x="0" y="0"/>
-            <a:ext cx="12191695" cy="6858000"/>
-          </a:xfrm>
-          <a:prstGeom prst="rect">
-            <a:avLst/>
-          </a:prstGeom>
-          <a:solidFill>
-            <a:srgbClr val="002060"/>
-          </a:solidFill>
+            <a:off x="609600" y="5638800"/>
+            <a:ext cx="10972800" cy="685800"/>
+          </a:xfrm>
+          <a:prstGeom prst="rect">
+            <a:avLst/>
+          </a:prstGeom>
+          <a:noFill/>
           <a:ln>
             <a:noFill/>
           </a:ln>
+          <a:effectLst/>
         </p:spPr>
         <p:style>
           <a:lnRef idx="1">
@@ -3143,88 +3164,385 @@
       </p:sp>
       <p:sp>
         <p:nvSpPr>
-          <p:cNvPr id="3" name="TextBox 2"/>
-          <p:cNvSpPr txBox="1"/>
-          <p:nvPr/>
-        </p:nvSpPr>
-        <p:spPr>
-          <a:xfrm>
-            <a:off x="1097280" y="1280160"/>
-            <a:ext cx="10058400" cy="4389120"/>
-          </a:xfrm>
-          <a:prstGeom prst="rect">
-            <a:avLst/>
-          </a:prstGeom>
-          <a:noFill/>
-        </p:spPr>
-        <p:txBody>
-          <a:bodyPr wrap="square">
-            <a:spAutoFit/>
-          </a:bodyPr>
-          <a:lstStyle/>
-          <a:p>
-            <a:pPr>
-              <a:spcAft>
-                <a:spcPts val="2000"/>
-              </a:spcAft>
-              <a:defRPr sz="1400" b="1">
-                <a:solidFill>
-                  <a:srgbClr val="BDD7EE"/>
-                </a:solidFill>
-                <a:latin typeface="Calibri"/>
-              </a:defRPr>
+          <p:cNvPr id="3" name="Rectangle 2"/>
+          <p:cNvSpPr/>
+          <p:nvPr/>
+        </p:nvSpPr>
+        <p:spPr>
+          <a:xfrm>
+            <a:off x="609600" y="5638800"/>
+            <a:ext cx="10972800" cy="9525"/>
+          </a:xfrm>
+          <a:prstGeom prst="rect">
+            <a:avLst/>
+          </a:prstGeom>
+          <a:solidFill>
+            <a:srgbClr val="1E293B"/>
+          </a:solidFill>
+          <a:ln>
+            <a:noFill/>
+          </a:ln>
+          <a:effectLst/>
+        </p:spPr>
+        <p:style>
+          <a:lnRef idx="1">
+            <a:schemeClr val="accent1"/>
+          </a:lnRef>
+          <a:fillRef idx="3">
+            <a:schemeClr val="accent1"/>
+          </a:fillRef>
+          <a:effectRef idx="2">
+            <a:schemeClr val="accent1"/>
+          </a:effectRef>
+          <a:fontRef idx="minor">
+            <a:schemeClr val="lt1"/>
+          </a:fontRef>
+        </p:style>
+        <p:txBody>
+          <a:bodyPr rtlCol="0" anchor="ctr"/>
+          <a:lstStyle/>
+          <a:p>
+            <a:pPr algn="ctr"/>
+          </a:p>
+        </p:txBody>
+      </p:sp>
+      <p:sp>
+        <p:nvSpPr>
+          <p:cNvPr id="4" name="TextBox 3"/>
+          <p:cNvSpPr txBox="1"/>
+          <p:nvPr/>
+        </p:nvSpPr>
+        <p:spPr>
+          <a:xfrm>
+            <a:off x="609600" y="533400"/>
+            <a:ext cx="6643687" cy="171450"/>
+          </a:xfrm>
+          <a:prstGeom prst="rect">
+            <a:avLst/>
+          </a:prstGeom>
+          <a:noFill/>
+        </p:spPr>
+        <p:txBody>
+          <a:bodyPr wrap="none" lIns="0" rIns="0" tIns="0" bIns="0" anchor="t">
+            <a:spAutoFit/>
+          </a:bodyPr>
+          <a:lstStyle/>
+          <a:p>
+            <a:pPr algn="l"/>
+            <a:r>
+              <a:rPr b="1" sz="1050" i="0" u="none">
+                <a:solidFill>
+                  <a:srgbClr val="F43F5E"/>
+                </a:solidFill>
+                <a:latin typeface="Plus Jakarta Sans"/>
+              </a:rPr>
+              <a:t>UNIVERSIDAD CATÓLICA DE CÓRDOBA · FACULTAD DE INGENIERÍA</a:t>
+            </a:r>
+          </a:p>
+        </p:txBody>
+      </p:sp>
+      <p:sp>
+        <p:nvSpPr>
+          <p:cNvPr id="5" name="TextBox 4"/>
+          <p:cNvSpPr txBox="1"/>
+          <p:nvPr/>
+        </p:nvSpPr>
+        <p:spPr>
+          <a:xfrm>
+            <a:off x="609600" y="2230784"/>
+            <a:ext cx="9701212" cy="1139130"/>
+          </a:xfrm>
+          <a:prstGeom prst="rect">
+            <a:avLst/>
+          </a:prstGeom>
+          <a:noFill/>
+        </p:spPr>
+        <p:txBody>
+          <a:bodyPr wrap="square" lIns="0" rIns="0" tIns="0" bIns="0" anchor="t">
+            <a:spAutoFit/>
+          </a:bodyPr>
+          <a:lstStyle/>
+          <a:p>
+            <a:pPr algn="l">
+              <a:lnSpc>
+                <a:spcPts val="4484"/>
+              </a:lnSpc>
             </a:pPr>
             <a:r>
-              <a:t>UNIVERSIDAD CATÓLICA DE CÓRDOBA · FACULTAD DE INGENIERÍA</a:t>
-            </a:r>
-          </a:p>
-          <a:p>
-            <a:pPr>
-              <a:spcAft>
-                <a:spcPts val="1600"/>
-              </a:spcAft>
-              <a:defRPr sz="3000" b="1">
+              <a:rPr b="1" sz="3900" i="0" u="none">
                 <a:solidFill>
                   <a:srgbClr val="FFFFFF"/>
                 </a:solidFill>
-                <a:latin typeface="Calibri"/>
-              </a:defRPr>
+                <a:latin typeface="Space Grotesk"/>
+              </a:rPr>
+              <a:t>Modelado Numérico del Fenómeno </a:t>
+            </a:r>
+            <a:r>
+              <a:rPr b="1" sz="3900" i="0" u="none">
+                <a:solidFill>
+                  <a:srgbClr val="FB7185"/>
+                </a:solidFill>
+                <a:latin typeface="Space Grotesk"/>
+              </a:rPr>
+              <a:t>'Rosa Pastel'</a:t>
+            </a:r>
+            <a:r>
+              <a:rPr b="1" sz="3900" i="0" u="none">
+                <a:solidFill>
+                  <a:srgbClr val="FFFFFF"/>
+                </a:solidFill>
+                <a:latin typeface="Space Grotesk"/>
+              </a:rPr>
+              <a:t> en Spotify México</a:t>
+            </a:r>
+          </a:p>
+        </p:txBody>
+      </p:sp>
+      <p:sp>
+        <p:nvSpPr>
+          <p:cNvPr id="6" name="TextBox 5"/>
+          <p:cNvSpPr txBox="1"/>
+          <p:nvPr/>
+        </p:nvSpPr>
+        <p:spPr>
+          <a:xfrm>
+            <a:off x="609600" y="3541365"/>
+            <a:ext cx="9239250" cy="571500"/>
+          </a:xfrm>
+          <a:prstGeom prst="rect">
+            <a:avLst/>
+          </a:prstGeom>
+          <a:noFill/>
+        </p:spPr>
+        <p:txBody>
+          <a:bodyPr wrap="square" lIns="0" rIns="0" tIns="0" bIns="0" anchor="t">
+            <a:spAutoFit/>
+          </a:bodyPr>
+          <a:lstStyle/>
+          <a:p>
+            <a:pPr algn="l">
+              <a:lnSpc>
+                <a:spcPts val="2250"/>
+              </a:lnSpc>
             </a:pPr>
             <a:r>
-              <a:t>Modelado Numérico del Resurgimiento de 'Rosa Pastel' en Spotify México (2023)</a:t>
-            </a:r>
-          </a:p>
-          <a:p>
-            <a:pPr>
-              <a:spcAft>
-                <a:spcPts val="4000"/>
-              </a:spcAft>
-              <a:defRPr sz="1500" i="1">
-                <a:solidFill>
-                  <a:srgbClr val="F2F2F2"/>
-                </a:solidFill>
-                <a:latin typeface="Calibri"/>
-              </a:defRPr>
-            </a:pPr>
-            <a:r>
-              <a:t>Ajuste de Curvas (Mínimos Cuadrados), Búsqueda de Raíces (Bisección vs. Newton-Raphson) y Diferenciación Numérica</a:t>
-            </a:r>
-          </a:p>
-          <a:p>
-            <a:pPr>
-              <a:defRPr sz="1300">
-                <a:solidFill>
-                  <a:srgbClr val="DCDCDC"/>
-                </a:solidFill>
-                <a:latin typeface="Calibri"/>
-              </a:defRPr>
-            </a:pPr>
-            <a:r>
-              <a:t>Autores: Pedro Gatti · Facundo Grillo · Gonzalo Marin   |   Docente: Ing. Carlos Arnaudo</a:t>
-            </a:r>
-            <a:br/>
-            <a:r>
-              <a:t>Ingeniería Informática   ·   Comisión 46324   ·   Octubre 2026</a:t>
+              <a:rPr b="0" sz="1500" i="0" u="none">
+                <a:solidFill>
+                  <a:srgbClr val="94A3B8"/>
+                </a:solidFill>
+                <a:latin typeface="Plus Jakarta Sans"/>
+              </a:rPr>
+              <a:t>Mínimos cuadrados con eliminación gaussiana, trazadora cúbica natural, Bisección vs. Newton-Raphson y diferenciación numérica sobre 47 semanas de datos reales.</a:t>
+            </a:r>
+          </a:p>
+        </p:txBody>
+      </p:sp>
+      <p:sp>
+        <p:nvSpPr>
+          <p:cNvPr id="7" name="TextBox 6"/>
+          <p:cNvSpPr txBox="1"/>
+          <p:nvPr/>
+        </p:nvSpPr>
+        <p:spPr>
+          <a:xfrm>
+            <a:off x="8896350" y="533400"/>
+            <a:ext cx="1738312" cy="171450"/>
+          </a:xfrm>
+          <a:prstGeom prst="rect">
+            <a:avLst/>
+          </a:prstGeom>
+          <a:noFill/>
+        </p:spPr>
+        <p:txBody>
+          <a:bodyPr wrap="none" lIns="0" rIns="0" tIns="0" bIns="0" anchor="t">
+            <a:spAutoFit/>
+          </a:bodyPr>
+          <a:lstStyle/>
+          <a:p>
+            <a:pPr algn="l"/>
+            <a:r>
+              <a:rPr b="1" sz="1050" i="0" u="none">
+                <a:solidFill>
+                  <a:srgbClr val="94A3B8"/>
+                </a:solidFill>
+                <a:latin typeface="Plus Jakarta Sans"/>
+              </a:rPr>
+              <a:t>Ingeniería Informática</a:t>
+            </a:r>
+          </a:p>
+        </p:txBody>
+      </p:sp>
+      <p:sp>
+        <p:nvSpPr>
+          <p:cNvPr id="8" name="TextBox 7"/>
+          <p:cNvSpPr txBox="1"/>
+          <p:nvPr/>
+        </p:nvSpPr>
+        <p:spPr>
+          <a:xfrm>
+            <a:off x="10553700" y="533400"/>
+            <a:ext cx="1314450" cy="171450"/>
+          </a:xfrm>
+          <a:prstGeom prst="rect">
+            <a:avLst/>
+          </a:prstGeom>
+          <a:noFill/>
+        </p:spPr>
+        <p:txBody>
+          <a:bodyPr wrap="none" lIns="0" rIns="0" tIns="0" bIns="0" anchor="t">
+            <a:spAutoFit/>
+          </a:bodyPr>
+          <a:lstStyle/>
+          <a:p>
+            <a:pPr algn="l"/>
+            <a:r>
+              <a:rPr b="1" sz="1050" i="0" u="none">
+                <a:solidFill>
+                  <a:srgbClr val="94A3B8"/>
+                </a:solidFill>
+                <a:latin typeface="Plus Jakarta Sans"/>
+              </a:rPr>
+              <a:t>Comisión 46324</a:t>
+            </a:r>
+          </a:p>
+        </p:txBody>
+      </p:sp>
+      <p:sp>
+        <p:nvSpPr>
+          <p:cNvPr id="9" name="TextBox 8"/>
+          <p:cNvSpPr txBox="1"/>
+          <p:nvPr/>
+        </p:nvSpPr>
+        <p:spPr>
+          <a:xfrm>
+            <a:off x="609600" y="5876925"/>
+            <a:ext cx="4452937" cy="171450"/>
+          </a:xfrm>
+          <a:prstGeom prst="rect">
+            <a:avLst/>
+          </a:prstGeom>
+          <a:noFill/>
+        </p:spPr>
+        <p:txBody>
+          <a:bodyPr wrap="none" lIns="0" rIns="0" tIns="0" bIns="0" anchor="t">
+            <a:spAutoFit/>
+          </a:bodyPr>
+          <a:lstStyle/>
+          <a:p>
+            <a:pPr algn="l"/>
+            <a:r>
+              <a:rPr b="1" sz="1050" i="0" u="none">
+                <a:solidFill>
+                  <a:srgbClr val="F43F5E"/>
+                </a:solidFill>
+                <a:latin typeface="Plus Jakarta Sans"/>
+              </a:rPr>
+              <a:t>EQUIPO DE INVESTIGACIÓN</a:t>
+            </a:r>
+          </a:p>
+        </p:txBody>
+      </p:sp>
+      <p:sp>
+        <p:nvSpPr>
+          <p:cNvPr id="10" name="TextBox 9"/>
+          <p:cNvSpPr txBox="1"/>
+          <p:nvPr/>
+        </p:nvSpPr>
+        <p:spPr>
+          <a:xfrm>
+            <a:off x="609600" y="6105525"/>
+            <a:ext cx="4452937" cy="219075"/>
+          </a:xfrm>
+          <a:prstGeom prst="rect">
+            <a:avLst/>
+          </a:prstGeom>
+          <a:noFill/>
+        </p:spPr>
+        <p:txBody>
+          <a:bodyPr wrap="none" lIns="0" rIns="0" tIns="0" bIns="0" anchor="t">
+            <a:spAutoFit/>
+          </a:bodyPr>
+          <a:lstStyle/>
+          <a:p>
+            <a:pPr algn="l"/>
+            <a:r>
+              <a:rPr b="1" sz="1350" i="0" u="none">
+                <a:solidFill>
+                  <a:srgbClr val="E2E8F0"/>
+                </a:solidFill>
+                <a:latin typeface="Plus Jakarta Sans"/>
+              </a:rPr>
+              <a:t>Pedro Gatti · Facundo Grillo · Gonzalo Marin</a:t>
+            </a:r>
+          </a:p>
+        </p:txBody>
+      </p:sp>
+      <p:sp>
+        <p:nvSpPr>
+          <p:cNvPr id="11" name="TextBox 10"/>
+          <p:cNvSpPr txBox="1"/>
+          <p:nvPr/>
+        </p:nvSpPr>
+        <p:spPr>
+          <a:xfrm>
+            <a:off x="7915275" y="5876925"/>
+            <a:ext cx="3667125" cy="171450"/>
+          </a:xfrm>
+          <a:prstGeom prst="rect">
+            <a:avLst/>
+          </a:prstGeom>
+          <a:noFill/>
+        </p:spPr>
+        <p:txBody>
+          <a:bodyPr wrap="none" lIns="0" rIns="0" tIns="0" bIns="0" anchor="t">
+            <a:spAutoFit/>
+          </a:bodyPr>
+          <a:lstStyle/>
+          <a:p>
+            <a:pPr algn="r"/>
+            <a:r>
+              <a:rPr b="1" sz="1050" i="0" u="none">
+                <a:solidFill>
+                  <a:srgbClr val="94A3B8"/>
+                </a:solidFill>
+                <a:latin typeface="Plus Jakarta Sans"/>
+              </a:rPr>
+              <a:t>CÁTEDRA DE MÉTODOS NUMÉRICOS</a:t>
+            </a:r>
+          </a:p>
+        </p:txBody>
+      </p:sp>
+      <p:sp>
+        <p:nvSpPr>
+          <p:cNvPr id="12" name="TextBox 11"/>
+          <p:cNvSpPr txBox="1"/>
+          <p:nvPr/>
+        </p:nvSpPr>
+        <p:spPr>
+          <a:xfrm>
+            <a:off x="7915275" y="6105525"/>
+            <a:ext cx="3667125" cy="219075"/>
+          </a:xfrm>
+          <a:prstGeom prst="rect">
+            <a:avLst/>
+          </a:prstGeom>
+          <a:noFill/>
+        </p:spPr>
+        <p:txBody>
+          <a:bodyPr wrap="none" lIns="0" rIns="0" tIns="0" bIns="0" anchor="t">
+            <a:spAutoFit/>
+          </a:bodyPr>
+          <a:lstStyle/>
+          <a:p>
+            <a:pPr algn="r"/>
+            <a:r>
+              <a:rPr b="0" sz="1350" i="0" u="none">
+                <a:solidFill>
+                  <a:srgbClr val="CBD5E1"/>
+                </a:solidFill>
+                <a:latin typeface="Plus Jakarta Sans"/>
+              </a:rPr>
+              <a:t>Docente: Ing. Carlos Arnaudo · 2026</a:t>
             </a:r>
           </a:p>
         </p:txBody>
@@ -3240,6 +3558,14 @@
 <file path=ppt/slides/slide10.xml><?xml version="1.0" encoding="utf-8"?>
 <p:sld xmlns:a="http://schemas.openxmlformats.org/drawingml/2006/main" xmlns:p="http://schemas.openxmlformats.org/presentationml/2006/main" xmlns:r="http://schemas.openxmlformats.org/officeDocument/2006/relationships">
   <p:cSld>
+    <p:bg>
+      <p:bgPr>
+        <a:solidFill>
+          <a:srgbClr val="FFFFFF"/>
+        </a:solidFill>
+        <a:effectLst/>
+      </p:bgPr>
+    </p:bg>
     <p:spTree>
       <p:nvGrpSpPr>
         <p:cNvPr id="1" name=""/>
@@ -3249,75 +3575,27 @@
       <p:grpSpPr/>
       <p:sp>
         <p:nvSpPr>
-          <p:cNvPr id="2" name="TextBox 1"/>
-          <p:cNvSpPr txBox="1"/>
-          <p:nvPr/>
-        </p:nvSpPr>
-        <p:spPr>
-          <a:xfrm>
-            <a:off x="731520" y="365760"/>
-            <a:ext cx="10698480" cy="1005840"/>
-          </a:xfrm>
-          <a:prstGeom prst="rect">
-            <a:avLst/>
-          </a:prstGeom>
-          <a:noFill/>
-        </p:spPr>
-        <p:txBody>
-          <a:bodyPr wrap="square" lIns="0" tIns="0" rIns="0" bIns="0">
-            <a:spAutoFit/>
-          </a:bodyPr>
-          <a:lstStyle/>
-          <a:p>
-            <a:pPr>
-              <a:defRPr sz="1100" b="1">
-                <a:solidFill>
-                  <a:srgbClr val="E91E63"/>
-                </a:solidFill>
-                <a:latin typeface="Calibri"/>
-              </a:defRPr>
-            </a:pPr>
-            <a:r>
-              <a:t>SÍNTESIS FINAL</a:t>
-            </a:r>
-          </a:p>
-          <a:p>
-            <a:pPr>
-              <a:defRPr sz="2300" b="1">
-                <a:solidFill>
-                  <a:srgbClr val="1F4E79"/>
-                </a:solidFill>
-                <a:latin typeface="Calibri"/>
-              </a:defRPr>
-            </a:pPr>
-            <a:r>
-              <a:t>Conclusiones del Proyecto Integrador</a:t>
-            </a:r>
-          </a:p>
-        </p:txBody>
-      </p:sp>
-      <p:sp>
-        <p:nvSpPr>
-          <p:cNvPr id="3" name="Rounded Rectangle 2"/>
+          <p:cNvPr id="2" name="Rounded Rectangle 1"/>
           <p:cNvSpPr/>
           <p:nvPr/>
         </p:nvSpPr>
         <p:spPr>
           <a:xfrm>
-            <a:off x="731520" y="1645920"/>
-            <a:ext cx="10698480" cy="4663440"/>
+            <a:off x="609600" y="1379190"/>
+            <a:ext cx="3454449" cy="1266825"/>
           </a:xfrm>
           <a:prstGeom prst="roundRect">
-            <a:avLst/>
+            <a:avLst>
+              <a:gd name="adj" fmla="val 12030"/>
+            </a:avLst>
           </a:prstGeom>
           <a:solidFill>
-            <a:srgbClr val="F5F7FA"/>
+            <a:srgbClr val="FFF1F2"/>
           </a:solidFill>
           <a:ln>
-            <a:solidFill>
-              <a:srgbClr val="D9E1F2"/>
-            </a:solidFill>
+            <a:noFill/>
           </a:ln>
+          <a:effectLst/>
         </p:spPr>
         <p:style>
           <a:lnRef idx="1">
@@ -3334,58 +3612,713 @@
           </a:fontRef>
         </p:style>
         <p:txBody>
-          <a:bodyPr rtlCol="0" anchor="ctr" wrap="square" lIns="365760" tIns="365760"/>
+          <a:bodyPr rtlCol="0" anchor="ctr"/>
+          <a:lstStyle/>
+          <a:p>
+            <a:pPr algn="ctr"/>
+          </a:p>
+        </p:txBody>
+      </p:sp>
+      <p:sp>
+        <p:nvSpPr>
+          <p:cNvPr id="3" name="Rounded Rectangle 2"/>
+          <p:cNvSpPr/>
+          <p:nvPr/>
+        </p:nvSpPr>
+        <p:spPr>
+          <a:xfrm>
+            <a:off x="4368849" y="1379190"/>
+            <a:ext cx="3454449" cy="1266825"/>
+          </a:xfrm>
+          <a:prstGeom prst="roundRect">
+            <a:avLst>
+              <a:gd name="adj" fmla="val 12030"/>
+            </a:avLst>
+          </a:prstGeom>
+          <a:solidFill>
+            <a:srgbClr val="F0F9FF"/>
+          </a:solidFill>
+          <a:ln>
+            <a:noFill/>
+          </a:ln>
+          <a:effectLst/>
+        </p:spPr>
+        <p:style>
+          <a:lnRef idx="1">
+            <a:schemeClr val="accent1"/>
+          </a:lnRef>
+          <a:fillRef idx="3">
+            <a:schemeClr val="accent1"/>
+          </a:fillRef>
+          <a:effectRef idx="2">
+            <a:schemeClr val="accent1"/>
+          </a:effectRef>
+          <a:fontRef idx="minor">
+            <a:schemeClr val="lt1"/>
+          </a:fontRef>
+        </p:style>
+        <p:txBody>
+          <a:bodyPr rtlCol="0" anchor="ctr"/>
+          <a:lstStyle/>
+          <a:p>
+            <a:pPr algn="ctr"/>
+          </a:p>
+        </p:txBody>
+      </p:sp>
+      <p:sp>
+        <p:nvSpPr>
+          <p:cNvPr id="4" name="Rounded Rectangle 3"/>
+          <p:cNvSpPr/>
+          <p:nvPr/>
+        </p:nvSpPr>
+        <p:spPr>
+          <a:xfrm>
+            <a:off x="8128099" y="1379190"/>
+            <a:ext cx="3454449" cy="1266825"/>
+          </a:xfrm>
+          <a:prstGeom prst="roundRect">
+            <a:avLst>
+              <a:gd name="adj" fmla="val 12030"/>
+            </a:avLst>
+          </a:prstGeom>
+          <a:solidFill>
+            <a:srgbClr val="F0FDF4"/>
+          </a:solidFill>
+          <a:ln>
+            <a:noFill/>
+          </a:ln>
+          <a:effectLst/>
+        </p:spPr>
+        <p:style>
+          <a:lnRef idx="1">
+            <a:schemeClr val="accent1"/>
+          </a:lnRef>
+          <a:fillRef idx="3">
+            <a:schemeClr val="accent1"/>
+          </a:fillRef>
+          <a:effectRef idx="2">
+            <a:schemeClr val="accent1"/>
+          </a:effectRef>
+          <a:fontRef idx="minor">
+            <a:schemeClr val="lt1"/>
+          </a:fontRef>
+        </p:style>
+        <p:txBody>
+          <a:bodyPr rtlCol="0" anchor="ctr"/>
+          <a:lstStyle/>
+          <a:p>
+            <a:pPr algn="ctr"/>
+          </a:p>
+        </p:txBody>
+      </p:sp>
+      <p:sp>
+        <p:nvSpPr>
+          <p:cNvPr id="5" name="Rectangle 4"/>
+          <p:cNvSpPr/>
+          <p:nvPr/>
+        </p:nvSpPr>
+        <p:spPr>
+          <a:xfrm>
+            <a:off x="609600" y="4137570"/>
+            <a:ext cx="5372100" cy="1076325"/>
+          </a:xfrm>
+          <a:prstGeom prst="rect">
+            <a:avLst/>
+          </a:prstGeom>
+          <a:solidFill>
+            <a:srgbClr val="F8FAFC"/>
+          </a:solidFill>
+          <a:ln>
+            <a:noFill/>
+          </a:ln>
+          <a:effectLst/>
+        </p:spPr>
+        <p:style>
+          <a:lnRef idx="1">
+            <a:schemeClr val="accent1"/>
+          </a:lnRef>
+          <a:fillRef idx="3">
+            <a:schemeClr val="accent1"/>
+          </a:fillRef>
+          <a:effectRef idx="2">
+            <a:schemeClr val="accent1"/>
+          </a:effectRef>
+          <a:fontRef idx="minor">
+            <a:schemeClr val="lt1"/>
+          </a:fontRef>
+        </p:style>
+        <p:txBody>
+          <a:bodyPr rtlCol="0" anchor="ctr"/>
+          <a:lstStyle/>
+          <a:p>
+            <a:pPr algn="ctr"/>
+          </a:p>
+        </p:txBody>
+      </p:sp>
+      <p:sp>
+        <p:nvSpPr>
+          <p:cNvPr id="6" name="Rectangle 5"/>
+          <p:cNvSpPr/>
+          <p:nvPr/>
+        </p:nvSpPr>
+        <p:spPr>
+          <a:xfrm>
+            <a:off x="6210300" y="4137570"/>
+            <a:ext cx="5372100" cy="1076325"/>
+          </a:xfrm>
+          <a:prstGeom prst="rect">
+            <a:avLst/>
+          </a:prstGeom>
+          <a:solidFill>
+            <a:srgbClr val="F8FAFC"/>
+          </a:solidFill>
+          <a:ln>
+            <a:noFill/>
+          </a:ln>
+          <a:effectLst/>
+        </p:spPr>
+        <p:style>
+          <a:lnRef idx="1">
+            <a:schemeClr val="accent1"/>
+          </a:lnRef>
+          <a:fillRef idx="3">
+            <a:schemeClr val="accent1"/>
+          </a:fillRef>
+          <a:effectRef idx="2">
+            <a:schemeClr val="accent1"/>
+          </a:effectRef>
+          <a:fontRef idx="minor">
+            <a:schemeClr val="lt1"/>
+          </a:fontRef>
+        </p:style>
+        <p:txBody>
+          <a:bodyPr rtlCol="0" anchor="ctr"/>
+          <a:lstStyle/>
+          <a:p>
+            <a:pPr algn="ctr"/>
+          </a:p>
+        </p:txBody>
+      </p:sp>
+      <p:sp>
+        <p:nvSpPr>
+          <p:cNvPr id="7" name="Rectangle 6"/>
+          <p:cNvSpPr/>
+          <p:nvPr/>
+        </p:nvSpPr>
+        <p:spPr>
+          <a:xfrm>
+            <a:off x="609600" y="4137570"/>
+            <a:ext cx="38100" cy="1076325"/>
+          </a:xfrm>
+          <a:prstGeom prst="rect">
+            <a:avLst/>
+          </a:prstGeom>
+          <a:solidFill>
+            <a:srgbClr val="E11D48"/>
+          </a:solidFill>
+          <a:ln>
+            <a:noFill/>
+          </a:ln>
+          <a:effectLst/>
+        </p:spPr>
+        <p:style>
+          <a:lnRef idx="1">
+            <a:schemeClr val="accent1"/>
+          </a:lnRef>
+          <a:fillRef idx="3">
+            <a:schemeClr val="accent1"/>
+          </a:fillRef>
+          <a:effectRef idx="2">
+            <a:schemeClr val="accent1"/>
+          </a:effectRef>
+          <a:fontRef idx="minor">
+            <a:schemeClr val="lt1"/>
+          </a:fontRef>
+        </p:style>
+        <p:txBody>
+          <a:bodyPr rtlCol="0" anchor="ctr"/>
+          <a:lstStyle/>
+          <a:p>
+            <a:pPr algn="ctr"/>
+          </a:p>
+        </p:txBody>
+      </p:sp>
+      <p:sp>
+        <p:nvSpPr>
+          <p:cNvPr id="8" name="Rectangle 7"/>
+          <p:cNvSpPr/>
+          <p:nvPr/>
+        </p:nvSpPr>
+        <p:spPr>
+          <a:xfrm>
+            <a:off x="6210300" y="4137570"/>
+            <a:ext cx="38100" cy="1076325"/>
+          </a:xfrm>
+          <a:prstGeom prst="rect">
+            <a:avLst/>
+          </a:prstGeom>
+          <a:solidFill>
+            <a:srgbClr val="0284C7"/>
+          </a:solidFill>
+          <a:ln>
+            <a:noFill/>
+          </a:ln>
+          <a:effectLst/>
+        </p:spPr>
+        <p:style>
+          <a:lnRef idx="1">
+            <a:schemeClr val="accent1"/>
+          </a:lnRef>
+          <a:fillRef idx="3">
+            <a:schemeClr val="accent1"/>
+          </a:fillRef>
+          <a:effectRef idx="2">
+            <a:schemeClr val="accent1"/>
+          </a:effectRef>
+          <a:fontRef idx="minor">
+            <a:schemeClr val="lt1"/>
+          </a:fontRef>
+        </p:style>
+        <p:txBody>
+          <a:bodyPr rtlCol="0" anchor="ctr"/>
+          <a:lstStyle/>
+          <a:p>
+            <a:pPr algn="ctr"/>
+          </a:p>
+        </p:txBody>
+      </p:sp>
+      <p:sp>
+        <p:nvSpPr>
+          <p:cNvPr id="9" name="TextBox 8"/>
+          <p:cNvSpPr txBox="1"/>
+          <p:nvPr/>
+        </p:nvSpPr>
+        <p:spPr>
+          <a:xfrm>
+            <a:off x="609600" y="457200"/>
+            <a:ext cx="11582400" cy="171450"/>
+          </a:xfrm>
+          <a:prstGeom prst="rect">
+            <a:avLst/>
+          </a:prstGeom>
+          <a:noFill/>
+        </p:spPr>
+        <p:txBody>
+          <a:bodyPr wrap="none" lIns="0" rIns="0" tIns="0" bIns="0" anchor="t">
+            <a:spAutoFit/>
+          </a:bodyPr>
+          <a:lstStyle/>
+          <a:p>
+            <a:pPr algn="l"/>
+            <a:r>
+              <a:rPr b="1" sz="1050" i="0" u="none">
+                <a:solidFill>
+                  <a:srgbClr val="E11D48"/>
+                </a:solidFill>
+                <a:latin typeface="Plus Jakarta Sans"/>
+              </a:rPr>
+              <a:t>SÍNTESIS DEL PROYECTO</a:t>
+            </a:r>
+          </a:p>
+        </p:txBody>
+      </p:sp>
+      <p:sp>
+        <p:nvSpPr>
+          <p:cNvPr id="10" name="TextBox 9"/>
+          <p:cNvSpPr txBox="1"/>
+          <p:nvPr/>
+        </p:nvSpPr>
+        <p:spPr>
+          <a:xfrm>
+            <a:off x="609600" y="685800"/>
+            <a:ext cx="11582400" cy="388590"/>
+          </a:xfrm>
+          <a:prstGeom prst="rect">
+            <a:avLst/>
+          </a:prstGeom>
+          <a:noFill/>
+        </p:spPr>
+        <p:txBody>
+          <a:bodyPr wrap="none" lIns="0" rIns="0" tIns="0" bIns="0" anchor="t">
+            <a:spAutoFit/>
+          </a:bodyPr>
+          <a:lstStyle/>
+          <a:p>
+            <a:pPr algn="l">
+              <a:lnSpc>
+                <a:spcPts val="3060"/>
+              </a:lnSpc>
+            </a:pPr>
+            <a:r>
+              <a:rPr b="1" sz="2550" i="0" u="none">
+                <a:solidFill>
+                  <a:srgbClr val="0F172A"/>
+                </a:solidFill>
+                <a:latin typeface="Space Grotesk"/>
+              </a:rPr>
+              <a:t>Conclusiones y Aportes a la Ingeniería</a:t>
+            </a:r>
+          </a:p>
+        </p:txBody>
+      </p:sp>
+      <p:sp>
+        <p:nvSpPr>
+          <p:cNvPr id="11" name="TextBox 10"/>
+          <p:cNvSpPr txBox="1"/>
+          <p:nvPr/>
+        </p:nvSpPr>
+        <p:spPr>
+          <a:xfrm>
+            <a:off x="511168" y="1645890"/>
+            <a:ext cx="3651312" cy="457200"/>
+          </a:xfrm>
+          <a:prstGeom prst="rect">
+            <a:avLst/>
+          </a:prstGeom>
+          <a:noFill/>
+        </p:spPr>
+        <p:txBody>
+          <a:bodyPr wrap="none" lIns="0" rIns="0" tIns="0" bIns="0" anchor="t">
+            <a:spAutoFit/>
+          </a:bodyPr>
           <a:lstStyle/>
           <a:p>
             <a:pPr algn="ctr">
-              <a:spcAft>
-                <a:spcPts val="1000"/>
-              </a:spcAft>
-              <a:defRPr sz="1700" b="1">
-                <a:solidFill>
-                  <a:srgbClr val="1F4E79"/>
-                </a:solidFill>
-              </a:defRPr>
+              <a:lnSpc>
+                <a:spcPts val="3600"/>
+              </a:lnSpc>
             </a:pPr>
             <a:r>
-              <a:t>Principales Aprendizajes y Conclusiones:</a:t>
-            </a:r>
-          </a:p>
-          <a:p>
-            <a:pPr>
-              <a:defRPr sz="1100">
-                <a:solidFill>
-                  <a:srgbClr val="282828"/>
-                </a:solidFill>
-              </a:defRPr>
+              <a:rPr b="1" sz="3600" i="0" u="none">
+                <a:solidFill>
+                  <a:srgbClr val="E11D48"/>
+                </a:solidFill>
+                <a:latin typeface="Plus Jakarta Sans"/>
+              </a:rPr>
+              <a:t>99.95%</a:t>
+            </a:r>
+          </a:p>
+        </p:txBody>
+      </p:sp>
+      <p:sp>
+        <p:nvSpPr>
+          <p:cNvPr id="12" name="TextBox 11"/>
+          <p:cNvSpPr txBox="1"/>
+          <p:nvPr/>
+        </p:nvSpPr>
+        <p:spPr>
+          <a:xfrm>
+            <a:off x="511168" y="2179290"/>
+            <a:ext cx="3651312" cy="200025"/>
+          </a:xfrm>
+          <a:prstGeom prst="rect">
+            <a:avLst/>
+          </a:prstGeom>
+          <a:noFill/>
+        </p:spPr>
+        <p:txBody>
+          <a:bodyPr wrap="none" lIns="0" rIns="0" tIns="0" bIns="0" anchor="t">
+            <a:spAutoFit/>
+          </a:bodyPr>
+          <a:lstStyle/>
+          <a:p>
+            <a:pPr algn="ctr"/>
+            <a:r>
+              <a:rPr b="1" sz="1200" i="0" u="none">
+                <a:solidFill>
+                  <a:srgbClr val="475569"/>
+                </a:solidFill>
+                <a:latin typeface="Plus Jakarta Sans"/>
+              </a:rPr>
+              <a:t>Varianza explicada por el ajuste</a:t>
+            </a:r>
+          </a:p>
+        </p:txBody>
+      </p:sp>
+      <p:sp>
+        <p:nvSpPr>
+          <p:cNvPr id="13" name="TextBox 12"/>
+          <p:cNvSpPr txBox="1"/>
+          <p:nvPr/>
+        </p:nvSpPr>
+        <p:spPr>
+          <a:xfrm>
+            <a:off x="4270418" y="1645890"/>
+            <a:ext cx="3651312" cy="457200"/>
+          </a:xfrm>
+          <a:prstGeom prst="rect">
+            <a:avLst/>
+          </a:prstGeom>
+          <a:noFill/>
+        </p:spPr>
+        <p:txBody>
+          <a:bodyPr wrap="none" lIns="0" rIns="0" tIns="0" bIns="0" anchor="t">
+            <a:spAutoFit/>
+          </a:bodyPr>
+          <a:lstStyle/>
+          <a:p>
+            <a:pPr algn="ctr">
+              <a:lnSpc>
+                <a:spcPts val="3600"/>
+              </a:lnSpc>
             </a:pPr>
             <a:r>
-              <a:t>1. Ajuste confiable: La regresión polinómica cúbica ofreció una muy buena aproximación global (R² = 0.9995, Sy/x = 0.927 M) para representar la acumulación de reproducciones a lo largo del año.</a:t>
-            </a:r>
-            <a:br/>
-            <a:br/>
-            <a:r>
-              <a:t>2. Eficiencia comparada de raíces: Newton-Raphson demostró ser 5 veces más rápido que Bisección (3 iteraciones frente a 15) para alcanzar la tolerancia de 10⁻⁴ %, convergiendo a la misma raíz (t* ≈ 35.52 semanas).</a:t>
-            </a:r>
-            <a:br/>
-            <a:br/>
-            <a:r>
-              <a:t>3. Validación del modelo: La discrepancia de 2.75 días respecto a la interpolación lineal directa confirma la coherencia física y estadística del ajuste dentro del error estándar.</a:t>
-            </a:r>
-            <a:br/>
-            <a:br/>
-            <a:r>
-              <a:t>4. Dinámica del consumo: La diferenciación numérica reveló que el pico real de streams ocurrió en la semana 26 (fines de julio de 2023, 4.171 M), y evidenció cómo el modelo cúbico suaviza la respuesta temporal.</a:t>
-            </a:r>
-            <a:br/>
-            <a:br/>
-            <a:r>
-              <a:t>5. Aporte a la ingeniería: El modelado numérico permite convertir datos discretos de telemetría en funciones continuas útiles para dimensionar infraestructura y servidores de streaming ante variaciones de demanda.</a:t>
-            </a:r>
-            <a:br/>
-            <a:br/>
-            <a:r>
-              <a:t>6. Generalización y validación automática: El método resultó reutilizable para otras canciones; demostró que un R² alto (&gt; 0.996) no basta para validar un modelo físico y que el sistema alerta cuándo la cúbica no aplica (estrenos con a &gt; 0).</a:t>
+              <a:rPr b="1" sz="3600" i="0" u="none">
+                <a:solidFill>
+                  <a:srgbClr val="0284C7"/>
+                </a:solidFill>
+                <a:latin typeface="Plus Jakarta Sans"/>
+              </a:rPr>
+              <a:t>3 vs 15</a:t>
+            </a:r>
+          </a:p>
+        </p:txBody>
+      </p:sp>
+      <p:sp>
+        <p:nvSpPr>
+          <p:cNvPr id="14" name="TextBox 13"/>
+          <p:cNvSpPr txBox="1"/>
+          <p:nvPr/>
+        </p:nvSpPr>
+        <p:spPr>
+          <a:xfrm>
+            <a:off x="4270418" y="2179290"/>
+            <a:ext cx="3651312" cy="200025"/>
+          </a:xfrm>
+          <a:prstGeom prst="rect">
+            <a:avLst/>
+          </a:prstGeom>
+          <a:noFill/>
+        </p:spPr>
+        <p:txBody>
+          <a:bodyPr wrap="none" lIns="0" rIns="0" tIns="0" bIns="0" anchor="t">
+            <a:spAutoFit/>
+          </a:bodyPr>
+          <a:lstStyle/>
+          <a:p>
+            <a:pPr algn="ctr"/>
+            <a:r>
+              <a:rPr b="1" sz="1200" i="0" u="none">
+                <a:solidFill>
+                  <a:srgbClr val="475569"/>
+                </a:solidFill>
+                <a:latin typeface="Plus Jakarta Sans"/>
+              </a:rPr>
+              <a:t>Iteraciones: Newton-Raphson vs. Bisección</a:t>
+            </a:r>
+          </a:p>
+        </p:txBody>
+      </p:sp>
+      <p:sp>
+        <p:nvSpPr>
+          <p:cNvPr id="15" name="TextBox 14"/>
+          <p:cNvSpPr txBox="1"/>
+          <p:nvPr/>
+        </p:nvSpPr>
+        <p:spPr>
+          <a:xfrm>
+            <a:off x="8029668" y="1645890"/>
+            <a:ext cx="3651312" cy="457200"/>
+          </a:xfrm>
+          <a:prstGeom prst="rect">
+            <a:avLst/>
+          </a:prstGeom>
+          <a:noFill/>
+        </p:spPr>
+        <p:txBody>
+          <a:bodyPr wrap="none" lIns="0" rIns="0" tIns="0" bIns="0" anchor="t">
+            <a:spAutoFit/>
+          </a:bodyPr>
+          <a:lstStyle/>
+          <a:p>
+            <a:pPr algn="ctr">
+              <a:lnSpc>
+                <a:spcPts val="3600"/>
+              </a:lnSpc>
+            </a:pPr>
+            <a:r>
+              <a:rPr b="1" sz="3600" i="0" u="none">
+                <a:solidFill>
+                  <a:srgbClr val="16A34A"/>
+                </a:solidFill>
+                <a:latin typeface="Plus Jakarta Sans"/>
+              </a:rPr>
+              <a:t>29/09/2023</a:t>
+            </a:r>
+          </a:p>
+        </p:txBody>
+      </p:sp>
+      <p:sp>
+        <p:nvSpPr>
+          <p:cNvPr id="16" name="TextBox 15"/>
+          <p:cNvSpPr txBox="1"/>
+          <p:nvPr/>
+        </p:nvSpPr>
+        <p:spPr>
+          <a:xfrm>
+            <a:off x="8029668" y="2179290"/>
+            <a:ext cx="3651312" cy="200025"/>
+          </a:xfrm>
+          <a:prstGeom prst="rect">
+            <a:avLst/>
+          </a:prstGeom>
+          <a:noFill/>
+        </p:spPr>
+        <p:txBody>
+          <a:bodyPr wrap="none" lIns="0" rIns="0" tIns="0" bIns="0" anchor="t">
+            <a:spAutoFit/>
+          </a:bodyPr>
+          <a:lstStyle/>
+          <a:p>
+            <a:pPr algn="ctr"/>
+            <a:r>
+              <a:rPr b="1" sz="1200" i="0" u="none">
+                <a:solidFill>
+                  <a:srgbClr val="475569"/>
+                </a:solidFill>
+                <a:latin typeface="Plus Jakarta Sans"/>
+              </a:rPr>
+              <a:t>Hito de 100 M (trazadora, ±2 días)</a:t>
+            </a:r>
+          </a:p>
+        </p:txBody>
+      </p:sp>
+      <p:sp>
+        <p:nvSpPr>
+          <p:cNvPr id="17" name="TextBox 16"/>
+          <p:cNvSpPr txBox="1"/>
+          <p:nvPr/>
+        </p:nvSpPr>
+        <p:spPr>
+          <a:xfrm>
+            <a:off x="876300" y="4328070"/>
+            <a:ext cx="6400800" cy="219075"/>
+          </a:xfrm>
+          <a:prstGeom prst="rect">
+            <a:avLst/>
+          </a:prstGeom>
+          <a:noFill/>
+        </p:spPr>
+        <p:txBody>
+          <a:bodyPr wrap="none" lIns="0" rIns="0" tIns="0" bIns="0" anchor="t">
+            <a:spAutoFit/>
+          </a:bodyPr>
+          <a:lstStyle/>
+          <a:p>
+            <a:pPr algn="l"/>
+            <a:r>
+              <a:rPr b="1" sz="1350" i="0" u="none">
+                <a:solidFill>
+                  <a:srgbClr val="0F172A"/>
+                </a:solidFill>
+                <a:latin typeface="Space Grotesk"/>
+              </a:rPr>
+              <a:t>Modelado Continuo Fiable</a:t>
+            </a:r>
+          </a:p>
+        </p:txBody>
+      </p:sp>
+      <p:sp>
+        <p:nvSpPr>
+          <p:cNvPr id="18" name="TextBox 17"/>
+          <p:cNvSpPr txBox="1"/>
+          <p:nvPr/>
+        </p:nvSpPr>
+        <p:spPr>
+          <a:xfrm>
+            <a:off x="876300" y="4585245"/>
+            <a:ext cx="4972050" cy="438150"/>
+          </a:xfrm>
+          <a:prstGeom prst="rect">
+            <a:avLst/>
+          </a:prstGeom>
+          <a:noFill/>
+        </p:spPr>
+        <p:txBody>
+          <a:bodyPr wrap="square" lIns="0" rIns="0" tIns="0" bIns="0" anchor="t">
+            <a:spAutoFit/>
+          </a:bodyPr>
+          <a:lstStyle/>
+          <a:p>
+            <a:pPr algn="l"/>
+            <a:r>
+              <a:rPr b="0" sz="1350" i="0" u="none">
+                <a:solidFill>
+                  <a:srgbClr val="64748B"/>
+                </a:solidFill>
+                <a:latin typeface="Plus Jakarta Sans"/>
+              </a:rPr>
+              <a:t>La regresión capta la tendencia, la trazadora respeta los datos y Δt cuantifica el error.</a:t>
+            </a:r>
+          </a:p>
+        </p:txBody>
+      </p:sp>
+      <p:sp>
+        <p:nvSpPr>
+          <p:cNvPr id="19" name="TextBox 18"/>
+          <p:cNvSpPr txBox="1"/>
+          <p:nvPr/>
+        </p:nvSpPr>
+        <p:spPr>
+          <a:xfrm>
+            <a:off x="6477000" y="4328070"/>
+            <a:ext cx="5715000" cy="219075"/>
+          </a:xfrm>
+          <a:prstGeom prst="rect">
+            <a:avLst/>
+          </a:prstGeom>
+          <a:noFill/>
+        </p:spPr>
+        <p:txBody>
+          <a:bodyPr wrap="none" lIns="0" rIns="0" tIns="0" bIns="0" anchor="t">
+            <a:spAutoFit/>
+          </a:bodyPr>
+          <a:lstStyle/>
+          <a:p>
+            <a:pPr algn="l"/>
+            <a:r>
+              <a:rPr b="1" sz="1350" i="0" u="none">
+                <a:solidFill>
+                  <a:srgbClr val="0F172A"/>
+                </a:solidFill>
+                <a:latin typeface="Space Grotesk"/>
+              </a:rPr>
+              <a:t>Previsión de Servidores Cloud</a:t>
+            </a:r>
+          </a:p>
+        </p:txBody>
+      </p:sp>
+      <p:sp>
+        <p:nvSpPr>
+          <p:cNvPr id="20" name="TextBox 19"/>
+          <p:cNvSpPr txBox="1"/>
+          <p:nvPr/>
+        </p:nvSpPr>
+        <p:spPr>
+          <a:xfrm>
+            <a:off x="6477000" y="4585245"/>
+            <a:ext cx="4972050" cy="438150"/>
+          </a:xfrm>
+          <a:prstGeom prst="rect">
+            <a:avLst/>
+          </a:prstGeom>
+          <a:noFill/>
+        </p:spPr>
+        <p:txBody>
+          <a:bodyPr wrap="square" lIns="0" rIns="0" tIns="0" bIns="0" anchor="t">
+            <a:spAutoFit/>
+          </a:bodyPr>
+          <a:lstStyle/>
+          <a:p>
+            <a:pPr algn="l"/>
+            <a:r>
+              <a:rPr b="0" sz="1350" i="0" u="none">
+                <a:solidFill>
+                  <a:srgbClr val="64748B"/>
+                </a:solidFill>
+                <a:latin typeface="Plus Jakarta Sans"/>
+              </a:rPr>
+              <a:t>Permite anticipar requerimientos de streaming y tráfico de red en picos virales.</a:t>
             </a:r>
           </a:p>
         </p:txBody>
@@ -3401,6 +4334,14 @@
 <file path=ppt/slides/slide11.xml><?xml version="1.0" encoding="utf-8"?>
 <p:sld xmlns:a="http://schemas.openxmlformats.org/drawingml/2006/main" xmlns:p="http://schemas.openxmlformats.org/presentationml/2006/main" xmlns:r="http://schemas.openxmlformats.org/officeDocument/2006/relationships">
   <p:cSld>
+    <p:bg>
+      <p:bgPr>
+        <a:solidFill>
+          <a:srgbClr val="0F172A"/>
+        </a:solidFill>
+        <a:effectLst/>
+      </p:bgPr>
+    </p:bg>
     <p:spTree>
       <p:nvGrpSpPr>
         <p:cNvPr id="1" name=""/>
@@ -3410,24 +4351,27 @@
       <p:grpSpPr/>
       <p:sp>
         <p:nvSpPr>
-          <p:cNvPr id="2" name="Rectangle 1"/>
+          <p:cNvPr id="2" name="Rounded Rectangle 1"/>
           <p:cNvSpPr/>
           <p:nvPr/>
         </p:nvSpPr>
         <p:spPr>
           <a:xfrm>
-            <a:off x="0" y="0"/>
-            <a:ext cx="12191695" cy="6858000"/>
-          </a:xfrm>
-          <a:prstGeom prst="rect">
-            <a:avLst/>
+            <a:off x="3581400" y="4007048"/>
+            <a:ext cx="5029200" cy="600075"/>
+          </a:xfrm>
+          <a:prstGeom prst="roundRect">
+            <a:avLst>
+              <a:gd name="adj" fmla="val 22222"/>
+            </a:avLst>
           </a:prstGeom>
           <a:solidFill>
-            <a:srgbClr val="1F4E79"/>
+            <a:srgbClr val="1E293B"/>
           </a:solidFill>
           <a:ln>
             <a:noFill/>
           </a:ln>
+          <a:effectLst/>
         </p:spPr>
         <p:style>
           <a:lnRef idx="1">
@@ -3459,63 +4403,1749 @@
         </p:nvSpPr>
         <p:spPr>
           <a:xfrm>
-            <a:off x="1371600" y="2011680"/>
-            <a:ext cx="9418320" cy="3200400"/>
-          </a:xfrm>
-          <a:prstGeom prst="rect">
-            <a:avLst/>
-          </a:prstGeom>
-          <a:noFill/>
-        </p:spPr>
-        <p:txBody>
-          <a:bodyPr wrap="square">
-            <a:spAutoFit/>
-          </a:bodyPr>
-          <a:lstStyle/>
-          <a:p>
-            <a:pPr>
-              <a:spcAft>
-                <a:spcPts val="2000"/>
-              </a:spcAft>
-              <a:defRPr sz="3600" b="1">
+            <a:off x="4119562" y="1812577"/>
+            <a:ext cx="3952875" cy="171450"/>
+          </a:xfrm>
+          <a:prstGeom prst="rect">
+            <a:avLst/>
+          </a:prstGeom>
+          <a:noFill/>
+        </p:spPr>
+        <p:txBody>
+          <a:bodyPr wrap="none" lIns="0" rIns="0" tIns="0" bIns="0" anchor="t">
+            <a:spAutoFit/>
+          </a:bodyPr>
+          <a:lstStyle/>
+          <a:p>
+            <a:pPr algn="ctr"/>
+            <a:r>
+              <a:rPr b="1" sz="1050" i="0" u="none">
+                <a:solidFill>
+                  <a:srgbClr val="FB7185"/>
+                </a:solidFill>
+                <a:latin typeface="Plus Jakarta Sans"/>
+              </a:rPr>
+              <a:t>TALLER DE MÉTODOS NUMÉRICOS 2026</a:t>
+            </a:r>
+          </a:p>
+        </p:txBody>
+      </p:sp>
+      <p:sp>
+        <p:nvSpPr>
+          <p:cNvPr id="4" name="TextBox 3"/>
+          <p:cNvSpPr txBox="1"/>
+          <p:nvPr/>
+        </p:nvSpPr>
+        <p:spPr>
+          <a:xfrm>
+            <a:off x="2814339" y="2136427"/>
+            <a:ext cx="6563320" cy="670470"/>
+          </a:xfrm>
+          <a:prstGeom prst="rect">
+            <a:avLst/>
+          </a:prstGeom>
+          <a:noFill/>
+        </p:spPr>
+        <p:txBody>
+          <a:bodyPr wrap="none" lIns="0" rIns="0" tIns="0" bIns="0" anchor="t">
+            <a:spAutoFit/>
+          </a:bodyPr>
+          <a:lstStyle/>
+          <a:p>
+            <a:pPr algn="ctr">
+              <a:lnSpc>
+                <a:spcPts val="5280"/>
+              </a:lnSpc>
+            </a:pPr>
+            <a:r>
+              <a:rPr b="1" sz="4800" i="0" u="none">
                 <a:solidFill>
                   <a:srgbClr val="FFFFFF"/>
                 </a:solidFill>
-              </a:defRPr>
+                <a:latin typeface="Space Grotesk"/>
+              </a:rPr>
+              <a:t>¡Muchas Gracias!</a:t>
+            </a:r>
+          </a:p>
+        </p:txBody>
+      </p:sp>
+      <p:sp>
+        <p:nvSpPr>
+          <p:cNvPr id="5" name="TextBox 4"/>
+          <p:cNvSpPr txBox="1"/>
+          <p:nvPr/>
+        </p:nvSpPr>
+        <p:spPr>
+          <a:xfrm>
+            <a:off x="2226468" y="2997398"/>
+            <a:ext cx="7739062" cy="628650"/>
+          </a:xfrm>
+          <a:prstGeom prst="rect">
+            <a:avLst/>
+          </a:prstGeom>
+          <a:noFill/>
+        </p:spPr>
+        <p:txBody>
+          <a:bodyPr wrap="square" lIns="0" rIns="0" tIns="0" bIns="0" anchor="t">
+            <a:spAutoFit/>
+          </a:bodyPr>
+          <a:lstStyle/>
+          <a:p>
+            <a:pPr algn="ctr">
+              <a:lnSpc>
+                <a:spcPts val="2475"/>
+              </a:lnSpc>
             </a:pPr>
             <a:r>
-              <a:t>¡Muchas Gracias por su atención!</a:t>
-            </a:r>
-          </a:p>
-          <a:p>
-            <a:pPr>
-              <a:spcAft>
+              <a:rPr b="0" sz="1650" i="0" u="none">
+                <a:solidFill>
+                  <a:srgbClr val="94A3B8"/>
+                </a:solidFill>
+                <a:latin typeface="Plus Jakarta Sans"/>
+              </a:rPr>
+              <a:t>¿Preguntas o comentarios sobre el modelo analítico y la convergencia de algoritmos?</a:t>
+            </a:r>
+          </a:p>
+        </p:txBody>
+      </p:sp>
+      <p:sp>
+        <p:nvSpPr>
+          <p:cNvPr id="6" name="TextBox 5"/>
+          <p:cNvSpPr txBox="1"/>
+          <p:nvPr/>
+        </p:nvSpPr>
+        <p:spPr>
+          <a:xfrm>
+            <a:off x="3893343" y="4873823"/>
+            <a:ext cx="4405312" cy="171450"/>
+          </a:xfrm>
+          <a:prstGeom prst="rect">
+            <a:avLst/>
+          </a:prstGeom>
+          <a:noFill/>
+        </p:spPr>
+        <p:txBody>
+          <a:bodyPr wrap="none" lIns="0" rIns="0" tIns="0" bIns="0" anchor="t">
+            <a:spAutoFit/>
+          </a:bodyPr>
+          <a:lstStyle/>
+          <a:p>
+            <a:pPr algn="ctr"/>
+            <a:r>
+              <a:rPr b="0" sz="1050" i="0" u="none">
+                <a:solidFill>
+                  <a:srgbClr val="64748B"/>
+                </a:solidFill>
+                <a:latin typeface="Plus Jakarta Sans"/>
+              </a:rPr>
+              <a:t>Universidad Católica de Córdoba · Facultad de Ingeniería</a:t>
+            </a:r>
+          </a:p>
+        </p:txBody>
+      </p:sp>
+      <p:sp>
+        <p:nvSpPr>
+          <p:cNvPr id="7" name="TextBox 6"/>
+          <p:cNvSpPr txBox="1"/>
+          <p:nvPr/>
+        </p:nvSpPr>
+        <p:spPr>
+          <a:xfrm>
+            <a:off x="3781425" y="4197548"/>
+            <a:ext cx="1238250" cy="219075"/>
+          </a:xfrm>
+          <a:prstGeom prst="rect">
+            <a:avLst/>
+          </a:prstGeom>
+          <a:noFill/>
+        </p:spPr>
+        <p:txBody>
+          <a:bodyPr wrap="none" lIns="0" rIns="0" tIns="0" bIns="0" anchor="t">
+            <a:spAutoFit/>
+          </a:bodyPr>
+          <a:lstStyle/>
+          <a:p>
+            <a:pPr algn="ctr"/>
+            <a:r>
+              <a:rPr b="1" sz="1350" i="0" u="none">
+                <a:solidFill>
+                  <a:srgbClr val="E2E8F0"/>
+                </a:solidFill>
+                <a:latin typeface="Plus Jakarta Sans"/>
+              </a:rPr>
+              <a:t>Pedro Gatti</a:t>
+            </a:r>
+          </a:p>
+        </p:txBody>
+      </p:sp>
+      <p:sp>
+        <p:nvSpPr>
+          <p:cNvPr id="8" name="TextBox 7"/>
+          <p:cNvSpPr txBox="1"/>
+          <p:nvPr/>
+        </p:nvSpPr>
+        <p:spPr>
+          <a:xfrm>
+            <a:off x="5230415" y="4197548"/>
+            <a:ext cx="1512093" cy="219075"/>
+          </a:xfrm>
+          <a:prstGeom prst="rect">
+            <a:avLst/>
+          </a:prstGeom>
+          <a:noFill/>
+        </p:spPr>
+        <p:txBody>
+          <a:bodyPr wrap="none" lIns="0" rIns="0" tIns="0" bIns="0" anchor="t">
+            <a:spAutoFit/>
+          </a:bodyPr>
+          <a:lstStyle/>
+          <a:p>
+            <a:pPr algn="ctr"/>
+            <a:r>
+              <a:rPr b="1" sz="1350" i="0" u="none">
+                <a:solidFill>
+                  <a:srgbClr val="E2E8F0"/>
+                </a:solidFill>
+                <a:latin typeface="Plus Jakarta Sans"/>
+              </a:rPr>
+              <a:t>Facundo Grillo</a:t>
+            </a:r>
+          </a:p>
+        </p:txBody>
+      </p:sp>
+      <p:sp>
+        <p:nvSpPr>
+          <p:cNvPr id="9" name="TextBox 8"/>
+          <p:cNvSpPr txBox="1"/>
+          <p:nvPr/>
+        </p:nvSpPr>
+        <p:spPr>
+          <a:xfrm>
+            <a:off x="6949678" y="4197548"/>
+            <a:ext cx="1464468" cy="219075"/>
+          </a:xfrm>
+          <a:prstGeom prst="rect">
+            <a:avLst/>
+          </a:prstGeom>
+          <a:noFill/>
+        </p:spPr>
+        <p:txBody>
+          <a:bodyPr wrap="none" lIns="0" rIns="0" tIns="0" bIns="0" anchor="t">
+            <a:spAutoFit/>
+          </a:bodyPr>
+          <a:lstStyle/>
+          <a:p>
+            <a:pPr algn="ctr"/>
+            <a:r>
+              <a:rPr b="1" sz="1350" i="0" u="none">
+                <a:solidFill>
+                  <a:srgbClr val="E2E8F0"/>
+                </a:solidFill>
+                <a:latin typeface="Plus Jakarta Sans"/>
+              </a:rPr>
+              <a:t>Gonzalo Marin</a:t>
+            </a:r>
+          </a:p>
+        </p:txBody>
+      </p:sp>
+    </p:spTree>
+  </p:cSld>
+  <p:clrMapOvr>
+    <a:masterClrMapping/>
+  </p:clrMapOvr>
+</p:sld>
+</file>
+
+<file path=ppt/slides/slide12.xml><?xml version="1.0" encoding="utf-8"?>
+<p:sld xmlns:a="http://schemas.openxmlformats.org/drawingml/2006/main" xmlns:p="http://schemas.openxmlformats.org/presentationml/2006/main" xmlns:r="http://schemas.openxmlformats.org/officeDocument/2006/relationships">
+  <p:cSld>
+    <p:bg>
+      <p:bgPr>
+        <a:solidFill>
+          <a:srgbClr val="090D16"/>
+        </a:solidFill>
+        <a:effectLst/>
+      </p:bgPr>
+    </p:bg>
+    <p:spTree>
+      <p:nvGrpSpPr>
+        <p:cNvPr id="1" name=""/>
+        <p:cNvGrpSpPr/>
+        <p:nvPr/>
+      </p:nvGrpSpPr>
+      <p:grpSpPr/>
+      <p:sp>
+        <p:nvSpPr>
+          <p:cNvPr id="2" name="Rectangle 1"/>
+          <p:cNvSpPr/>
+          <p:nvPr/>
+        </p:nvSpPr>
+        <p:spPr>
+          <a:xfrm>
+            <a:off x="571500" y="866775"/>
+            <a:ext cx="11049000" cy="771525"/>
+          </a:xfrm>
+          <a:prstGeom prst="rect">
+            <a:avLst/>
+          </a:prstGeom>
+          <a:noFill/>
+          <a:ln>
+            <a:noFill/>
+          </a:ln>
+          <a:effectLst/>
+        </p:spPr>
+        <p:style>
+          <a:lnRef idx="1">
+            <a:schemeClr val="accent1"/>
+          </a:lnRef>
+          <a:fillRef idx="3">
+            <a:schemeClr val="accent1"/>
+          </a:fillRef>
+          <a:effectRef idx="2">
+            <a:schemeClr val="accent1"/>
+          </a:effectRef>
+          <a:fontRef idx="minor">
+            <a:schemeClr val="lt1"/>
+          </a:fontRef>
+        </p:style>
+        <p:txBody>
+          <a:bodyPr rtlCol="0" anchor="ctr"/>
+          <a:lstStyle/>
+          <a:p>
+            <a:pPr algn="ctr"/>
+          </a:p>
+        </p:txBody>
+      </p:sp>
+      <p:sp>
+        <p:nvSpPr>
+          <p:cNvPr id="3" name="Rectangle 2"/>
+          <p:cNvSpPr/>
+          <p:nvPr/>
+        </p:nvSpPr>
+        <p:spPr>
+          <a:xfrm>
+            <a:off x="571500" y="1628775"/>
+            <a:ext cx="11049000" cy="9525"/>
+          </a:xfrm>
+          <a:prstGeom prst="rect">
+            <a:avLst/>
+          </a:prstGeom>
+          <a:solidFill>
+            <a:srgbClr val="757575"/>
+          </a:solidFill>
+          <a:ln>
+            <a:noFill/>
+          </a:ln>
+          <a:effectLst/>
+        </p:spPr>
+        <p:style>
+          <a:lnRef idx="1">
+            <a:schemeClr val="accent1"/>
+          </a:lnRef>
+          <a:fillRef idx="3">
+            <a:schemeClr val="accent1"/>
+          </a:fillRef>
+          <a:effectRef idx="2">
+            <a:schemeClr val="accent1"/>
+          </a:effectRef>
+          <a:fontRef idx="minor">
+            <a:schemeClr val="lt1"/>
+          </a:fontRef>
+        </p:style>
+        <p:txBody>
+          <a:bodyPr rtlCol="0" anchor="ctr"/>
+          <a:lstStyle/>
+          <a:p>
+            <a:pPr algn="ctr"/>
+          </a:p>
+        </p:txBody>
+      </p:sp>
+      <p:sp>
+        <p:nvSpPr>
+          <p:cNvPr id="4" name="Rectangle 3"/>
+          <p:cNvSpPr/>
+          <p:nvPr/>
+        </p:nvSpPr>
+        <p:spPr>
+          <a:xfrm>
+            <a:off x="571500" y="1628775"/>
+            <a:ext cx="11049000" cy="9525"/>
+          </a:xfrm>
+          <a:prstGeom prst="rect">
+            <a:avLst/>
+          </a:prstGeom>
+          <a:solidFill>
+            <a:srgbClr val="757575"/>
+          </a:solidFill>
+          <a:ln>
+            <a:noFill/>
+          </a:ln>
+          <a:effectLst/>
+        </p:spPr>
+        <p:style>
+          <a:lnRef idx="1">
+            <a:schemeClr val="accent1"/>
+          </a:lnRef>
+          <a:fillRef idx="3">
+            <a:schemeClr val="accent1"/>
+          </a:fillRef>
+          <a:effectRef idx="2">
+            <a:schemeClr val="accent1"/>
+          </a:effectRef>
+          <a:fontRef idx="minor">
+            <a:schemeClr val="lt1"/>
+          </a:fontRef>
+        </p:style>
+        <p:txBody>
+          <a:bodyPr rtlCol="0" anchor="ctr"/>
+          <a:lstStyle/>
+          <a:p>
+            <a:pPr algn="ctr"/>
+          </a:p>
+        </p:txBody>
+      </p:sp>
+      <p:pic>
+        <p:nvPicPr>
+          <p:cNvPr id="5" name="Picture 4" descr="image.png"/>
+          <p:cNvPicPr>
+            <a:picLocks noChangeAspect="1"/>
+          </p:cNvPicPr>
+          <p:nvPr/>
+        </p:nvPicPr>
+        <p:blipFill>
+          <a:blip r:embed="rId2"/>
+          <a:stretch>
+            <a:fillRect/>
+          </a:stretch>
+        </p:blipFill>
+        <p:spPr>
+          <a:xfrm>
+            <a:off x="571500" y="1009650"/>
+            <a:ext cx="857250" cy="476250"/>
+          </a:xfrm>
+          <a:prstGeom prst="rect">
+            <a:avLst/>
+          </a:prstGeom>
+        </p:spPr>
+      </p:pic>
+      <p:pic>
+        <p:nvPicPr>
+          <p:cNvPr id="6" name="Picture 5" descr="image.png"/>
+          <p:cNvPicPr>
+            <a:picLocks noChangeAspect="1"/>
+          </p:cNvPicPr>
+          <p:nvPr/>
+        </p:nvPicPr>
+        <p:blipFill>
+          <a:blip r:embed="rId3"/>
+          <a:stretch>
+            <a:fillRect/>
+          </a:stretch>
+        </p:blipFill>
+        <p:spPr>
+          <a:xfrm>
+            <a:off x="571500" y="1781175"/>
+            <a:ext cx="857250" cy="476250"/>
+          </a:xfrm>
+          <a:prstGeom prst="rect">
+            <a:avLst/>
+          </a:prstGeom>
+        </p:spPr>
+      </p:pic>
+      <p:sp>
+        <p:nvSpPr>
+          <p:cNvPr id="7" name="TextBox 6"/>
+          <p:cNvSpPr txBox="1"/>
+          <p:nvPr/>
+        </p:nvSpPr>
+        <p:spPr>
+          <a:xfrm>
+            <a:off x="571500" y="571500"/>
+            <a:ext cx="2150268" cy="295275"/>
+          </a:xfrm>
+          <a:prstGeom prst="rect">
+            <a:avLst/>
+          </a:prstGeom>
+          <a:noFill/>
+        </p:spPr>
+        <p:txBody>
+          <a:bodyPr wrap="none" lIns="0" rIns="0" tIns="0" bIns="0" anchor="t">
+            <a:spAutoFit/>
+          </a:bodyPr>
+          <a:lstStyle/>
+          <a:p>
+            <a:pPr algn="l"/>
+            <a:r>
+              <a:rPr b="1" sz="1800" i="0" u="none">
+                <a:solidFill>
+                  <a:srgbClr val="F8FAFC"/>
+                </a:solidFill>
+                <a:latin typeface="Space Grotesk"/>
+              </a:rPr>
+              <a:t>Image Sources</a:t>
+            </a:r>
+          </a:p>
+        </p:txBody>
+      </p:sp>
+      <p:sp>
+        <p:nvSpPr>
+          <p:cNvPr id="8" name="TextBox 7"/>
+          <p:cNvSpPr txBox="1"/>
+          <p:nvPr/>
+        </p:nvSpPr>
+        <p:spPr>
+          <a:xfrm>
+            <a:off x="1666875" y="1047750"/>
+            <a:ext cx="6965156" cy="152400"/>
+          </a:xfrm>
+          <a:prstGeom prst="rect">
+            <a:avLst/>
+          </a:prstGeom>
+          <a:noFill/>
+        </p:spPr>
+        <p:txBody>
+          <a:bodyPr wrap="none" lIns="0" rIns="0" tIns="0" bIns="0" anchor="t">
+            <a:spAutoFit/>
+          </a:bodyPr>
+          <a:lstStyle/>
+          <a:p>
+            <a:pPr algn="l"/>
+            <a:r>
+              <a:rPr b="0" sz="975" i="0" u="none">
+                <a:solidFill>
+                  <a:srgbClr val="F8FAFC"/>
+                </a:solidFill>
+                <a:latin typeface="Plus Jakarta Sans"/>
+              </a:rPr>
+              <a:t>https://www.musicconnection.com/wp-content/uploads/2024/04/2V7A2667-620x420.jpg</a:t>
+            </a:r>
+          </a:p>
+        </p:txBody>
+      </p:sp>
+      <p:sp>
+        <p:nvSpPr>
+          <p:cNvPr id="9" name="TextBox 8"/>
+          <p:cNvSpPr txBox="1"/>
+          <p:nvPr/>
+        </p:nvSpPr>
+        <p:spPr>
+          <a:xfrm>
+            <a:off x="1666875" y="1247775"/>
+            <a:ext cx="3309937" cy="200025"/>
+          </a:xfrm>
+          <a:prstGeom prst="rect">
+            <a:avLst/>
+          </a:prstGeom>
+          <a:noFill/>
+        </p:spPr>
+        <p:txBody>
+          <a:bodyPr wrap="none" lIns="0" rIns="0" tIns="0" bIns="0" anchor="t">
+            <a:spAutoFit/>
+          </a:bodyPr>
+          <a:lstStyle/>
+          <a:p>
+            <a:pPr algn="l"/>
+            <a:r>
+              <a:rPr b="0" sz="1200" i="0" u="none">
+                <a:solidFill>
+                  <a:srgbClr val="F8FAFC"/>
+                </a:solidFill>
+                <a:latin typeface="Plus Jakarta Sans"/>
+              </a:rPr>
+              <a:t>Source: </a:t>
+            </a:r>
+            <a:r>
+              <a:rPr b="0" sz="1200" i="0" u="none">
+                <a:solidFill>
+                  <a:srgbClr val="4F46E5"/>
+                </a:solidFill>
+                <a:latin typeface="Plus Jakarta Sans"/>
+              </a:rPr>
+              <a:t>www.musicconnection.com</a:t>
+            </a:r>
+          </a:p>
+        </p:txBody>
+      </p:sp>
+      <p:sp>
+        <p:nvSpPr>
+          <p:cNvPr id="10" name="TextBox 9"/>
+          <p:cNvSpPr txBox="1"/>
+          <p:nvPr/>
+        </p:nvSpPr>
+        <p:spPr>
+          <a:xfrm>
+            <a:off x="1666875" y="1819275"/>
+            <a:ext cx="6274593" cy="152400"/>
+          </a:xfrm>
+          <a:prstGeom prst="rect">
+            <a:avLst/>
+          </a:prstGeom>
+          <a:noFill/>
+        </p:spPr>
+        <p:txBody>
+          <a:bodyPr wrap="none" lIns="0" rIns="0" tIns="0" bIns="0" anchor="t">
+            <a:spAutoFit/>
+          </a:bodyPr>
+          <a:lstStyle/>
+          <a:p>
+            <a:pPr algn="l"/>
+            <a:r>
+              <a:rPr b="0" sz="975" i="0" u="none">
+                <a:solidFill>
+                  <a:srgbClr val="F8FAFC"/>
+                </a:solidFill>
+                <a:latin typeface="Plus Jakarta Sans"/>
+              </a:rPr>
+              <a:t>https://stagsterlabs.com/images/capabilities/cloud-hosting-websites-mobile.png</a:t>
+            </a:r>
+          </a:p>
+        </p:txBody>
+      </p:sp>
+      <p:sp>
+        <p:nvSpPr>
+          <p:cNvPr id="11" name="TextBox 10"/>
+          <p:cNvSpPr txBox="1"/>
+          <p:nvPr/>
+        </p:nvSpPr>
+        <p:spPr>
+          <a:xfrm>
+            <a:off x="1666875" y="2019300"/>
+            <a:ext cx="2345531" cy="200025"/>
+          </a:xfrm>
+          <a:prstGeom prst="rect">
+            <a:avLst/>
+          </a:prstGeom>
+          <a:noFill/>
+        </p:spPr>
+        <p:txBody>
+          <a:bodyPr wrap="none" lIns="0" rIns="0" tIns="0" bIns="0" anchor="t">
+            <a:spAutoFit/>
+          </a:bodyPr>
+          <a:lstStyle/>
+          <a:p>
+            <a:pPr algn="l"/>
+            <a:r>
+              <a:rPr b="0" sz="1200" i="0" u="none">
+                <a:solidFill>
+                  <a:srgbClr val="F8FAFC"/>
+                </a:solidFill>
+                <a:latin typeface="Plus Jakarta Sans"/>
+              </a:rPr>
+              <a:t>Source: </a:t>
+            </a:r>
+            <a:r>
+              <a:rPr b="0" sz="1200" i="0" u="none">
+                <a:solidFill>
+                  <a:srgbClr val="4F46E5"/>
+                </a:solidFill>
+                <a:latin typeface="Plus Jakarta Sans"/>
+              </a:rPr>
+              <a:t>stagsterlabs.com</a:t>
+            </a:r>
+          </a:p>
+        </p:txBody>
+      </p:sp>
+    </p:spTree>
+  </p:cSld>
+  <p:clrMapOvr>
+    <a:masterClrMapping/>
+  </p:clrMapOvr>
+</p:sld>
+</file>
+
+<file path=ppt/slides/slide13.xml><?xml version="1.0" encoding="utf-8"?>
+<p:sld xmlns:a="http://schemas.openxmlformats.org/drawingml/2006/main" xmlns:p="http://schemas.openxmlformats.org/presentationml/2006/main" xmlns:r="http://schemas.openxmlformats.org/officeDocument/2006/relationships">
+  <p:cSld>
+    <p:bg>
+      <p:bgPr>
+        <a:solidFill>
+          <a:srgbClr val="FFFFFF"/>
+        </a:solidFill>
+        <a:effectLst/>
+      </p:bgPr>
+    </p:bg>
+    <p:spTree>
+      <p:nvGrpSpPr>
+        <p:cNvPr id="1" name=""/>
+        <p:cNvGrpSpPr/>
+        <p:nvPr/>
+      </p:nvGrpSpPr>
+      <p:grpSpPr/>
+      <p:sp>
+        <p:nvSpPr>
+          <p:cNvPr id="2" name="Rounded Rectangle 1"/>
+          <p:cNvSpPr/>
+          <p:nvPr/>
+        </p:nvSpPr>
+        <p:spPr>
+          <a:xfrm>
+            <a:off x="609600" y="1341090"/>
+            <a:ext cx="10972800" cy="1571625"/>
+          </a:xfrm>
+          <a:prstGeom prst="roundRect">
+            <a:avLst>
+              <a:gd name="adj" fmla="val 9696"/>
+            </a:avLst>
+          </a:prstGeom>
+          <a:solidFill>
+            <a:srgbClr val="0F172A"/>
+          </a:solidFill>
+          <a:ln>
+            <a:noFill/>
+          </a:ln>
+          <a:effectLst/>
+        </p:spPr>
+        <p:style>
+          <a:lnRef idx="1">
+            <a:schemeClr val="accent1"/>
+          </a:lnRef>
+          <a:fillRef idx="3">
+            <a:schemeClr val="accent1"/>
+          </a:fillRef>
+          <a:effectRef idx="2">
+            <a:schemeClr val="accent1"/>
+          </a:effectRef>
+          <a:fontRef idx="minor">
+            <a:schemeClr val="lt1"/>
+          </a:fontRef>
+        </p:style>
+        <p:txBody>
+          <a:bodyPr rtlCol="0" anchor="ctr"/>
+          <a:lstStyle/>
+          <a:p>
+            <a:pPr algn="ctr"/>
+          </a:p>
+        </p:txBody>
+      </p:sp>
+      <p:sp>
+        <p:nvSpPr>
+          <p:cNvPr id="3" name="Rounded Rectangle 2"/>
+          <p:cNvSpPr/>
+          <p:nvPr/>
+        </p:nvSpPr>
+        <p:spPr>
+          <a:xfrm>
+            <a:off x="609600" y="4128045"/>
+            <a:ext cx="3505200" cy="1323975"/>
+          </a:xfrm>
+          <a:prstGeom prst="roundRect">
+            <a:avLst>
+              <a:gd name="adj" fmla="val 10071"/>
+            </a:avLst>
+          </a:prstGeom>
+          <a:solidFill>
+            <a:srgbClr val="F8FAFC"/>
+          </a:solidFill>
+          <a:ln>
+            <a:noFill/>
+          </a:ln>
+          <a:effectLst/>
+        </p:spPr>
+        <p:style>
+          <a:lnRef idx="1">
+            <a:schemeClr val="accent1"/>
+          </a:lnRef>
+          <a:fillRef idx="3">
+            <a:schemeClr val="accent1"/>
+          </a:fillRef>
+          <a:effectRef idx="2">
+            <a:schemeClr val="accent1"/>
+          </a:effectRef>
+          <a:fontRef idx="minor">
+            <a:schemeClr val="lt1"/>
+          </a:fontRef>
+        </p:style>
+        <p:txBody>
+          <a:bodyPr rtlCol="0" anchor="ctr"/>
+          <a:lstStyle/>
+          <a:p>
+            <a:pPr algn="ctr"/>
+          </a:p>
+        </p:txBody>
+      </p:sp>
+      <p:sp>
+        <p:nvSpPr>
+          <p:cNvPr id="4" name="Rounded Rectangle 3"/>
+          <p:cNvSpPr/>
+          <p:nvPr/>
+        </p:nvSpPr>
+        <p:spPr>
+          <a:xfrm>
+            <a:off x="4343400" y="4128045"/>
+            <a:ext cx="3505200" cy="1323975"/>
+          </a:xfrm>
+          <a:prstGeom prst="roundRect">
+            <a:avLst>
+              <a:gd name="adj" fmla="val 10071"/>
+            </a:avLst>
+          </a:prstGeom>
+          <a:solidFill>
+            <a:srgbClr val="F8FAFC"/>
+          </a:solidFill>
+          <a:ln>
+            <a:noFill/>
+          </a:ln>
+          <a:effectLst/>
+        </p:spPr>
+        <p:style>
+          <a:lnRef idx="1">
+            <a:schemeClr val="accent1"/>
+          </a:lnRef>
+          <a:fillRef idx="3">
+            <a:schemeClr val="accent1"/>
+          </a:fillRef>
+          <a:effectRef idx="2">
+            <a:schemeClr val="accent1"/>
+          </a:effectRef>
+          <a:fontRef idx="minor">
+            <a:schemeClr val="lt1"/>
+          </a:fontRef>
+        </p:style>
+        <p:txBody>
+          <a:bodyPr rtlCol="0" anchor="ctr"/>
+          <a:lstStyle/>
+          <a:p>
+            <a:pPr algn="ctr"/>
+          </a:p>
+        </p:txBody>
+      </p:sp>
+      <p:sp>
+        <p:nvSpPr>
+          <p:cNvPr id="5" name="Rounded Rectangle 4"/>
+          <p:cNvSpPr/>
+          <p:nvPr/>
+        </p:nvSpPr>
+        <p:spPr>
+          <a:xfrm>
+            <a:off x="8077200" y="4128045"/>
+            <a:ext cx="3505200" cy="1323975"/>
+          </a:xfrm>
+          <a:prstGeom prst="roundRect">
+            <a:avLst>
+              <a:gd name="adj" fmla="val 10071"/>
+            </a:avLst>
+          </a:prstGeom>
+          <a:solidFill>
+            <a:srgbClr val="F8FAFC"/>
+          </a:solidFill>
+          <a:ln>
+            <a:noFill/>
+          </a:ln>
+          <a:effectLst/>
+        </p:spPr>
+        <p:style>
+          <a:lnRef idx="1">
+            <a:schemeClr val="accent1"/>
+          </a:lnRef>
+          <a:fillRef idx="3">
+            <a:schemeClr val="accent1"/>
+          </a:fillRef>
+          <a:effectRef idx="2">
+            <a:schemeClr val="accent1"/>
+          </a:effectRef>
+          <a:fontRef idx="minor">
+            <a:schemeClr val="lt1"/>
+          </a:fontRef>
+        </p:style>
+        <p:txBody>
+          <a:bodyPr rtlCol="0" anchor="ctr"/>
+          <a:lstStyle/>
+          <a:p>
+            <a:pPr algn="ctr"/>
+          </a:p>
+        </p:txBody>
+      </p:sp>
+      <p:sp>
+        <p:nvSpPr>
+          <p:cNvPr id="6" name="TextBox 5"/>
+          <p:cNvSpPr txBox="1"/>
+          <p:nvPr/>
+        </p:nvSpPr>
+        <p:spPr>
+          <a:xfrm>
+            <a:off x="609600" y="457200"/>
+            <a:ext cx="11582400" cy="171450"/>
+          </a:xfrm>
+          <a:prstGeom prst="rect">
+            <a:avLst/>
+          </a:prstGeom>
+          <a:noFill/>
+        </p:spPr>
+        <p:txBody>
+          <a:bodyPr wrap="none" lIns="0" rIns="0" tIns="0" bIns="0" anchor="t">
+            <a:spAutoFit/>
+          </a:bodyPr>
+          <a:lstStyle/>
+          <a:p>
+            <a:pPr algn="l"/>
+            <a:r>
+              <a:rPr b="1" sz="1050" i="0" u="none">
+                <a:solidFill>
+                  <a:srgbClr val="E11D48"/>
+                </a:solidFill>
+                <a:latin typeface="Plus Jakarta Sans"/>
+              </a:rPr>
+              <a:t>MÉTODO NUMÉRICO 2 · CONTRASTE</a:t>
+            </a:r>
+          </a:p>
+        </p:txBody>
+      </p:sp>
+      <p:sp>
+        <p:nvSpPr>
+          <p:cNvPr id="7" name="TextBox 6"/>
+          <p:cNvSpPr txBox="1"/>
+          <p:nvPr/>
+        </p:nvSpPr>
+        <p:spPr>
+          <a:xfrm>
+            <a:off x="609600" y="685800"/>
+            <a:ext cx="11582400" cy="388590"/>
+          </a:xfrm>
+          <a:prstGeom prst="rect">
+            <a:avLst/>
+          </a:prstGeom>
+          <a:noFill/>
+        </p:spPr>
+        <p:txBody>
+          <a:bodyPr wrap="none" lIns="0" rIns="0" tIns="0" bIns="0" anchor="t">
+            <a:spAutoFit/>
+          </a:bodyPr>
+          <a:lstStyle/>
+          <a:p>
+            <a:pPr algn="l">
+              <a:lnSpc>
+                <a:spcPts val="3060"/>
+              </a:lnSpc>
+            </a:pPr>
+            <a:r>
+              <a:rPr b="1" sz="2550" i="0" u="none">
+                <a:solidFill>
+                  <a:srgbClr val="0F172A"/>
+                </a:solidFill>
+                <a:latin typeface="Space Grotesk"/>
+              </a:rPr>
+              <a:t>Hito Adoptado: Trazadora e Incertidumbre</a:t>
+            </a:r>
+          </a:p>
+        </p:txBody>
+      </p:sp>
+      <p:sp>
+        <p:nvSpPr>
+          <p:cNvPr id="8" name="TextBox 7"/>
+          <p:cNvSpPr txBox="1"/>
+          <p:nvPr/>
+        </p:nvSpPr>
+        <p:spPr>
+          <a:xfrm>
+            <a:off x="990600" y="1645890"/>
+            <a:ext cx="11201400" cy="171450"/>
+          </a:xfrm>
+          <a:prstGeom prst="rect">
+            <a:avLst/>
+          </a:prstGeom>
+          <a:noFill/>
+        </p:spPr>
+        <p:txBody>
+          <a:bodyPr wrap="none" lIns="0" rIns="0" tIns="0" bIns="0" anchor="t">
+            <a:spAutoFit/>
+          </a:bodyPr>
+          <a:lstStyle/>
+          <a:p>
+            <a:pPr algn="l"/>
+            <a:r>
+              <a:rPr b="1" sz="1050" i="0" u="none">
+                <a:solidFill>
+                  <a:srgbClr val="FB7185"/>
+                </a:solidFill>
+                <a:latin typeface="Plus Jakarta Sans"/>
+              </a:rPr>
+              <a:t>HITO DE 100 M SEGÚN LA TRAZADORA CÚBICA NATURAL</a:t>
+            </a:r>
+          </a:p>
+        </p:txBody>
+      </p:sp>
+      <p:sp>
+        <p:nvSpPr>
+          <p:cNvPr id="9" name="TextBox 8"/>
+          <p:cNvSpPr txBox="1"/>
+          <p:nvPr/>
+        </p:nvSpPr>
+        <p:spPr>
+          <a:xfrm>
+            <a:off x="990600" y="1931640"/>
+            <a:ext cx="11201400" cy="323850"/>
+          </a:xfrm>
+          <a:prstGeom prst="rect">
+            <a:avLst/>
+          </a:prstGeom>
+          <a:noFill/>
+        </p:spPr>
+        <p:txBody>
+          <a:bodyPr wrap="none" lIns="0" rIns="0" tIns="0" bIns="0" anchor="t">
+            <a:spAutoFit/>
+          </a:bodyPr>
+          <a:lstStyle/>
+          <a:p>
+            <a:pPr algn="l"/>
+            <a:r>
+              <a:rPr b="1" sz="1950" i="0" u="none">
+                <a:solidFill>
+                  <a:srgbClr val="F8FAFC"/>
+                </a:solidFill>
+                <a:latin typeface="Space Grotesk"/>
+              </a:rPr>
+              <a:t>t* = 35.124 semanas  →  29 de septiembre de 2023</a:t>
+            </a:r>
+          </a:p>
+        </p:txBody>
+      </p:sp>
+      <p:sp>
+        <p:nvSpPr>
+          <p:cNvPr id="10" name="TextBox 9"/>
+          <p:cNvSpPr txBox="1"/>
+          <p:nvPr/>
+        </p:nvSpPr>
+        <p:spPr>
+          <a:xfrm>
+            <a:off x="990600" y="2407890"/>
+            <a:ext cx="11201400" cy="200025"/>
+          </a:xfrm>
+          <a:prstGeom prst="rect">
+            <a:avLst/>
+          </a:prstGeom>
+          <a:noFill/>
+        </p:spPr>
+        <p:txBody>
+          <a:bodyPr wrap="none" lIns="0" rIns="0" tIns="0" bIns="0" anchor="t">
+            <a:spAutoFit/>
+          </a:bodyPr>
+          <a:lstStyle/>
+          <a:p>
+            <a:pPr algn="l"/>
+            <a:r>
+              <a:rPr b="0" sz="1200" i="0" u="none">
+                <a:solidFill>
+                  <a:srgbClr val="94A3B8"/>
+                </a:solidFill>
+                <a:latin typeface="Plus Jakarta Sans"/>
+              </a:rPr>
+              <a:t>La trazadora pasa por los 47 datos medidos y coincide con la interpolación lineal de control (t = 35.127 semanas).</a:t>
+            </a:r>
+          </a:p>
+        </p:txBody>
+      </p:sp>
+      <p:sp>
+        <p:nvSpPr>
+          <p:cNvPr id="41" name="Control"/>
+          <p:cNvSpPr txBox="1"/>
+          <p:nvPr/>
+        </p:nvSpPr>
+        <p:spPr>
+          <a:xfrm>
+            <a:off x="612648" y="3200400"/>
+            <a:ext cx="10972800" cy="548640"/>
+          </a:xfrm>
+          <a:prstGeom prst="rect">
+            <a:avLst/>
+          </a:prstGeom>
+          <a:noFill/>
+        </p:spPr>
+        <p:txBody>
+          <a:bodyPr wrap="square" lIns="0" rIns="0" tIns="0" bIns="0" anchor="t"/>
+          <a:lstStyle/>
+          <a:p>
+            <a:pPr algn="l"/>
+            <a:r>
+              <a:rPr b="0" sz="1200" i="0" u="none">
+                <a:solidFill>
+                  <a:srgbClr val="475569"/>
+                </a:solidFill>
+                <a:latin typeface="Plus Jakarta Sans"/>
+              </a:rPr>
+              <a:t>Control: interpolación lineal entre la semana 35 (99.602 M) y la 36 (102.738 M) da t = 35.127 semanas, a 0.4 horas de la trazadora. La regresión no pasa por esos puntos y ubica el cruce 2.77 días más tarde.</a:t>
+            </a:r>
+          </a:p>
+        </p:txBody>
+      </p:sp>
+      <p:sp>
+        <p:nvSpPr>
+          <p:cNvPr id="11" name="TextBox 10"/>
+          <p:cNvSpPr txBox="1"/>
+          <p:nvPr/>
+        </p:nvSpPr>
+        <p:spPr>
+          <a:xfrm>
+            <a:off x="838200" y="4356645"/>
+            <a:ext cx="3810000" cy="171450"/>
+          </a:xfrm>
+          <a:prstGeom prst="rect">
+            <a:avLst/>
+          </a:prstGeom>
+          <a:noFill/>
+        </p:spPr>
+        <p:txBody>
+          <a:bodyPr wrap="none" lIns="0" rIns="0" tIns="0" bIns="0" anchor="t">
+            <a:spAutoFit/>
+          </a:bodyPr>
+          <a:lstStyle/>
+          <a:p>
+            <a:pPr algn="l"/>
+            <a:r>
+              <a:rPr b="1" sz="1050" i="0" u="none">
+                <a:solidFill>
+                  <a:srgbClr val="64748B"/>
+                </a:solidFill>
+                <a:latin typeface="Plus Jakarta Sans"/>
+              </a:rPr>
+              <a:t>RAÍZ DE LA REGRESIÓN</a:t>
+            </a:r>
+          </a:p>
+        </p:txBody>
+      </p:sp>
+      <p:sp>
+        <p:nvSpPr>
+          <p:cNvPr id="12" name="TextBox 11"/>
+          <p:cNvSpPr txBox="1"/>
+          <p:nvPr/>
+        </p:nvSpPr>
+        <p:spPr>
+          <a:xfrm>
+            <a:off x="838200" y="4585245"/>
+            <a:ext cx="3810000" cy="381000"/>
+          </a:xfrm>
+          <a:prstGeom prst="rect">
+            <a:avLst/>
+          </a:prstGeom>
+          <a:noFill/>
+        </p:spPr>
+        <p:txBody>
+          <a:bodyPr wrap="none" lIns="0" rIns="0" tIns="0" bIns="0" anchor="t">
+            <a:spAutoFit/>
+          </a:bodyPr>
+          <a:lstStyle/>
+          <a:p>
+            <a:pPr algn="l">
+              <a:lnSpc>
                 <a:spcPts val="3000"/>
-              </a:spcAft>
-              <a:defRPr sz="2400" b="1">
-                <a:solidFill>
-                  <a:srgbClr val="BDD7EE"/>
-                </a:solidFill>
-              </a:defRPr>
+              </a:lnSpc>
             </a:pPr>
             <a:r>
-              <a:t>¿Preguntas o Consultas?</a:t>
-            </a:r>
-          </a:p>
-          <a:p>
-            <a:pPr>
-              <a:defRPr sz="1500">
-                <a:solidFill>
-                  <a:srgbClr val="DCDCDC"/>
-                </a:solidFill>
-              </a:defRPr>
+              <a:rPr b="1" sz="3000" i="0" u="none">
+                <a:solidFill>
+                  <a:srgbClr val="E11D48"/>
+                </a:solidFill>
+                <a:latin typeface="Plus Jakarta Sans"/>
+              </a:rPr>
+              <a:t>35.520 sem</a:t>
+            </a:r>
+          </a:p>
+        </p:txBody>
+      </p:sp>
+      <p:sp>
+        <p:nvSpPr>
+          <p:cNvPr id="13" name="TextBox 12"/>
+          <p:cNvSpPr txBox="1"/>
+          <p:nvPr/>
+        </p:nvSpPr>
+        <p:spPr>
+          <a:xfrm>
+            <a:off x="838200" y="5023395"/>
+            <a:ext cx="3810000" cy="200025"/>
+          </a:xfrm>
+          <a:prstGeom prst="rect">
+            <a:avLst/>
+          </a:prstGeom>
+          <a:noFill/>
+        </p:spPr>
+        <p:txBody>
+          <a:bodyPr wrap="none" lIns="0" rIns="0" tIns="0" bIns="0" anchor="t">
+            <a:spAutoFit/>
+          </a:bodyPr>
+          <a:lstStyle/>
+          <a:p>
+            <a:pPr algn="l"/>
+            <a:r>
+              <a:rPr b="1" sz="1200" i="0" u="none">
+                <a:solidFill>
+                  <a:srgbClr val="334155"/>
+                </a:solidFill>
+                <a:latin typeface="Plus Jakarta Sans"/>
+              </a:rPr>
+              <a:t>Bisección y Newton coinciden: 2 de octubre</a:t>
+            </a:r>
+          </a:p>
+        </p:txBody>
+      </p:sp>
+      <p:sp>
+        <p:nvSpPr>
+          <p:cNvPr id="14" name="TextBox 13"/>
+          <p:cNvSpPr txBox="1"/>
+          <p:nvPr/>
+        </p:nvSpPr>
+        <p:spPr>
+          <a:xfrm>
+            <a:off x="4572000" y="4356645"/>
+            <a:ext cx="3810000" cy="171450"/>
+          </a:xfrm>
+          <a:prstGeom prst="rect">
+            <a:avLst/>
+          </a:prstGeom>
+          <a:noFill/>
+        </p:spPr>
+        <p:txBody>
+          <a:bodyPr wrap="none" lIns="0" rIns="0" tIns="0" bIns="0" anchor="t">
+            <a:spAutoFit/>
+          </a:bodyPr>
+          <a:lstStyle/>
+          <a:p>
+            <a:pPr algn="l"/>
+            <a:r>
+              <a:rPr b="1" sz="1050" i="0" u="none">
+                <a:solidFill>
+                  <a:srgbClr val="64748B"/>
+                </a:solidFill>
+                <a:latin typeface="Plus Jakarta Sans"/>
+              </a:rPr>
+              <a:t>INCERTIDUMBRE DEL MODELO</a:t>
+            </a:r>
+          </a:p>
+        </p:txBody>
+      </p:sp>
+      <p:sp>
+        <p:nvSpPr>
+          <p:cNvPr id="15" name="TextBox 14"/>
+          <p:cNvSpPr txBox="1"/>
+          <p:nvPr/>
+        </p:nvSpPr>
+        <p:spPr>
+          <a:xfrm>
+            <a:off x="4572000" y="4585245"/>
+            <a:ext cx="3810000" cy="381000"/>
+          </a:xfrm>
+          <a:prstGeom prst="rect">
+            <a:avLst/>
+          </a:prstGeom>
+          <a:noFill/>
+        </p:spPr>
+        <p:txBody>
+          <a:bodyPr wrap="none" lIns="0" rIns="0" tIns="0" bIns="0" anchor="t">
+            <a:spAutoFit/>
+          </a:bodyPr>
+          <a:lstStyle/>
+          <a:p>
+            <a:pPr algn="l">
+              <a:lnSpc>
+                <a:spcPts val="3000"/>
+              </a:lnSpc>
             </a:pPr>
             <a:r>
-              <a:t>Pedro Gatti · Facundo Grillo · Gonzalo Marin</a:t>
-            </a:r>
-            <a:br/>
-            <a:r>
-              <a:t>Taller de Métodos Numéricos · UCC 2026</a:t>
+              <a:rPr b="1" sz="3000" i="0" u="none">
+                <a:solidFill>
+                  <a:srgbClr val="0F172A"/>
+                </a:solidFill>
+                <a:latin typeface="Plus Jakarta Sans"/>
+              </a:rPr>
+              <a:t>± 1.92 días</a:t>
+            </a:r>
+          </a:p>
+        </p:txBody>
+      </p:sp>
+      <p:sp>
+        <p:nvSpPr>
+          <p:cNvPr id="16" name="TextBox 15"/>
+          <p:cNvSpPr txBox="1"/>
+          <p:nvPr/>
+        </p:nvSpPr>
+        <p:spPr>
+          <a:xfrm>
+            <a:off x="4572000" y="5023395"/>
+            <a:ext cx="3810000" cy="200025"/>
+          </a:xfrm>
+          <a:prstGeom prst="rect">
+            <a:avLst/>
+          </a:prstGeom>
+          <a:noFill/>
+        </p:spPr>
+        <p:txBody>
+          <a:bodyPr wrap="none" lIns="0" rIns="0" tIns="0" bIns="0" anchor="t">
+            <a:spAutoFit/>
+          </a:bodyPr>
+          <a:lstStyle/>
+          <a:p>
+            <a:pPr algn="l"/>
+            <a:r>
+              <a:rPr b="1" sz="1200" i="0" u="none">
+                <a:solidFill>
+                  <a:srgbClr val="334155"/>
+                </a:solidFill>
+                <a:latin typeface="Plus Jakarta Sans"/>
+              </a:rPr>
+              <a:t>Δt = S_y/x / S'(t*) = 0.927 / 3.374</a:t>
+            </a:r>
+          </a:p>
+        </p:txBody>
+      </p:sp>
+      <p:sp>
+        <p:nvSpPr>
+          <p:cNvPr id="17" name="TextBox 16"/>
+          <p:cNvSpPr txBox="1"/>
+          <p:nvPr/>
+        </p:nvSpPr>
+        <p:spPr>
+          <a:xfrm>
+            <a:off x="8305800" y="4356645"/>
+            <a:ext cx="3810000" cy="171450"/>
+          </a:xfrm>
+          <a:prstGeom prst="rect">
+            <a:avLst/>
+          </a:prstGeom>
+          <a:noFill/>
+        </p:spPr>
+        <p:txBody>
+          <a:bodyPr wrap="none" lIns="0" rIns="0" tIns="0" bIns="0" anchor="t">
+            <a:spAutoFit/>
+          </a:bodyPr>
+          <a:lstStyle/>
+          <a:p>
+            <a:pPr algn="l"/>
+            <a:r>
+              <a:rPr b="1" sz="1050" i="0" u="none">
+                <a:solidFill>
+                  <a:srgbClr val="64748B"/>
+                </a:solidFill>
+                <a:latin typeface="Plus Jakarta Sans"/>
+              </a:rPr>
+              <a:t>REGRESIÓN VS. TRAZADORA</a:t>
+            </a:r>
+          </a:p>
+        </p:txBody>
+      </p:sp>
+      <p:sp>
+        <p:nvSpPr>
+          <p:cNvPr id="18" name="TextBox 17"/>
+          <p:cNvSpPr txBox="1"/>
+          <p:nvPr/>
+        </p:nvSpPr>
+        <p:spPr>
+          <a:xfrm>
+            <a:off x="8305800" y="4585245"/>
+            <a:ext cx="3810000" cy="381000"/>
+          </a:xfrm>
+          <a:prstGeom prst="rect">
+            <a:avLst/>
+          </a:prstGeom>
+          <a:noFill/>
+        </p:spPr>
+        <p:txBody>
+          <a:bodyPr wrap="none" lIns="0" rIns="0" tIns="0" bIns="0" anchor="t">
+            <a:spAutoFit/>
+          </a:bodyPr>
+          <a:lstStyle/>
+          <a:p>
+            <a:pPr algn="l">
+              <a:lnSpc>
+                <a:spcPts val="3000"/>
+              </a:lnSpc>
+            </a:pPr>
+            <a:r>
+              <a:rPr b="1" sz="3000" i="0" u="none">
+                <a:solidFill>
+                  <a:srgbClr val="0284C7"/>
+                </a:solidFill>
+                <a:latin typeface="Plus Jakarta Sans"/>
+              </a:rPr>
+              <a:t>2.77 días</a:t>
+            </a:r>
+          </a:p>
+        </p:txBody>
+      </p:sp>
+      <p:sp>
+        <p:nvSpPr>
+          <p:cNvPr id="19" name="TextBox 18"/>
+          <p:cNvSpPr txBox="1"/>
+          <p:nvPr/>
+        </p:nvSpPr>
+        <p:spPr>
+          <a:xfrm>
+            <a:off x="8305800" y="5023395"/>
+            <a:ext cx="3810000" cy="200025"/>
+          </a:xfrm>
+          <a:prstGeom prst="rect">
+            <a:avLst/>
+          </a:prstGeom>
+          <a:noFill/>
+        </p:spPr>
+        <p:txBody>
+          <a:bodyPr wrap="none" lIns="0" rIns="0" tIns="0" bIns="0" anchor="t">
+            <a:spAutoFit/>
+          </a:bodyPr>
+          <a:lstStyle/>
+          <a:p>
+            <a:pPr algn="l"/>
+            <a:r>
+              <a:rPr b="1" sz="1200" i="0" u="none">
+                <a:solidFill>
+                  <a:srgbClr val="334155"/>
+                </a:solidFill>
+                <a:latin typeface="Plus Jakarta Sans"/>
+              </a:rPr>
+              <a:t>Supera Δt: se adopta la trazadora</a:t>
+            </a:r>
+          </a:p>
+        </p:txBody>
+      </p:sp>
+    </p:spTree>
+  </p:cSld>
+  <p:clrMapOvr>
+    <a:masterClrMapping/>
+  </p:clrMapOvr>
+</p:sld>
+</file>
+
+<file path=ppt/slides/slide14.xml><?xml version="1.0" encoding="utf-8"?>
+<p:sld xmlns:a="http://schemas.openxmlformats.org/drawingml/2006/main" xmlns:p="http://schemas.openxmlformats.org/presentationml/2006/main" xmlns:r="http://schemas.openxmlformats.org/officeDocument/2006/relationships">
+  <p:cSld>
+    <p:bg>
+      <p:bgPr>
+        <a:solidFill>
+          <a:srgbClr val="FFFFFF"/>
+        </a:solidFill>
+        <a:effectLst/>
+      </p:bgPr>
+    </p:bg>
+    <p:spTree>
+      <p:nvGrpSpPr>
+        <p:cNvPr id="1" name=""/>
+        <p:cNvGrpSpPr/>
+        <p:nvPr/>
+      </p:nvGrpSpPr>
+      <p:grpSpPr/>
+      <p:sp>
+        <p:nvSpPr>
+          <p:cNvPr id="2" name="Rounded Rectangle 1"/>
+          <p:cNvSpPr/>
+          <p:nvPr/>
+        </p:nvSpPr>
+        <p:spPr>
+          <a:xfrm>
+            <a:off x="609600" y="5895975"/>
+            <a:ext cx="5334000" cy="504825"/>
+          </a:xfrm>
+          <a:prstGeom prst="roundRect">
+            <a:avLst>
+              <a:gd name="adj" fmla="val 22641"/>
+            </a:avLst>
+          </a:prstGeom>
+          <a:solidFill>
+            <a:srgbClr val="F3E8FF"/>
+          </a:solidFill>
+          <a:ln>
+            <a:noFill/>
+          </a:ln>
+          <a:effectLst/>
+        </p:spPr>
+        <p:style>
+          <a:lnRef idx="1">
+            <a:schemeClr val="accent1"/>
+          </a:lnRef>
+          <a:fillRef idx="3">
+            <a:schemeClr val="accent1"/>
+          </a:fillRef>
+          <a:effectRef idx="2">
+            <a:schemeClr val="accent1"/>
+          </a:effectRef>
+          <a:fontRef idx="minor">
+            <a:schemeClr val="lt1"/>
+          </a:fontRef>
+        </p:style>
+        <p:txBody>
+          <a:bodyPr rtlCol="0" anchor="ctr"/>
+          <a:lstStyle/>
+          <a:p>
+            <a:pPr algn="ctr"/>
+          </a:p>
+        </p:txBody>
+      </p:sp>
+      <p:sp>
+        <p:nvSpPr>
+          <p:cNvPr id="3" name="Rounded Rectangle 2"/>
+          <p:cNvSpPr/>
+          <p:nvPr/>
+        </p:nvSpPr>
+        <p:spPr>
+          <a:xfrm>
+            <a:off x="6248400" y="5895975"/>
+            <a:ext cx="5334000" cy="504825"/>
+          </a:xfrm>
+          <a:prstGeom prst="roundRect">
+            <a:avLst>
+              <a:gd name="adj" fmla="val 22641"/>
+            </a:avLst>
+          </a:prstGeom>
+          <a:solidFill>
+            <a:srgbClr val="FEE2E2"/>
+          </a:solidFill>
+          <a:ln>
+            <a:noFill/>
+          </a:ln>
+          <a:effectLst/>
+        </p:spPr>
+        <p:style>
+          <a:lnRef idx="1">
+            <a:schemeClr val="accent1"/>
+          </a:lnRef>
+          <a:fillRef idx="3">
+            <a:schemeClr val="accent1"/>
+          </a:fillRef>
+          <a:effectRef idx="2">
+            <a:schemeClr val="accent1"/>
+          </a:effectRef>
+          <a:fontRef idx="minor">
+            <a:schemeClr val="lt1"/>
+          </a:fontRef>
+        </p:style>
+        <p:txBody>
+          <a:bodyPr rtlCol="0" anchor="ctr"/>
+          <a:lstStyle/>
+          <a:p>
+            <a:pPr algn="ctr"/>
+          </a:p>
+        </p:txBody>
+      </p:sp>
+      <p:pic>
+        <p:nvPicPr>
+          <p:cNvPr id="4" name="Picture 3" descr="image.png"/>
+          <p:cNvPicPr>
+            <a:picLocks noChangeAspect="1"/>
+          </p:cNvPicPr>
+          <p:nvPr/>
+        </p:nvPicPr>
+        <p:blipFill>
+          <a:blip r:embed="rId2"/>
+          <a:stretch>
+            <a:fillRect/>
+          </a:stretch>
+        </p:blipFill>
+        <p:spPr>
+          <a:xfrm>
+            <a:off x="914400" y="2065883"/>
+            <a:ext cx="10363200" cy="2857500"/>
+          </a:xfrm>
+          <a:prstGeom prst="rect">
+            <a:avLst/>
+          </a:prstGeom>
+        </p:spPr>
+      </p:pic>
+      <p:sp>
+        <p:nvSpPr>
+          <p:cNvPr id="5" name="TextBox 4"/>
+          <p:cNvSpPr txBox="1"/>
+          <p:nvPr/>
+        </p:nvSpPr>
+        <p:spPr>
+          <a:xfrm>
+            <a:off x="609600" y="457200"/>
+            <a:ext cx="8548687" cy="171450"/>
+          </a:xfrm>
+          <a:prstGeom prst="rect">
+            <a:avLst/>
+          </a:prstGeom>
+          <a:noFill/>
+        </p:spPr>
+        <p:txBody>
+          <a:bodyPr wrap="none" lIns="0" rIns="0" tIns="0" bIns="0" anchor="t">
+            <a:spAutoFit/>
+          </a:bodyPr>
+          <a:lstStyle/>
+          <a:p>
+            <a:pPr algn="l"/>
+            <a:r>
+              <a:rPr b="1" sz="1050" i="0" u="none">
+                <a:solidFill>
+                  <a:srgbClr val="7C3AED"/>
+                </a:solidFill>
+                <a:latin typeface="Plus Jakarta Sans"/>
+              </a:rPr>
+              <a:t>GENERALIZACIÓN</a:t>
+            </a:r>
+          </a:p>
+        </p:txBody>
+      </p:sp>
+      <p:sp>
+        <p:nvSpPr>
+          <p:cNvPr id="6" name="TextBox 5"/>
+          <p:cNvSpPr txBox="1"/>
+          <p:nvPr/>
+        </p:nvSpPr>
+        <p:spPr>
+          <a:xfrm>
+            <a:off x="609600" y="666750"/>
+            <a:ext cx="8976121" cy="388590"/>
+          </a:xfrm>
+          <a:prstGeom prst="rect">
+            <a:avLst/>
+          </a:prstGeom>
+          <a:noFill/>
+        </p:spPr>
+        <p:txBody>
+          <a:bodyPr wrap="none" lIns="0" rIns="0" tIns="0" bIns="0" anchor="t">
+            <a:spAutoFit/>
+          </a:bodyPr>
+          <a:lstStyle/>
+          <a:p>
+            <a:pPr algn="l">
+              <a:lnSpc>
+                <a:spcPts val="3060"/>
+              </a:lnSpc>
+            </a:pPr>
+            <a:r>
+              <a:rPr b="1" sz="2550" i="0" u="none">
+                <a:solidFill>
+                  <a:srgbClr val="0F172A"/>
+                </a:solidFill>
+                <a:latin typeface="Space Grotesk"/>
+              </a:rPr>
+              <a:t>¿Sirve para Cualquier Canción? 3 Casos Reales</a:t>
+            </a:r>
+          </a:p>
+        </p:txBody>
+      </p:sp>
+      <p:sp>
+        <p:nvSpPr>
+          <p:cNvPr id="7" name="TextBox 6"/>
+          <p:cNvSpPr txBox="1"/>
+          <p:nvPr/>
+        </p:nvSpPr>
+        <p:spPr>
+          <a:xfrm>
+            <a:off x="800100" y="6048375"/>
+            <a:ext cx="6191250" cy="200025"/>
+          </a:xfrm>
+          <a:prstGeom prst="rect">
+            <a:avLst/>
+          </a:prstGeom>
+          <a:noFill/>
+        </p:spPr>
+        <p:txBody>
+          <a:bodyPr wrap="none" lIns="0" rIns="0" tIns="0" bIns="0" anchor="t">
+            <a:spAutoFit/>
+          </a:bodyPr>
+          <a:lstStyle/>
+          <a:p>
+            <a:pPr algn="l"/>
+            <a:r>
+              <a:rPr b="1" sz="1200" i="0" u="none">
+                <a:solidFill>
+                  <a:srgbClr val="6B21A8"/>
+                </a:solidFill>
+                <a:latin typeface="Plus Jakarta Sans"/>
+              </a:rPr>
+              <a:t>Resurgimiento (a negativo): el modelo detecta el pico de demanda.</a:t>
+            </a:r>
+          </a:p>
+        </p:txBody>
+      </p:sp>
+      <p:sp>
+        <p:nvSpPr>
+          <p:cNvPr id="8" name="TextBox 7"/>
+          <p:cNvSpPr txBox="1"/>
+          <p:nvPr/>
+        </p:nvSpPr>
+        <p:spPr>
+          <a:xfrm>
+            <a:off x="6438900" y="6048375"/>
+            <a:ext cx="5753100" cy="200025"/>
+          </a:xfrm>
+          <a:prstGeom prst="rect">
+            <a:avLst/>
+          </a:prstGeom>
+          <a:noFill/>
+        </p:spPr>
+        <p:txBody>
+          <a:bodyPr wrap="none" lIns="0" rIns="0" tIns="0" bIns="0" anchor="t">
+            <a:spAutoFit/>
+          </a:bodyPr>
+          <a:lstStyle/>
+          <a:p>
+            <a:pPr algn="l"/>
+            <a:r>
+              <a:rPr b="1" sz="1200" i="0" u="none">
+                <a:solidFill>
+                  <a:srgbClr val="991B1B"/>
+                </a:solidFill>
+                <a:latin typeface="Plus Jakarta Sans"/>
+              </a:rPr>
+              <a:t>Estrenos (a positivo): la inflexión es un mínimo, no aplica.</a:t>
+            </a:r>
+          </a:p>
+        </p:txBody>
+      </p:sp>
+      <p:sp>
+        <p:nvSpPr>
+          <p:cNvPr id="9" name="TextBox 8"/>
+          <p:cNvSpPr txBox="1"/>
+          <p:nvPr/>
+        </p:nvSpPr>
+        <p:spPr>
+          <a:xfrm>
+            <a:off x="612648" y="1207008"/>
+            <a:ext cx="1536192" cy="171450"/>
+          </a:xfrm>
+          <a:prstGeom prst="rect">
+            <a:avLst/>
+          </a:prstGeom>
+          <a:noFill/>
+        </p:spPr>
+        <p:txBody>
+          <a:bodyPr wrap="none" lIns="0" rIns="0" tIns="0" bIns="0" anchor="t">
+            <a:spAutoFit/>
+          </a:bodyPr>
+          <a:lstStyle/>
+          <a:p>
+            <a:pPr algn="l"/>
+            <a:r>
+              <a:rPr b="1" sz="1050" i="0" u="none">
+                <a:solidFill>
+                  <a:srgbClr val="8B5CF6"/>
+                </a:solidFill>
+                <a:latin typeface="Plus Jakarta Sans"/>
+              </a:rPr>
+              <a:t>Streams semanales</a:t>
+            </a:r>
+          </a:p>
+        </p:txBody>
+      </p:sp>
+      <p:sp>
+        <p:nvSpPr>
+          <p:cNvPr id="10" name="TextBox 9"/>
+          <p:cNvSpPr txBox="1"/>
+          <p:nvPr/>
+        </p:nvSpPr>
+        <p:spPr>
+          <a:xfrm>
+            <a:off x="2468879" y="1207008"/>
+            <a:ext cx="1700784" cy="171450"/>
+          </a:xfrm>
+          <a:prstGeom prst="rect">
+            <a:avLst/>
+          </a:prstGeom>
+          <a:noFill/>
+        </p:spPr>
+        <p:txBody>
+          <a:bodyPr wrap="none" lIns="0" rIns="0" tIns="0" bIns="0" anchor="t">
+            <a:spAutoFit/>
+          </a:bodyPr>
+          <a:lstStyle/>
+          <a:p>
+            <a:pPr algn="l"/>
+            <a:r>
+              <a:rPr b="1" sz="1050" i="0" u="none">
+                <a:solidFill>
+                  <a:srgbClr val="6D28D9"/>
+                </a:solidFill>
+                <a:latin typeface="Plus Jakarta Sans"/>
+              </a:rPr>
+              <a:t>Derivada del modelo</a:t>
             </a:r>
           </a:p>
         </p:txBody>
@@ -3531,6 +6161,14 @@
 <file path=ppt/slides/slide2.xml><?xml version="1.0" encoding="utf-8"?>
 <p:sld xmlns:a="http://schemas.openxmlformats.org/drawingml/2006/main" xmlns:p="http://schemas.openxmlformats.org/presentationml/2006/main" xmlns:r="http://schemas.openxmlformats.org/officeDocument/2006/relationships">
   <p:cSld>
+    <p:bg>
+      <p:bgPr>
+        <a:solidFill>
+          <a:srgbClr val="FFFFFF"/>
+        </a:solidFill>
+        <a:effectLst/>
+      </p:bgPr>
+    </p:bg>
     <p:spTree>
       <p:nvGrpSpPr>
         <p:cNvPr id="1" name=""/>
@@ -3540,75 +6178,27 @@
       <p:grpSpPr/>
       <p:sp>
         <p:nvSpPr>
-          <p:cNvPr id="2" name="TextBox 1"/>
-          <p:cNvSpPr txBox="1"/>
-          <p:nvPr/>
-        </p:nvSpPr>
-        <p:spPr>
-          <a:xfrm>
-            <a:off x="731520" y="365760"/>
-            <a:ext cx="10698480" cy="1005840"/>
-          </a:xfrm>
-          <a:prstGeom prst="rect">
-            <a:avLst/>
-          </a:prstGeom>
-          <a:noFill/>
-        </p:spPr>
-        <p:txBody>
-          <a:bodyPr wrap="square" lIns="0" tIns="0" rIns="0" bIns="0">
-            <a:spAutoFit/>
-          </a:bodyPr>
-          <a:lstStyle/>
-          <a:p>
-            <a:pPr>
-              <a:defRPr sz="1100" b="1">
-                <a:solidFill>
-                  <a:srgbClr val="E91E63"/>
-                </a:solidFill>
-                <a:latin typeface="Calibri"/>
-              </a:defRPr>
-            </a:pPr>
-            <a:r>
-              <a:t>CONTEXTO Y JUSTIFICACIÓN</a:t>
-            </a:r>
-          </a:p>
-          <a:p>
-            <a:pPr>
-              <a:defRPr sz="2300" b="1">
-                <a:solidFill>
-                  <a:srgbClr val="1F4E79"/>
-                </a:solidFill>
-                <a:latin typeface="Calibri"/>
-              </a:defRPr>
-            </a:pPr>
-            <a:r>
-              <a:t>El fenómeno de 'Rosa Pastel' y su relevancia en Ingeniería</a:t>
-            </a:r>
-          </a:p>
-        </p:txBody>
-      </p:sp>
-      <p:sp>
-        <p:nvSpPr>
-          <p:cNvPr id="3" name="Rounded Rectangle 2"/>
+          <p:cNvPr id="2" name="Rounded Rectangle 1"/>
           <p:cNvSpPr/>
           <p:nvPr/>
         </p:nvSpPr>
         <p:spPr>
           <a:xfrm>
-            <a:off x="731520" y="1645920"/>
-            <a:ext cx="5120640" cy="4663440"/>
+            <a:off x="609600" y="2251620"/>
+            <a:ext cx="5257800" cy="952500"/>
           </a:xfrm>
           <a:prstGeom prst="roundRect">
-            <a:avLst/>
+            <a:avLst>
+              <a:gd name="adj" fmla="val 14000"/>
+            </a:avLst>
           </a:prstGeom>
           <a:solidFill>
-            <a:srgbClr val="F5F7FA"/>
+            <a:srgbClr val="FFF1F2"/>
           </a:solidFill>
           <a:ln>
-            <a:solidFill>
-              <a:srgbClr val="D9E1F2"/>
-            </a:solidFill>
+            <a:noFill/>
           </a:ln>
+          <a:effectLst/>
         </p:spPr>
         <p:style>
           <a:lnRef idx="1">
@@ -3625,74 +6215,36 @@
           </a:fontRef>
         </p:style>
         <p:txBody>
-          <a:bodyPr rtlCol="0" anchor="ctr" wrap="square" lIns="365760" tIns="365760"/>
-          <a:lstStyle/>
-          <a:p>
-            <a:pPr algn="ctr">
-              <a:spcAft>
-                <a:spcPts val="1200"/>
-              </a:spcAft>
-              <a:defRPr sz="1700" b="1">
-                <a:solidFill>
-                  <a:srgbClr val="1F4E79"/>
-                </a:solidFill>
-              </a:defRPr>
-            </a:pPr>
-            <a:r>
-              <a:t>El caso 'Rosa Pastel' (Belanova)</a:t>
-            </a:r>
-          </a:p>
-          <a:p>
-            <a:pPr>
-              <a:defRPr sz="1250">
-                <a:solidFill>
-                  <a:srgbClr val="282828"/>
-                </a:solidFill>
-              </a:defRPr>
-            </a:pPr>
-            <a:r>
-              <a:t>• Canción electropop mexicana lanzada como sencillo en 2006 (álbum Dulce Beat).</a:t>
-            </a:r>
-            <a:br/>
-            <a:br/>
-            <a:r>
-              <a:t>• En 2023 experimentó un fuerte resurgimiento en plataformas de streaming a partir de un trend masivo en TikTok ('sueños frustrados', julio 2023).</a:t>
-            </a:r>
-            <a:br/>
-            <a:br/>
-            <a:r>
-              <a:t>• En Spotify México las reproducciones semanales pasaron de 1.1 M a un pico de 4.17 M en julio.</a:t>
-            </a:r>
-            <a:br/>
-            <a:br/>
-            <a:r>
-              <a:t>• El volumen total acumulado a lo largo de 2023 llegó a 132,9 millones de reproducciones en el mercado mexicano.</a:t>
-            </a:r>
-          </a:p>
-        </p:txBody>
-      </p:sp>
-      <p:sp>
-        <p:nvSpPr>
-          <p:cNvPr id="4" name="Rounded Rectangle 3"/>
+          <a:bodyPr rtlCol="0" anchor="ctr"/>
+          <a:lstStyle/>
+          <a:p>
+            <a:pPr algn="ctr"/>
+          </a:p>
+        </p:txBody>
+      </p:sp>
+      <p:sp>
+        <p:nvSpPr>
+          <p:cNvPr id="3" name="Rounded Rectangle 2"/>
           <p:cNvSpPr/>
           <p:nvPr/>
         </p:nvSpPr>
         <p:spPr>
           <a:xfrm>
-            <a:off x="6309360" y="1645920"/>
-            <a:ext cx="5120640" cy="4663440"/>
+            <a:off x="609600" y="3394620"/>
+            <a:ext cx="5257800" cy="952500"/>
           </a:xfrm>
           <a:prstGeom prst="roundRect">
-            <a:avLst/>
+            <a:avLst>
+              <a:gd name="adj" fmla="val 14000"/>
+            </a:avLst>
           </a:prstGeom>
           <a:solidFill>
-            <a:srgbClr val="F5F7FA"/>
+            <a:srgbClr val="FFF1F2"/>
           </a:solidFill>
           <a:ln>
-            <a:solidFill>
-              <a:srgbClr val="D9E1F2"/>
-            </a:solidFill>
+            <a:noFill/>
           </a:ln>
+          <a:effectLst/>
         </p:spPr>
         <p:style>
           <a:lnRef idx="1">
@@ -3709,48 +6261,459 @@
           </a:fontRef>
         </p:style>
         <p:txBody>
-          <a:bodyPr rtlCol="0" anchor="ctr" wrap="square" lIns="365760" tIns="365760"/>
-          <a:lstStyle/>
-          <a:p>
-            <a:pPr algn="ctr">
-              <a:spcAft>
-                <a:spcPts val="1200"/>
-              </a:spcAft>
-              <a:defRPr sz="1700" b="1">
-                <a:solidFill>
-                  <a:srgbClr val="1F4E79"/>
-                </a:solidFill>
-              </a:defRPr>
+          <a:bodyPr rtlCol="0" anchor="ctr"/>
+          <a:lstStyle/>
+          <a:p>
+            <a:pPr algn="ctr"/>
+          </a:p>
+        </p:txBody>
+      </p:sp>
+      <p:sp>
+        <p:nvSpPr>
+          <p:cNvPr id="4" name="Rounded Rectangle 3"/>
+          <p:cNvSpPr/>
+          <p:nvPr/>
+        </p:nvSpPr>
+        <p:spPr>
+          <a:xfrm>
+            <a:off x="609600" y="4537620"/>
+            <a:ext cx="5257800" cy="952500"/>
+          </a:xfrm>
+          <a:prstGeom prst="roundRect">
+            <a:avLst>
+              <a:gd name="adj" fmla="val 14000"/>
+            </a:avLst>
+          </a:prstGeom>
+          <a:solidFill>
+            <a:srgbClr val="FFF1F2"/>
+          </a:solidFill>
+          <a:ln>
+            <a:noFill/>
+          </a:ln>
+          <a:effectLst/>
+        </p:spPr>
+        <p:style>
+          <a:lnRef idx="1">
+            <a:schemeClr val="accent1"/>
+          </a:lnRef>
+          <a:fillRef idx="3">
+            <a:schemeClr val="accent1"/>
+          </a:fillRef>
+          <a:effectRef idx="2">
+            <a:schemeClr val="accent1"/>
+          </a:effectRef>
+          <a:fontRef idx="minor">
+            <a:schemeClr val="lt1"/>
+          </a:fontRef>
+        </p:style>
+        <p:txBody>
+          <a:bodyPr rtlCol="0" anchor="ctr"/>
+          <a:lstStyle/>
+          <a:p>
+            <a:pPr algn="ctr"/>
+          </a:p>
+        </p:txBody>
+      </p:sp>
+      <p:pic>
+        <p:nvPicPr>
+          <p:cNvPr id="5" name="Picture 4" descr="image.png"/>
+          <p:cNvPicPr>
+            <a:picLocks noChangeAspect="1"/>
+          </p:cNvPicPr>
+          <p:nvPr/>
+        </p:nvPicPr>
+        <p:blipFill>
+          <a:blip r:embed="rId2"/>
+          <a:stretch>
+            <a:fillRect/>
+          </a:stretch>
+        </p:blipFill>
+        <p:spPr>
+          <a:xfrm>
+            <a:off x="6324600" y="1870620"/>
+            <a:ext cx="5257800" cy="4000500"/>
+          </a:xfrm>
+          <a:prstGeom prst="rect">
+            <a:avLst/>
+          </a:prstGeom>
+        </p:spPr>
+      </p:pic>
+      <p:pic>
+        <p:nvPicPr>
+          <p:cNvPr id="6" name="Picture 5" descr="image.png"/>
+          <p:cNvPicPr>
+            <a:picLocks noChangeAspect="1"/>
+          </p:cNvPicPr>
+          <p:nvPr/>
+        </p:nvPicPr>
+        <p:blipFill>
+          <a:blip r:embed="rId3"/>
+          <a:stretch>
+            <a:fillRect/>
+          </a:stretch>
+        </p:blipFill>
+        <p:spPr>
+          <a:xfrm>
+            <a:off x="6324600" y="1870620"/>
+            <a:ext cx="5257800" cy="4000500"/>
+          </a:xfrm>
+          <a:prstGeom prst="rect">
+            <a:avLst/>
+          </a:prstGeom>
+        </p:spPr>
+      </p:pic>
+      <p:pic>
+        <p:nvPicPr>
+          <p:cNvPr id="7" name="Picture 6" descr="image.png"/>
+          <p:cNvPicPr>
+            <a:picLocks noChangeAspect="1"/>
+          </p:cNvPicPr>
+          <p:nvPr/>
+        </p:nvPicPr>
+        <p:blipFill>
+          <a:blip r:embed="rId4"/>
+          <a:stretch>
+            <a:fillRect/>
+          </a:stretch>
+        </p:blipFill>
+        <p:spPr>
+          <a:xfrm>
+            <a:off x="838200" y="2508795"/>
+            <a:ext cx="171450" cy="171450"/>
+          </a:xfrm>
+          <a:prstGeom prst="rect">
+            <a:avLst/>
+          </a:prstGeom>
+        </p:spPr>
+      </p:pic>
+      <p:pic>
+        <p:nvPicPr>
+          <p:cNvPr id="8" name="Picture 7" descr="image.png"/>
+          <p:cNvPicPr>
+            <a:picLocks noChangeAspect="1"/>
+          </p:cNvPicPr>
+          <p:nvPr/>
+        </p:nvPicPr>
+        <p:blipFill>
+          <a:blip r:embed="rId5"/>
+          <a:stretch>
+            <a:fillRect/>
+          </a:stretch>
+        </p:blipFill>
+        <p:spPr>
+          <a:xfrm>
+            <a:off x="838200" y="3651795"/>
+            <a:ext cx="152400" cy="171450"/>
+          </a:xfrm>
+          <a:prstGeom prst="rect">
+            <a:avLst/>
+          </a:prstGeom>
+        </p:spPr>
+      </p:pic>
+      <p:pic>
+        <p:nvPicPr>
+          <p:cNvPr id="9" name="Picture 8" descr="image.png"/>
+          <p:cNvPicPr>
+            <a:picLocks noChangeAspect="1"/>
+          </p:cNvPicPr>
+          <p:nvPr/>
+        </p:nvPicPr>
+        <p:blipFill>
+          <a:blip r:embed="rId6"/>
+          <a:stretch>
+            <a:fillRect/>
+          </a:stretch>
+        </p:blipFill>
+        <p:spPr>
+          <a:xfrm>
+            <a:off x="838200" y="4794795"/>
+            <a:ext cx="171450" cy="171450"/>
+          </a:xfrm>
+          <a:prstGeom prst="rect">
+            <a:avLst/>
+          </a:prstGeom>
+        </p:spPr>
+      </p:pic>
+      <p:sp>
+        <p:nvSpPr>
+          <p:cNvPr id="10" name="TextBox 9"/>
+          <p:cNvSpPr txBox="1"/>
+          <p:nvPr/>
+        </p:nvSpPr>
+        <p:spPr>
+          <a:xfrm>
+            <a:off x="609600" y="457200"/>
+            <a:ext cx="11582400" cy="171450"/>
+          </a:xfrm>
+          <a:prstGeom prst="rect">
+            <a:avLst/>
+          </a:prstGeom>
+          <a:noFill/>
+        </p:spPr>
+        <p:txBody>
+          <a:bodyPr wrap="none" lIns="0" rIns="0" tIns="0" bIns="0" anchor="t">
+            <a:spAutoFit/>
+          </a:bodyPr>
+          <a:lstStyle/>
+          <a:p>
+            <a:pPr algn="l"/>
+            <a:r>
+              <a:rPr b="1" sz="1050" i="0" u="none">
+                <a:solidFill>
+                  <a:srgbClr val="E11D48"/>
+                </a:solidFill>
+                <a:latin typeface="Plus Jakarta Sans"/>
+              </a:rPr>
+              <a:t>CONTEXTO Y CASO DE ESTUDIO</a:t>
+            </a:r>
+          </a:p>
+        </p:txBody>
+      </p:sp>
+      <p:sp>
+        <p:nvSpPr>
+          <p:cNvPr id="11" name="TextBox 10"/>
+          <p:cNvSpPr txBox="1"/>
+          <p:nvPr/>
+        </p:nvSpPr>
+        <p:spPr>
+          <a:xfrm>
+            <a:off x="609600" y="685800"/>
+            <a:ext cx="11582400" cy="388590"/>
+          </a:xfrm>
+          <a:prstGeom prst="rect">
+            <a:avLst/>
+          </a:prstGeom>
+          <a:noFill/>
+        </p:spPr>
+        <p:txBody>
+          <a:bodyPr wrap="none" lIns="0" rIns="0" tIns="0" bIns="0" anchor="t">
+            <a:spAutoFit/>
+          </a:bodyPr>
+          <a:lstStyle/>
+          <a:p>
+            <a:pPr algn="l">
+              <a:lnSpc>
+                <a:spcPts val="3060"/>
+              </a:lnSpc>
             </a:pPr>
             <a:r>
-              <a:t>Relevancia en Ingeniería</a:t>
-            </a:r>
-          </a:p>
-          <a:p>
-            <a:pPr>
-              <a:defRPr sz="1250">
-                <a:solidFill>
-                  <a:srgbClr val="282828"/>
-                </a:solidFill>
-              </a:defRPr>
-            </a:pPr>
-            <a:r>
-              <a:t>• Plataformas de streaming: Modelar cuantitativamente la evolución temporal de la demanda permite anticipar picos de consumo.</a:t>
-            </a:r>
-            <a:br/>
-            <a:br/>
-            <a:r>
-              <a:t>• Infraestructura cloud y redes CDN: Estimar ritmos de crecimiento ayuda a dimensionar preventivamente servidores y servicios de distribución de contenido.</a:t>
-            </a:r>
-            <a:br/>
-            <a:br/>
-            <a:r>
-              <a:t>• Naturaleza de los datos: Las mediciones de telemetría son discretas (semanales) y presentan variaciones naturales.</a:t>
-            </a:r>
-            <a:br/>
-            <a:br/>
-            <a:r>
-              <a:t>• Rol de los métodos numéricos: Brindan el marco formal para deducir un modelo analítico continuo, localizar hitos acumulados y calcular tasas de cambio instantáneas.</a:t>
+              <a:rPr b="1" sz="2550" i="0" u="none">
+                <a:solidFill>
+                  <a:srgbClr val="0F172A"/>
+                </a:solidFill>
+                <a:latin typeface="Space Grotesk"/>
+              </a:rPr>
+              <a:t>El Resurgimiento Viral de Belanova</a:t>
+            </a:r>
+          </a:p>
+        </p:txBody>
+      </p:sp>
+      <p:sp>
+        <p:nvSpPr>
+          <p:cNvPr id="12" name="TextBox 11"/>
+          <p:cNvSpPr txBox="1"/>
+          <p:nvPr/>
+        </p:nvSpPr>
+        <p:spPr>
+          <a:xfrm>
+            <a:off x="838200" y="2480220"/>
+            <a:ext cx="6300787" cy="219075"/>
+          </a:xfrm>
+          <a:prstGeom prst="rect">
+            <a:avLst/>
+          </a:prstGeom>
+          <a:noFill/>
+        </p:spPr>
+        <p:txBody>
+          <a:bodyPr wrap="none" lIns="247650" rIns="0" tIns="0" bIns="0" anchor="t">
+            <a:spAutoFit/>
+          </a:bodyPr>
+          <a:lstStyle/>
+          <a:p>
+            <a:pPr algn="l"/>
+            <a:r>
+              <a:rPr b="1" sz="1350" i="0" u="none">
+                <a:solidFill>
+                  <a:srgbClr val="BE123C"/>
+                </a:solidFill>
+                <a:latin typeface="Space Grotesk"/>
+              </a:rPr>
+              <a:t>Clásico Electropop (2006)</a:t>
+            </a:r>
+          </a:p>
+        </p:txBody>
+      </p:sp>
+      <p:sp>
+        <p:nvSpPr>
+          <p:cNvPr id="13" name="TextBox 12"/>
+          <p:cNvSpPr txBox="1"/>
+          <p:nvPr/>
+        </p:nvSpPr>
+        <p:spPr>
+          <a:xfrm>
+            <a:off x="838200" y="2756445"/>
+            <a:ext cx="6000750" cy="219075"/>
+          </a:xfrm>
+          <a:prstGeom prst="rect">
+            <a:avLst/>
+          </a:prstGeom>
+          <a:noFill/>
+        </p:spPr>
+        <p:txBody>
+          <a:bodyPr wrap="none" lIns="0" rIns="0" tIns="0" bIns="0" anchor="t">
+            <a:spAutoFit/>
+          </a:bodyPr>
+          <a:lstStyle/>
+          <a:p>
+            <a:pPr algn="l"/>
+            <a:r>
+              <a:rPr b="0" sz="1350" i="0" u="none">
+                <a:solidFill>
+                  <a:srgbClr val="475569"/>
+                </a:solidFill>
+                <a:latin typeface="Plus Jakarta Sans"/>
+              </a:rPr>
+              <a:t>Lanzamiento original del disco Dulce Beat.</a:t>
+            </a:r>
+          </a:p>
+        </p:txBody>
+      </p:sp>
+      <p:sp>
+        <p:nvSpPr>
+          <p:cNvPr id="14" name="TextBox 13"/>
+          <p:cNvSpPr txBox="1"/>
+          <p:nvPr/>
+        </p:nvSpPr>
+        <p:spPr>
+          <a:xfrm>
+            <a:off x="838200" y="3623220"/>
+            <a:ext cx="6300787" cy="219075"/>
+          </a:xfrm>
+          <a:prstGeom prst="rect">
+            <a:avLst/>
+          </a:prstGeom>
+          <a:noFill/>
+        </p:spPr>
+        <p:txBody>
+          <a:bodyPr wrap="none" lIns="228600" rIns="0" tIns="0" bIns="0" anchor="t">
+            <a:spAutoFit/>
+          </a:bodyPr>
+          <a:lstStyle/>
+          <a:p>
+            <a:pPr algn="l"/>
+            <a:r>
+              <a:rPr b="1" sz="1350" i="0" u="none">
+                <a:solidFill>
+                  <a:srgbClr val="BE123C"/>
+                </a:solidFill>
+                <a:latin typeface="Space Grotesk"/>
+              </a:rPr>
+              <a:t>Tendencia Masiva TikTok (2023)</a:t>
+            </a:r>
+          </a:p>
+        </p:txBody>
+      </p:sp>
+      <p:sp>
+        <p:nvSpPr>
+          <p:cNvPr id="15" name="TextBox 14"/>
+          <p:cNvSpPr txBox="1"/>
+          <p:nvPr/>
+        </p:nvSpPr>
+        <p:spPr>
+          <a:xfrm>
+            <a:off x="838200" y="3899445"/>
+            <a:ext cx="6000750" cy="219075"/>
+          </a:xfrm>
+          <a:prstGeom prst="rect">
+            <a:avLst/>
+          </a:prstGeom>
+          <a:noFill/>
+        </p:spPr>
+        <p:txBody>
+          <a:bodyPr wrap="none" lIns="0" rIns="0" tIns="0" bIns="0" anchor="t">
+            <a:spAutoFit/>
+          </a:bodyPr>
+          <a:lstStyle/>
+          <a:p>
+            <a:pPr algn="l"/>
+            <a:r>
+              <a:rPr b="0" sz="1350" i="0" u="none">
+                <a:solidFill>
+                  <a:srgbClr val="475569"/>
+                </a:solidFill>
+                <a:latin typeface="Plus Jakarta Sans"/>
+              </a:rPr>
+              <a:t>Viralización masiva bajo el trend de sueños frustrados.</a:t>
+            </a:r>
+          </a:p>
+        </p:txBody>
+      </p:sp>
+      <p:sp>
+        <p:nvSpPr>
+          <p:cNvPr id="16" name="TextBox 15"/>
+          <p:cNvSpPr txBox="1"/>
+          <p:nvPr/>
+        </p:nvSpPr>
+        <p:spPr>
+          <a:xfrm>
+            <a:off x="838200" y="4766220"/>
+            <a:ext cx="6300787" cy="219075"/>
+          </a:xfrm>
+          <a:prstGeom prst="rect">
+            <a:avLst/>
+          </a:prstGeom>
+          <a:noFill/>
+        </p:spPr>
+        <p:txBody>
+          <a:bodyPr wrap="none" lIns="247650" rIns="0" tIns="0" bIns="0" anchor="t">
+            <a:spAutoFit/>
+          </a:bodyPr>
+          <a:lstStyle/>
+          <a:p>
+            <a:pPr algn="l"/>
+            <a:r>
+              <a:rPr b="1" sz="1350" i="0" u="none">
+                <a:solidFill>
+                  <a:srgbClr val="BE123C"/>
+                </a:solidFill>
+                <a:latin typeface="Space Grotesk"/>
+              </a:rPr>
+              <a:t>Salto de Escala Exponencial</a:t>
+            </a:r>
+          </a:p>
+        </p:txBody>
+      </p:sp>
+      <p:sp>
+        <p:nvSpPr>
+          <p:cNvPr id="17" name="TextBox 16"/>
+          <p:cNvSpPr txBox="1"/>
+          <p:nvPr/>
+        </p:nvSpPr>
+        <p:spPr>
+          <a:xfrm>
+            <a:off x="838200" y="5042445"/>
+            <a:ext cx="6000750" cy="219075"/>
+          </a:xfrm>
+          <a:prstGeom prst="rect">
+            <a:avLst/>
+          </a:prstGeom>
+          <a:noFill/>
+        </p:spPr>
+        <p:txBody>
+          <a:bodyPr wrap="none" lIns="0" rIns="0" tIns="0" bIns="0" anchor="t">
+            <a:spAutoFit/>
+          </a:bodyPr>
+          <a:lstStyle/>
+          <a:p>
+            <a:pPr algn="l"/>
+            <a:r>
+              <a:rPr b="0" sz="1350" i="0" u="none">
+                <a:solidFill>
+                  <a:srgbClr val="475569"/>
+                </a:solidFill>
+                <a:latin typeface="Plus Jakarta Sans"/>
+              </a:rPr>
+              <a:t>De 1.1 M a pico de 4.17 M semanales en México.</a:t>
             </a:r>
           </a:p>
         </p:txBody>
@@ -3766,6 +6729,14 @@
 <file path=ppt/slides/slide3.xml><?xml version="1.0" encoding="utf-8"?>
 <p:sld xmlns:a="http://schemas.openxmlformats.org/drawingml/2006/main" xmlns:p="http://schemas.openxmlformats.org/presentationml/2006/main" xmlns:r="http://schemas.openxmlformats.org/officeDocument/2006/relationships">
   <p:cSld>
+    <p:bg>
+      <p:bgPr>
+        <a:solidFill>
+          <a:srgbClr val="FFFFFF"/>
+        </a:solidFill>
+        <a:effectLst/>
+      </p:bgPr>
+    </p:bg>
     <p:spTree>
       <p:nvGrpSpPr>
         <p:cNvPr id="1" name=""/>
@@ -3775,126 +6746,145 @@
       <p:grpSpPr/>
       <p:sp>
         <p:nvSpPr>
-          <p:cNvPr id="2" name="TextBox 1"/>
-          <p:cNvSpPr txBox="1"/>
-          <p:nvPr/>
-        </p:nvSpPr>
-        <p:spPr>
-          <a:xfrm>
-            <a:off x="731520" y="365760"/>
-            <a:ext cx="10698480" cy="1005840"/>
-          </a:xfrm>
-          <a:prstGeom prst="rect">
-            <a:avLst/>
-          </a:prstGeom>
-          <a:noFill/>
-        </p:spPr>
-        <p:txBody>
-          <a:bodyPr wrap="square" lIns="0" tIns="0" rIns="0" bIns="0">
-            <a:spAutoFit/>
-          </a:bodyPr>
-          <a:lstStyle/>
-          <a:p>
-            <a:pPr>
-              <a:defRPr sz="1100" b="1">
-                <a:solidFill>
-                  <a:srgbClr val="E91E63"/>
-                </a:solidFill>
-                <a:latin typeface="Calibri"/>
-              </a:defRPr>
-            </a:pPr>
-            <a:r>
-              <a:t>DATOS EXPERIMENTALES</a:t>
-            </a:r>
-          </a:p>
-          <a:p>
-            <a:pPr>
-              <a:defRPr sz="2300" b="1">
-                <a:solidFill>
-                  <a:srgbClr val="1F4E79"/>
-                </a:solidFill>
-                <a:latin typeface="Calibri"/>
-              </a:defRPr>
-            </a:pPr>
-            <a:r>
-              <a:t>Datos Reales: 47 Semanas de Spotify México en 2023</a:t>
-            </a:r>
-          </a:p>
-        </p:txBody>
-      </p:sp>
-      <p:sp>
-        <p:nvSpPr>
-          <p:cNvPr id="3" name="TextBox 2"/>
-          <p:cNvSpPr txBox="1"/>
-          <p:nvPr/>
-        </p:nvSpPr>
-        <p:spPr>
-          <a:xfrm>
-            <a:off x="731520" y="1645920"/>
-            <a:ext cx="4663440" cy="4663440"/>
-          </a:xfrm>
-          <a:prstGeom prst="rect">
-            <a:avLst/>
-          </a:prstGeom>
-          <a:noFill/>
-        </p:spPr>
-        <p:txBody>
-          <a:bodyPr wrap="square">
-            <a:spAutoFit/>
-          </a:bodyPr>
-          <a:lstStyle/>
-          <a:p>
-            <a:pPr>
-              <a:spcAft>
-                <a:spcPts val="1000"/>
-              </a:spcAft>
-              <a:defRPr sz="1600" b="1">
-                <a:solidFill>
-                  <a:srgbClr val="1F4E79"/>
-                </a:solidFill>
-              </a:defRPr>
-            </a:pPr>
-            <a:r>
-              <a:t>Serie Temporal de Telemetría:</a:t>
-            </a:r>
-          </a:p>
-          <a:p>
-            <a:pPr>
-              <a:defRPr sz="1250">
-                <a:solidFill>
-                  <a:srgbClr val="282828"/>
-                </a:solidFill>
-              </a:defRPr>
-            </a:pPr>
-            <a:r>
-              <a:t>• Fuente oficial: kworb.net (track 6Z0ybnsUBhbZ9ZjPW64eoF), que recopila los charts semanales del Top 200 de Spotify México.</a:t>
-            </a:r>
-            <a:br/>
-            <a:br/>
-            <a:r>
-              <a:t>• Alcance: Exclusivamente streams de Spotify México en el Top 200 semanal oficial.</a:t>
-            </a:r>
-            <a:br/>
-            <a:br/>
-            <a:r>
-              <a:t>• Rango: 47 semanas consecutivas de 2023 (t = 0 al 26/01/2023 hasta t = 46 al 14/12/2023).</a:t>
-            </a:r>
-            <a:br/>
-            <a:br/>
-            <a:r>
-              <a:t>• Acumulado anual: 132,9 millones de streams.</a:t>
-            </a:r>
-            <a:br/>
-            <a:br/>
-            <a:r>
-              <a:t>• Hito de 100M: Cruzado entre la semana 35 (99.60 M) y la semana 36 (102.74 M), fines de septiembre de 2023.</a:t>
-            </a:r>
+          <p:cNvPr id="2" name="Rounded Rectangle 1"/>
+          <p:cNvSpPr/>
+          <p:nvPr/>
+        </p:nvSpPr>
+        <p:spPr>
+          <a:xfrm>
+            <a:off x="6324600" y="2142083"/>
+            <a:ext cx="5257800" cy="1171575"/>
+          </a:xfrm>
+          <a:prstGeom prst="roundRect">
+            <a:avLst>
+              <a:gd name="adj" fmla="val 11382"/>
+            </a:avLst>
+          </a:prstGeom>
+          <a:solidFill>
+            <a:srgbClr val="F0F9FF"/>
+          </a:solidFill>
+          <a:ln>
+            <a:noFill/>
+          </a:ln>
+          <a:effectLst/>
+        </p:spPr>
+        <p:style>
+          <a:lnRef idx="1">
+            <a:schemeClr val="accent1"/>
+          </a:lnRef>
+          <a:fillRef idx="3">
+            <a:schemeClr val="accent1"/>
+          </a:fillRef>
+          <a:effectRef idx="2">
+            <a:schemeClr val="accent1"/>
+          </a:effectRef>
+          <a:fontRef idx="minor">
+            <a:schemeClr val="lt1"/>
+          </a:fontRef>
+        </p:style>
+        <p:txBody>
+          <a:bodyPr rtlCol="0" anchor="ctr"/>
+          <a:lstStyle/>
+          <a:p>
+            <a:pPr algn="ctr"/>
+          </a:p>
+        </p:txBody>
+      </p:sp>
+      <p:sp>
+        <p:nvSpPr>
+          <p:cNvPr id="3" name="Rounded Rectangle 2"/>
+          <p:cNvSpPr/>
+          <p:nvPr/>
+        </p:nvSpPr>
+        <p:spPr>
+          <a:xfrm>
+            <a:off x="6324600" y="3504158"/>
+            <a:ext cx="5257800" cy="952500"/>
+          </a:xfrm>
+          <a:prstGeom prst="roundRect">
+            <a:avLst>
+              <a:gd name="adj" fmla="val 14000"/>
+            </a:avLst>
+          </a:prstGeom>
+          <a:solidFill>
+            <a:srgbClr val="F0F9FF"/>
+          </a:solidFill>
+          <a:ln>
+            <a:noFill/>
+          </a:ln>
+          <a:effectLst/>
+        </p:spPr>
+        <p:style>
+          <a:lnRef idx="1">
+            <a:schemeClr val="accent1"/>
+          </a:lnRef>
+          <a:fillRef idx="3">
+            <a:schemeClr val="accent1"/>
+          </a:fillRef>
+          <a:effectRef idx="2">
+            <a:schemeClr val="accent1"/>
+          </a:effectRef>
+          <a:fontRef idx="minor">
+            <a:schemeClr val="lt1"/>
+          </a:fontRef>
+        </p:style>
+        <p:txBody>
+          <a:bodyPr rtlCol="0" anchor="ctr"/>
+          <a:lstStyle/>
+          <a:p>
+            <a:pPr algn="ctr"/>
+          </a:p>
+        </p:txBody>
+      </p:sp>
+      <p:sp>
+        <p:nvSpPr>
+          <p:cNvPr id="4" name="Rounded Rectangle 3"/>
+          <p:cNvSpPr/>
+          <p:nvPr/>
+        </p:nvSpPr>
+        <p:spPr>
+          <a:xfrm>
+            <a:off x="6324600" y="4647158"/>
+            <a:ext cx="5257800" cy="952500"/>
+          </a:xfrm>
+          <a:prstGeom prst="roundRect">
+            <a:avLst>
+              <a:gd name="adj" fmla="val 14000"/>
+            </a:avLst>
+          </a:prstGeom>
+          <a:solidFill>
+            <a:srgbClr val="F0F9FF"/>
+          </a:solidFill>
+          <a:ln>
+            <a:noFill/>
+          </a:ln>
+          <a:effectLst/>
+        </p:spPr>
+        <p:style>
+          <a:lnRef idx="1">
+            <a:schemeClr val="accent1"/>
+          </a:lnRef>
+          <a:fillRef idx="3">
+            <a:schemeClr val="accent1"/>
+          </a:fillRef>
+          <a:effectRef idx="2">
+            <a:schemeClr val="accent1"/>
+          </a:effectRef>
+          <a:fontRef idx="minor">
+            <a:schemeClr val="lt1"/>
+          </a:fontRef>
+        </p:style>
+        <p:txBody>
+          <a:bodyPr rtlCol="0" anchor="ctr"/>
+          <a:lstStyle/>
+          <a:p>
+            <a:pPr algn="ctr"/>
           </a:p>
         </p:txBody>
       </p:sp>
       <p:pic>
         <p:nvPicPr>
-          <p:cNvPr id="4" name="Picture 3" descr="grafico_1_ajuste_curva_streams.png"/>
+          <p:cNvPr id="5" name="Picture 4" descr="image.png"/>
           <p:cNvPicPr>
             <a:picLocks noChangeAspect="1"/>
           </p:cNvPicPr>
@@ -3908,14 +6898,394 @@
         </p:blipFill>
         <p:spPr>
           <a:xfrm>
-            <a:off x="5577840" y="1645920"/>
-            <a:ext cx="5852160" cy="3511296"/>
+            <a:off x="609600" y="1870620"/>
+            <a:ext cx="5257800" cy="4000500"/>
           </a:xfrm>
           <a:prstGeom prst="rect">
             <a:avLst/>
           </a:prstGeom>
         </p:spPr>
       </p:pic>
+      <p:pic>
+        <p:nvPicPr>
+          <p:cNvPr id="6" name="Picture 5" descr="image.png"/>
+          <p:cNvPicPr>
+            <a:picLocks noChangeAspect="1"/>
+          </p:cNvPicPr>
+          <p:nvPr/>
+        </p:nvPicPr>
+        <p:blipFill>
+          <a:blip r:embed="rId3"/>
+          <a:stretch>
+            <a:fillRect/>
+          </a:stretch>
+        </p:blipFill>
+        <p:spPr>
+          <a:xfrm>
+            <a:off x="609600" y="1870620"/>
+            <a:ext cx="5257800" cy="4000500"/>
+          </a:xfrm>
+          <a:prstGeom prst="rect">
+            <a:avLst/>
+          </a:prstGeom>
+        </p:spPr>
+      </p:pic>
+      <p:pic>
+        <p:nvPicPr>
+          <p:cNvPr id="7" name="Picture 6" descr="image.png"/>
+          <p:cNvPicPr>
+            <a:picLocks noChangeAspect="1"/>
+          </p:cNvPicPr>
+          <p:nvPr/>
+        </p:nvPicPr>
+        <p:blipFill>
+          <a:blip r:embed="rId4"/>
+          <a:stretch>
+            <a:fillRect/>
+          </a:stretch>
+        </p:blipFill>
+        <p:spPr>
+          <a:xfrm>
+            <a:off x="6553200" y="2399258"/>
+            <a:ext cx="171450" cy="171450"/>
+          </a:xfrm>
+          <a:prstGeom prst="rect">
+            <a:avLst/>
+          </a:prstGeom>
+        </p:spPr>
+      </p:pic>
+      <p:pic>
+        <p:nvPicPr>
+          <p:cNvPr id="8" name="Picture 7" descr="image.png"/>
+          <p:cNvPicPr>
+            <a:picLocks noChangeAspect="1"/>
+          </p:cNvPicPr>
+          <p:nvPr/>
+        </p:nvPicPr>
+        <p:blipFill>
+          <a:blip r:embed="rId5"/>
+          <a:stretch>
+            <a:fillRect/>
+          </a:stretch>
+        </p:blipFill>
+        <p:spPr>
+          <a:xfrm>
+            <a:off x="6553200" y="3761333"/>
+            <a:ext cx="219075" cy="171450"/>
+          </a:xfrm>
+          <a:prstGeom prst="rect">
+            <a:avLst/>
+          </a:prstGeom>
+        </p:spPr>
+      </p:pic>
+      <p:pic>
+        <p:nvPicPr>
+          <p:cNvPr id="9" name="Picture 8" descr="image.png"/>
+          <p:cNvPicPr>
+            <a:picLocks noChangeAspect="1"/>
+          </p:cNvPicPr>
+          <p:nvPr/>
+        </p:nvPicPr>
+        <p:blipFill>
+          <a:blip r:embed="rId6"/>
+          <a:stretch>
+            <a:fillRect/>
+          </a:stretch>
+        </p:blipFill>
+        <p:spPr>
+          <a:xfrm>
+            <a:off x="6553200" y="4904333"/>
+            <a:ext cx="133350" cy="171450"/>
+          </a:xfrm>
+          <a:prstGeom prst="rect">
+            <a:avLst/>
+          </a:prstGeom>
+        </p:spPr>
+      </p:pic>
+      <p:sp>
+        <p:nvSpPr>
+          <p:cNvPr id="10" name="TextBox 9"/>
+          <p:cNvSpPr txBox="1"/>
+          <p:nvPr/>
+        </p:nvSpPr>
+        <p:spPr>
+          <a:xfrm>
+            <a:off x="609600" y="457200"/>
+            <a:ext cx="11582400" cy="171450"/>
+          </a:xfrm>
+          <a:prstGeom prst="rect">
+            <a:avLst/>
+          </a:prstGeom>
+          <a:noFill/>
+        </p:spPr>
+        <p:txBody>
+          <a:bodyPr wrap="none" lIns="0" rIns="0" tIns="0" bIns="0" anchor="t">
+            <a:spAutoFit/>
+          </a:bodyPr>
+          <a:lstStyle/>
+          <a:p>
+            <a:pPr algn="l"/>
+            <a:r>
+              <a:rPr b="1" sz="1050" i="0" u="none">
+                <a:solidFill>
+                  <a:srgbClr val="0284C7"/>
+                </a:solidFill>
+                <a:latin typeface="Plus Jakarta Sans"/>
+              </a:rPr>
+              <a:t>JUSTIFICACIÓN TÉCNICA</a:t>
+            </a:r>
+          </a:p>
+        </p:txBody>
+      </p:sp>
+      <p:sp>
+        <p:nvSpPr>
+          <p:cNvPr id="11" name="TextBox 10"/>
+          <p:cNvSpPr txBox="1"/>
+          <p:nvPr/>
+        </p:nvSpPr>
+        <p:spPr>
+          <a:xfrm>
+            <a:off x="609600" y="685800"/>
+            <a:ext cx="11582400" cy="388590"/>
+          </a:xfrm>
+          <a:prstGeom prst="rect">
+            <a:avLst/>
+          </a:prstGeom>
+          <a:noFill/>
+        </p:spPr>
+        <p:txBody>
+          <a:bodyPr wrap="none" lIns="0" rIns="0" tIns="0" bIns="0" anchor="t">
+            <a:spAutoFit/>
+          </a:bodyPr>
+          <a:lstStyle/>
+          <a:p>
+            <a:pPr algn="l">
+              <a:lnSpc>
+                <a:spcPts val="3060"/>
+              </a:lnSpc>
+            </a:pPr>
+            <a:r>
+              <a:rPr b="1" sz="2550" i="0" u="none">
+                <a:solidFill>
+                  <a:srgbClr val="0F172A"/>
+                </a:solidFill>
+                <a:latin typeface="Space Grotesk"/>
+              </a:rPr>
+              <a:t>Telemetría y Dimensionamiento Cloud</a:t>
+            </a:r>
+          </a:p>
+        </p:txBody>
+      </p:sp>
+      <p:sp>
+        <p:nvSpPr>
+          <p:cNvPr id="12" name="TextBox 11"/>
+          <p:cNvSpPr txBox="1"/>
+          <p:nvPr/>
+        </p:nvSpPr>
+        <p:spPr>
+          <a:xfrm>
+            <a:off x="6553200" y="2370683"/>
+            <a:ext cx="5638800" cy="219075"/>
+          </a:xfrm>
+          <a:prstGeom prst="rect">
+            <a:avLst/>
+          </a:prstGeom>
+          <a:noFill/>
+        </p:spPr>
+        <p:txBody>
+          <a:bodyPr wrap="none" lIns="247650" rIns="0" tIns="0" bIns="0" anchor="t">
+            <a:spAutoFit/>
+          </a:bodyPr>
+          <a:lstStyle/>
+          <a:p>
+            <a:pPr algn="l"/>
+            <a:r>
+              <a:rPr b="1" sz="1350" i="0" u="none">
+                <a:solidFill>
+                  <a:srgbClr val="0369A1"/>
+                </a:solidFill>
+                <a:latin typeface="Space Grotesk"/>
+              </a:rPr>
+              <a:t>Infraestructura y Redes CDN</a:t>
+            </a:r>
+          </a:p>
+        </p:txBody>
+      </p:sp>
+      <p:sp>
+        <p:nvSpPr>
+          <p:cNvPr id="13" name="TextBox 12"/>
+          <p:cNvSpPr txBox="1"/>
+          <p:nvPr/>
+        </p:nvSpPr>
+        <p:spPr>
+          <a:xfrm>
+            <a:off x="6553200" y="2646908"/>
+            <a:ext cx="4895850" cy="438150"/>
+          </a:xfrm>
+          <a:prstGeom prst="rect">
+            <a:avLst/>
+          </a:prstGeom>
+          <a:noFill/>
+        </p:spPr>
+        <p:txBody>
+          <a:bodyPr wrap="square" lIns="0" rIns="0" tIns="0" bIns="0" anchor="t">
+            <a:spAutoFit/>
+          </a:bodyPr>
+          <a:lstStyle/>
+          <a:p>
+            <a:pPr algn="l"/>
+            <a:r>
+              <a:rPr b="0" sz="1350" i="0" u="none">
+                <a:solidFill>
+                  <a:srgbClr val="475569"/>
+                </a:solidFill>
+                <a:latin typeface="Plus Jakarta Sans"/>
+              </a:rPr>
+              <a:t>Dimensionamiento elástico ante aumentos súbitos de demanda.</a:t>
+            </a:r>
+          </a:p>
+        </p:txBody>
+      </p:sp>
+      <p:sp>
+        <p:nvSpPr>
+          <p:cNvPr id="14" name="TextBox 13"/>
+          <p:cNvSpPr txBox="1"/>
+          <p:nvPr/>
+        </p:nvSpPr>
+        <p:spPr>
+          <a:xfrm>
+            <a:off x="6553200" y="3732758"/>
+            <a:ext cx="5638800" cy="219075"/>
+          </a:xfrm>
+          <a:prstGeom prst="rect">
+            <a:avLst/>
+          </a:prstGeom>
+          <a:noFill/>
+        </p:spPr>
+        <p:txBody>
+          <a:bodyPr wrap="none" lIns="295275" rIns="0" tIns="0" bIns="0" anchor="t">
+            <a:spAutoFit/>
+          </a:bodyPr>
+          <a:lstStyle/>
+          <a:p>
+            <a:pPr algn="l"/>
+            <a:r>
+              <a:rPr b="1" sz="1350" i="0" u="none">
+                <a:solidFill>
+                  <a:srgbClr val="0369A1"/>
+                </a:solidFill>
+                <a:latin typeface="Space Grotesk"/>
+              </a:rPr>
+              <a:t>Naturaleza Discreta del Dato</a:t>
+            </a:r>
+          </a:p>
+        </p:txBody>
+      </p:sp>
+      <p:sp>
+        <p:nvSpPr>
+          <p:cNvPr id="15" name="TextBox 14"/>
+          <p:cNvSpPr txBox="1"/>
+          <p:nvPr/>
+        </p:nvSpPr>
+        <p:spPr>
+          <a:xfrm>
+            <a:off x="6553200" y="4008983"/>
+            <a:ext cx="5638800" cy="219075"/>
+          </a:xfrm>
+          <a:prstGeom prst="rect">
+            <a:avLst/>
+          </a:prstGeom>
+          <a:noFill/>
+        </p:spPr>
+        <p:txBody>
+          <a:bodyPr wrap="none" lIns="0" rIns="0" tIns="0" bIns="0" anchor="t">
+            <a:spAutoFit/>
+          </a:bodyPr>
+          <a:lstStyle/>
+          <a:p>
+            <a:pPr algn="l"/>
+            <a:r>
+              <a:rPr b="0" sz="1350" i="0" u="none">
+                <a:solidFill>
+                  <a:srgbClr val="475569"/>
+                </a:solidFill>
+                <a:latin typeface="Plus Jakarta Sans"/>
+              </a:rPr>
+              <a:t>Muestreo semanal con dispersión y ruido estocástico.</a:t>
+            </a:r>
+          </a:p>
+        </p:txBody>
+      </p:sp>
+      <p:sp>
+        <p:nvSpPr>
+          <p:cNvPr id="16" name="TextBox 15"/>
+          <p:cNvSpPr txBox="1"/>
+          <p:nvPr/>
+        </p:nvSpPr>
+        <p:spPr>
+          <a:xfrm>
+            <a:off x="6553200" y="4875758"/>
+            <a:ext cx="5638800" cy="219075"/>
+          </a:xfrm>
+          <a:prstGeom prst="rect">
+            <a:avLst/>
+          </a:prstGeom>
+          <a:noFill/>
+        </p:spPr>
+        <p:txBody>
+          <a:bodyPr wrap="none" lIns="209550" rIns="0" tIns="0" bIns="0" anchor="t">
+            <a:spAutoFit/>
+          </a:bodyPr>
+          <a:lstStyle/>
+          <a:p>
+            <a:pPr algn="l"/>
+            <a:r>
+              <a:rPr b="1" sz="1350" i="0" u="none">
+                <a:solidFill>
+                  <a:srgbClr val="0369A1"/>
+                </a:solidFill>
+                <a:latin typeface="Space Grotesk"/>
+              </a:rPr>
+              <a:t>Aporte Numérico</a:t>
+            </a:r>
+          </a:p>
+        </p:txBody>
+      </p:sp>
+      <p:sp>
+        <p:nvSpPr>
+          <p:cNvPr id="17" name="TextBox 16"/>
+          <p:cNvSpPr txBox="1"/>
+          <p:nvPr/>
+        </p:nvSpPr>
+        <p:spPr>
+          <a:xfrm>
+            <a:off x="6553200" y="5151983"/>
+            <a:ext cx="5638800" cy="219075"/>
+          </a:xfrm>
+          <a:prstGeom prst="rect">
+            <a:avLst/>
+          </a:prstGeom>
+          <a:noFill/>
+        </p:spPr>
+        <p:txBody>
+          <a:bodyPr wrap="none" lIns="0" rIns="0" tIns="0" bIns="0" anchor="t">
+            <a:spAutoFit/>
+          </a:bodyPr>
+          <a:lstStyle/>
+          <a:p>
+            <a:pPr algn="l"/>
+            <a:r>
+              <a:rPr b="0" sz="1350" i="0" u="none">
+                <a:solidFill>
+                  <a:srgbClr val="475569"/>
+                </a:solidFill>
+                <a:latin typeface="Plus Jakarta Sans"/>
+              </a:rPr>
+              <a:t>Conversión analítica continua para optimizar recursos.</a:t>
+            </a:r>
+          </a:p>
+        </p:txBody>
+      </p:sp>
     </p:spTree>
   </p:cSld>
   <p:clrMapOvr>
@@ -3927,6 +7297,14 @@
 <file path=ppt/slides/slide4.xml><?xml version="1.0" encoding="utf-8"?>
 <p:sld xmlns:a="http://schemas.openxmlformats.org/drawingml/2006/main" xmlns:p="http://schemas.openxmlformats.org/presentationml/2006/main" xmlns:r="http://schemas.openxmlformats.org/officeDocument/2006/relationships">
   <p:cSld>
+    <p:bg>
+      <p:bgPr>
+        <a:solidFill>
+          <a:srgbClr val="FFFFFF"/>
+        </a:solidFill>
+        <a:effectLst/>
+      </p:bgPr>
+    </p:bg>
     <p:spTree>
       <p:nvGrpSpPr>
         <p:cNvPr id="1" name=""/>
@@ -3934,159 +7312,317 @@
         <p:nvPr/>
       </p:nvGrpSpPr>
       <p:grpSpPr/>
-      <p:sp>
-        <p:nvSpPr>
-          <p:cNvPr id="2" name="TextBox 1"/>
-          <p:cNvSpPr txBox="1"/>
-          <p:nvPr/>
-        </p:nvSpPr>
-        <p:spPr>
-          <a:xfrm>
-            <a:off x="731520" y="365760"/>
-            <a:ext cx="10698480" cy="1005840"/>
-          </a:xfrm>
-          <a:prstGeom prst="rect">
-            <a:avLst/>
-          </a:prstGeom>
-          <a:noFill/>
-        </p:spPr>
-        <p:txBody>
-          <a:bodyPr wrap="square" lIns="0" tIns="0" rIns="0" bIns="0">
-            <a:spAutoFit/>
-          </a:bodyPr>
-          <a:lstStyle/>
-          <a:p>
-            <a:pPr>
-              <a:defRPr sz="1100" b="1">
-                <a:solidFill>
-                  <a:srgbClr val="E91E63"/>
-                </a:solidFill>
-                <a:latin typeface="Calibri"/>
-              </a:defRPr>
+      <p:pic>
+        <p:nvPicPr>
+          <p:cNvPr id="2" name="Picture 1" descr="image.png"/>
+          <p:cNvPicPr>
+            <a:picLocks noChangeAspect="1"/>
+          </p:cNvPicPr>
+          <p:nvPr/>
+        </p:nvPicPr>
+        <p:blipFill>
+          <a:blip r:embed="rId2"/>
+          <a:stretch>
+            <a:fillRect/>
+          </a:stretch>
+        </p:blipFill>
+        <p:spPr>
+          <a:xfrm>
+            <a:off x="609600" y="1245840"/>
+            <a:ext cx="10972800" cy="4802534"/>
+          </a:xfrm>
+          <a:prstGeom prst="rect">
+            <a:avLst/>
+          </a:prstGeom>
+        </p:spPr>
+      </p:pic>
+      <p:pic>
+        <p:nvPicPr>
+          <p:cNvPr id="3" name="Picture 2" descr="image.png"/>
+          <p:cNvPicPr>
+            <a:picLocks noChangeAspect="1"/>
+          </p:cNvPicPr>
+          <p:nvPr/>
+        </p:nvPicPr>
+        <p:blipFill>
+          <a:blip r:embed="rId3"/>
+          <a:stretch>
+            <a:fillRect/>
+          </a:stretch>
+        </p:blipFill>
+        <p:spPr>
+          <a:xfrm>
+            <a:off x="914400" y="2123033"/>
+            <a:ext cx="10363200" cy="3048000"/>
+          </a:xfrm>
+          <a:prstGeom prst="rect">
+            <a:avLst/>
+          </a:prstGeom>
+        </p:spPr>
+      </p:pic>
+      <p:sp>
+        <p:nvSpPr>
+          <p:cNvPr id="4" name="TextBox 3"/>
+          <p:cNvSpPr txBox="1"/>
+          <p:nvPr/>
+        </p:nvSpPr>
+        <p:spPr>
+          <a:xfrm>
+            <a:off x="609600" y="6200775"/>
+            <a:ext cx="4702968" cy="200025"/>
+          </a:xfrm>
+          <a:prstGeom prst="rect">
+            <a:avLst/>
+          </a:prstGeom>
+          <a:noFill/>
+        </p:spPr>
+        <p:txBody>
+          <a:bodyPr wrap="none" lIns="0" rIns="0" tIns="0" bIns="0" anchor="t">
+            <a:spAutoFit/>
+          </a:bodyPr>
+          <a:lstStyle/>
+          <a:p>
+            <a:pPr algn="l"/>
+            <a:r>
+              <a:rPr b="1" sz="1200" i="0" u="none">
+                <a:solidFill>
+                  <a:srgbClr val="475569"/>
+                </a:solidFill>
+                <a:latin typeface="Plus Jakarta Sans"/>
+              </a:rPr>
+              <a:t>Fuente Oficial: </a:t>
+            </a:r>
+            <a:r>
+              <a:rPr b="1" sz="1200" i="0" u="none">
+                <a:solidFill>
+                  <a:srgbClr val="0F172A"/>
+                </a:solidFill>
+                <a:latin typeface="Plus Jakarta Sans"/>
+              </a:rPr>
+              <a:t>kworb.net (Top 200 Spotify México)</a:t>
+            </a:r>
+          </a:p>
+        </p:txBody>
+      </p:sp>
+      <p:sp>
+        <p:nvSpPr>
+          <p:cNvPr id="5" name="TextBox 4"/>
+          <p:cNvSpPr txBox="1"/>
+          <p:nvPr/>
+        </p:nvSpPr>
+        <p:spPr>
+          <a:xfrm>
+            <a:off x="8324850" y="6200775"/>
+            <a:ext cx="3867150" cy="200025"/>
+          </a:xfrm>
+          <a:prstGeom prst="rect">
+            <a:avLst/>
+          </a:prstGeom>
+          <a:noFill/>
+        </p:spPr>
+        <p:txBody>
+          <a:bodyPr wrap="none" lIns="0" rIns="0" tIns="0" bIns="0" anchor="t">
+            <a:spAutoFit/>
+          </a:bodyPr>
+          <a:lstStyle/>
+          <a:p>
+            <a:pPr algn="l"/>
+            <a:r>
+              <a:rPr b="1" sz="1200" i="0" u="none">
+                <a:solidFill>
+                  <a:srgbClr val="475569"/>
+                </a:solidFill>
+                <a:latin typeface="Plus Jakarta Sans"/>
+              </a:rPr>
+              <a:t>Acumulado 26/01-14/12/2023: </a:t>
+            </a:r>
+            <a:r>
+              <a:rPr b="1" sz="1200" i="0" u="none">
+                <a:solidFill>
+                  <a:srgbClr val="E11D48"/>
+                </a:solidFill>
+                <a:latin typeface="Plus Jakarta Sans"/>
+              </a:rPr>
+              <a:t>132.9 M</a:t>
+            </a:r>
+          </a:p>
+        </p:txBody>
+      </p:sp>
+      <p:sp>
+        <p:nvSpPr>
+          <p:cNvPr id="6" name="TextBox 5"/>
+          <p:cNvSpPr txBox="1"/>
+          <p:nvPr/>
+        </p:nvSpPr>
+        <p:spPr>
+          <a:xfrm>
+            <a:off x="609600" y="457200"/>
+            <a:ext cx="8810625" cy="171450"/>
+          </a:xfrm>
+          <a:prstGeom prst="rect">
+            <a:avLst/>
+          </a:prstGeom>
+          <a:noFill/>
+        </p:spPr>
+        <p:txBody>
+          <a:bodyPr wrap="none" lIns="0" rIns="0" tIns="0" bIns="0" anchor="t">
+            <a:spAutoFit/>
+          </a:bodyPr>
+          <a:lstStyle/>
+          <a:p>
+            <a:pPr algn="l"/>
+            <a:r>
+              <a:rPr b="1" sz="1050" i="0" u="none">
+                <a:solidFill>
+                  <a:srgbClr val="E11D48"/>
+                </a:solidFill>
+                <a:latin typeface="Plus Jakarta Sans"/>
+              </a:rPr>
+              <a:t>MUESTREO EXPERIMENTAL</a:t>
+            </a:r>
+          </a:p>
+        </p:txBody>
+      </p:sp>
+      <p:sp>
+        <p:nvSpPr>
+          <p:cNvPr id="7" name="TextBox 6"/>
+          <p:cNvSpPr txBox="1"/>
+          <p:nvPr/>
+        </p:nvSpPr>
+        <p:spPr>
+          <a:xfrm>
+            <a:off x="609600" y="666750"/>
+            <a:ext cx="9251156" cy="388590"/>
+          </a:xfrm>
+          <a:prstGeom prst="rect">
+            <a:avLst/>
+          </a:prstGeom>
+          <a:noFill/>
+        </p:spPr>
+        <p:txBody>
+          <a:bodyPr wrap="none" lIns="0" rIns="0" tIns="0" bIns="0" anchor="t">
+            <a:spAutoFit/>
+          </a:bodyPr>
+          <a:lstStyle/>
+          <a:p>
+            <a:pPr algn="l">
+              <a:lnSpc>
+                <a:spcPts val="3060"/>
+              </a:lnSpc>
             </a:pPr>
             <a:r>
-              <a:t>REGRESIÓN POLINÓMICA</a:t>
-            </a:r>
-          </a:p>
-          <a:p>
-            <a:pPr>
-              <a:defRPr sz="2300" b="1">
-                <a:solidFill>
-                  <a:srgbClr val="1F4E79"/>
-                </a:solidFill>
-                <a:latin typeface="Calibri"/>
-              </a:defRPr>
-            </a:pPr>
-            <a:r>
-              <a:t>Método 1: Ajuste de Curvas por Mínimos Cuadrados</a:t>
-            </a:r>
-          </a:p>
-        </p:txBody>
-      </p:sp>
-      <p:sp>
-        <p:nvSpPr>
-          <p:cNvPr id="3" name="Rounded Rectangle 2"/>
-          <p:cNvSpPr/>
-          <p:nvPr/>
-        </p:nvSpPr>
-        <p:spPr>
-          <a:xfrm>
-            <a:off x="731520" y="1645920"/>
-            <a:ext cx="10698480" cy="4663440"/>
-          </a:xfrm>
-          <a:prstGeom prst="roundRect">
-            <a:avLst/>
-          </a:prstGeom>
-          <a:solidFill>
-            <a:srgbClr val="F5F7FA"/>
-          </a:solidFill>
-          <a:ln>
-            <a:solidFill>
-              <a:srgbClr val="D9E1F2"/>
-            </a:solidFill>
-          </a:ln>
-        </p:spPr>
-        <p:style>
-          <a:lnRef idx="1">
-            <a:schemeClr val="accent1"/>
-          </a:lnRef>
-          <a:fillRef idx="3">
-            <a:schemeClr val="accent1"/>
-          </a:fillRef>
-          <a:effectRef idx="2">
-            <a:schemeClr val="accent1"/>
-          </a:effectRef>
-          <a:fontRef idx="minor">
-            <a:schemeClr val="lt1"/>
-          </a:fontRef>
-        </p:style>
-        <p:txBody>
-          <a:bodyPr rtlCol="0" anchor="ctr" wrap="square" lIns="365760" tIns="365760"/>
-          <a:lstStyle/>
-          <a:p>
-            <a:pPr algn="ctr">
-              <a:spcAft>
-                <a:spcPts val="1200"/>
-              </a:spcAft>
-              <a:defRPr sz="1800" b="1">
-                <a:solidFill>
-                  <a:srgbClr val="1F4E79"/>
-                </a:solidFill>
-              </a:defRPr>
-            </a:pPr>
-            <a:r>
-              <a:t>Modelo Continuo Cúbico: S(t) = a·t³ + b·t² + c·t + d</a:t>
-            </a:r>
-          </a:p>
-          <a:p>
-            <a:pPr>
-              <a:defRPr sz="1250">
-                <a:solidFill>
-                  <a:srgbClr val="282828"/>
-                </a:solidFill>
-              </a:defRPr>
-            </a:pPr>
-            <a:r>
-              <a:t>• Justificación del grado 3: Permite capturar la concavidad positiva inicial (aceleración por el trend de TikTok) y la posterior concavidad negativa (inflexión y estabilización hacia fin de año).</a:t>
-            </a:r>
-            <a:br/>
-            <a:br/>
-            <a:r>
-              <a:t>Coeficientes obtenidos (Mínimos Cuadrados sobre 47 semanas):</a:t>
-            </a:r>
-            <a:br/>
-            <a:r>
-              <a:t>   a = -0.000839  |  b = 0.076977  |  c = 1.081162  |  d = 2.072898</a:t>
-            </a:r>
-            <a:br/>
-            <a:br/>
-            <a:r>
-              <a:t>Ecuación del modelo ajustado:</a:t>
-            </a:r>
-            <a:br/>
-            <a:r>
-              <a:t>   S(t) = -0.000839·t³ + 0.076977·t² + 1.081162·t + 2.072898</a:t>
-            </a:r>
-            <a:br/>
-            <a:br/>
-            <a:r>
-              <a:t>Evaluación estadística de la bondad de ajuste:</a:t>
-            </a:r>
-            <a:br/>
-            <a:r>
-              <a:t>   • Suma de cuadrados de los residuos: Sr = 36.9406</a:t>
-            </a:r>
-            <a:br/>
-            <a:r>
-              <a:t>   • Suma total de cuadrados respecto a la media: St = 79,137.5830</a:t>
-            </a:r>
-            <a:br/>
-            <a:r>
-              <a:t>   • Coeficiente de determinación: R² = 0.999533 (99.95% de la varianza explicada)</a:t>
-            </a:r>
-            <a:br/>
-            <a:r>
-              <a:t>   • Error estándar de la estimación: Sy/x = 0.9269 millones de streams</a:t>
+              <a:rPr b="1" sz="2550" i="0" u="none">
+                <a:solidFill>
+                  <a:srgbClr val="0F172A"/>
+                </a:solidFill>
+                <a:latin typeface="Space Grotesk"/>
+              </a:rPr>
+              <a:t>47 Semanas de Telemetría en Spotify México</a:t>
+            </a:r>
+          </a:p>
+        </p:txBody>
+      </p:sp>
+      <p:sp>
+        <p:nvSpPr>
+          <p:cNvPr id="8" name="TextBox 7"/>
+          <p:cNvSpPr txBox="1"/>
+          <p:nvPr/>
+        </p:nvSpPr>
+        <p:spPr>
+          <a:xfrm>
+            <a:off x="7726680" y="883890"/>
+            <a:ext cx="1124712" cy="171450"/>
+          </a:xfrm>
+          <a:prstGeom prst="rect">
+            <a:avLst/>
+          </a:prstGeom>
+          <a:noFill/>
+        </p:spPr>
+        <p:txBody>
+          <a:bodyPr wrap="none" lIns="0" rIns="0" tIns="0" bIns="0" anchor="t">
+            <a:spAutoFit/>
+          </a:bodyPr>
+          <a:lstStyle/>
+          <a:p>
+            <a:pPr algn="l"/>
+            <a:r>
+              <a:rPr b="1" sz="1050" i="0" u="none">
+                <a:solidFill>
+                  <a:srgbClr val="E11D48"/>
+                </a:solidFill>
+                <a:latin typeface="Plus Jakarta Sans"/>
+              </a:rPr>
+              <a:t>Datos reales</a:t>
+            </a:r>
+          </a:p>
+        </p:txBody>
+      </p:sp>
+      <p:sp>
+        <p:nvSpPr>
+          <p:cNvPr id="9" name="TextBox 8"/>
+          <p:cNvSpPr txBox="1"/>
+          <p:nvPr/>
+        </p:nvSpPr>
+        <p:spPr>
+          <a:xfrm>
+            <a:off x="9171432" y="883890"/>
+            <a:ext cx="1207007" cy="171450"/>
+          </a:xfrm>
+          <a:prstGeom prst="rect">
+            <a:avLst/>
+          </a:prstGeom>
+          <a:noFill/>
+        </p:spPr>
+        <p:txBody>
+          <a:bodyPr wrap="none" lIns="0" rIns="0" tIns="0" bIns="0" anchor="t">
+            <a:spAutoFit/>
+          </a:bodyPr>
+          <a:lstStyle/>
+          <a:p>
+            <a:pPr algn="l"/>
+            <a:r>
+              <a:rPr b="1" sz="1050" i="0" u="none">
+                <a:solidFill>
+                  <a:srgbClr val="0F172A"/>
+                </a:solidFill>
+                <a:latin typeface="Plus Jakarta Sans"/>
+              </a:rPr>
+              <a:t>Ajuste cúbico</a:t>
+            </a:r>
+          </a:p>
+        </p:txBody>
+      </p:sp>
+      <p:sp>
+        <p:nvSpPr>
+          <p:cNvPr id="10" name="TextBox 9"/>
+          <p:cNvSpPr txBox="1"/>
+          <p:nvPr/>
+        </p:nvSpPr>
+        <p:spPr>
+          <a:xfrm>
+            <a:off x="10698480" y="883890"/>
+            <a:ext cx="877824" cy="171450"/>
+          </a:xfrm>
+          <a:prstGeom prst="rect">
+            <a:avLst/>
+          </a:prstGeom>
+          <a:noFill/>
+        </p:spPr>
+        <p:txBody>
+          <a:bodyPr wrap="none" lIns="0" rIns="0" tIns="0" bIns="0" anchor="t">
+            <a:spAutoFit/>
+          </a:bodyPr>
+          <a:lstStyle/>
+          <a:p>
+            <a:pPr algn="l"/>
+            <a:r>
+              <a:rPr b="1" sz="1050" i="0" u="none">
+                <a:solidFill>
+                  <a:srgbClr val="0D9488"/>
+                </a:solidFill>
+                <a:latin typeface="Plus Jakarta Sans"/>
+              </a:rPr>
+              <a:t>Trazadora</a:t>
             </a:r>
           </a:p>
         </p:txBody>
@@ -4102,6 +7638,14 @@
 <file path=ppt/slides/slide5.xml><?xml version="1.0" encoding="utf-8"?>
 <p:sld xmlns:a="http://schemas.openxmlformats.org/drawingml/2006/main" xmlns:p="http://schemas.openxmlformats.org/presentationml/2006/main" xmlns:r="http://schemas.openxmlformats.org/officeDocument/2006/relationships">
   <p:cSld>
+    <p:bg>
+      <p:bgPr>
+        <a:solidFill>
+          <a:srgbClr val="FFFFFF"/>
+        </a:solidFill>
+        <a:effectLst/>
+      </p:bgPr>
+    </p:bg>
     <p:spTree>
       <p:nvGrpSpPr>
         <p:cNvPr id="1" name=""/>
@@ -4111,75 +7655,27 @@
       <p:grpSpPr/>
       <p:sp>
         <p:nvSpPr>
-          <p:cNvPr id="2" name="TextBox 1"/>
-          <p:cNvSpPr txBox="1"/>
-          <p:nvPr/>
-        </p:nvSpPr>
-        <p:spPr>
-          <a:xfrm>
-            <a:off x="731520" y="365760"/>
-            <a:ext cx="10698480" cy="1005840"/>
-          </a:xfrm>
-          <a:prstGeom prst="rect">
-            <a:avLst/>
-          </a:prstGeom>
-          <a:noFill/>
-        </p:spPr>
-        <p:txBody>
-          <a:bodyPr wrap="square" lIns="0" tIns="0" rIns="0" bIns="0">
-            <a:spAutoFit/>
-          </a:bodyPr>
-          <a:lstStyle/>
-          <a:p>
-            <a:pPr>
-              <a:defRPr sz="1100" b="1">
-                <a:solidFill>
-                  <a:srgbClr val="E91E63"/>
-                </a:solidFill>
-                <a:latin typeface="Calibri"/>
-              </a:defRPr>
-            </a:pPr>
-            <a:r>
-              <a:t>BÚSQUEDA DE RAÍCES</a:t>
-            </a:r>
-          </a:p>
-          <a:p>
-            <a:pPr>
-              <a:defRPr sz="2300" b="1">
-                <a:solidFill>
-                  <a:srgbClr val="1F4E79"/>
-                </a:solidFill>
-                <a:latin typeface="Calibri"/>
-              </a:defRPr>
-            </a:pPr>
-            <a:r>
-              <a:t>Método 2: Búsqueda de Raíces — El Hito de 100 Millones</a:t>
-            </a:r>
-          </a:p>
-        </p:txBody>
-      </p:sp>
-      <p:sp>
-        <p:nvSpPr>
-          <p:cNvPr id="3" name="Rounded Rectangle 2"/>
+          <p:cNvPr id="2" name="Rounded Rectangle 1"/>
           <p:cNvSpPr/>
           <p:nvPr/>
         </p:nvSpPr>
         <p:spPr>
           <a:xfrm>
-            <a:off x="731520" y="1645920"/>
-            <a:ext cx="5120640" cy="4663440"/>
+            <a:off x="609600" y="1341090"/>
+            <a:ext cx="10972800" cy="1571625"/>
           </a:xfrm>
           <a:prstGeom prst="roundRect">
-            <a:avLst/>
+            <a:avLst>
+              <a:gd name="adj" fmla="val 9696"/>
+            </a:avLst>
           </a:prstGeom>
           <a:solidFill>
-            <a:srgbClr val="F5F7FA"/>
+            <a:srgbClr val="0F172A"/>
           </a:solidFill>
           <a:ln>
-            <a:solidFill>
-              <a:srgbClr val="D9E1F2"/>
-            </a:solidFill>
+            <a:noFill/>
           </a:ln>
+          <a:effectLst/>
         </p:spPr>
         <p:style>
           <a:lnRef idx="1">
@@ -4196,95 +7692,36 @@
           </a:fontRef>
         </p:style>
         <p:txBody>
-          <a:bodyPr rtlCol="0" anchor="ctr" wrap="square" lIns="365760" tIns="365760"/>
-          <a:lstStyle/>
-          <a:p>
-            <a:pPr algn="ctr">
-              <a:spcAft>
-                <a:spcPts val="1000"/>
-              </a:spcAft>
-              <a:defRPr sz="1700" b="1">
-                <a:solidFill>
-                  <a:srgbClr val="1F4E79"/>
-                </a:solidFill>
-              </a:defRPr>
-            </a:pPr>
-            <a:r>
-              <a:t>Planteo del Problema</a:t>
-            </a:r>
-          </a:p>
-          <a:p>
-            <a:pPr>
-              <a:defRPr sz="1250">
-                <a:solidFill>
-                  <a:srgbClr val="282828"/>
-                </a:solidFill>
-              </a:defRPr>
-            </a:pPr>
-            <a:r>
-              <a:t>Se busca determinar la semana t* en que la canción superó 100 millones de streams en Spotify México:</a:t>
-            </a:r>
-            <a:br/>
-            <a:br/>
-            <a:r>
-              <a:t>f(t) = S(t) - 100.0 = 0</a:t>
-            </a:r>
-            <a:br/>
-            <a:br/>
-            <a:r>
-              <a:t>f(t) = -0.000839·t³ + 0.076977·t² + 1.081162·t - 97.927102 = 0</a:t>
-            </a:r>
-            <a:br/>
-            <a:br/>
-            <a:r>
-              <a:t>Condición de parada exigida:</a:t>
-            </a:r>
-            <a:br/>
-            <a:r>
-              <a:t>|Ea%| &lt; 10⁻⁴ %  (0.0001% de error relativo)</a:t>
-            </a:r>
-            <a:br/>
-            <a:br/>
-            <a:r>
-              <a:t>Intervalo inicial [35, 36]:</a:t>
-            </a:r>
-            <a:br/>
-            <a:r>
-              <a:t>• Datos: S(35) = 99.60 M &lt; 100 &lt; S(36) = 102.74 M</a:t>
-            </a:r>
-            <a:br/>
-            <a:r>
-              <a:t>• Modelo: f(35) = -1.7584 &lt; 0,  f(36) = +1.6162 &gt; 0</a:t>
-            </a:r>
-            <a:br/>
-            <a:r>
-              <a:t>• Hay cambio de signo (Bolzano).</a:t>
-            </a:r>
-          </a:p>
-        </p:txBody>
-      </p:sp>
-      <p:sp>
-        <p:nvSpPr>
-          <p:cNvPr id="4" name="Rounded Rectangle 3"/>
+          <a:bodyPr rtlCol="0" anchor="ctr"/>
+          <a:lstStyle/>
+          <a:p>
+            <a:pPr algn="ctr"/>
+          </a:p>
+        </p:txBody>
+      </p:sp>
+      <p:sp>
+        <p:nvSpPr>
+          <p:cNvPr id="3" name="Rounded Rectangle 2"/>
           <p:cNvSpPr/>
           <p:nvPr/>
         </p:nvSpPr>
         <p:spPr>
           <a:xfrm>
-            <a:off x="6309360" y="1645920"/>
-            <a:ext cx="5120640" cy="4663440"/>
+            <a:off x="609600" y="4128045"/>
+            <a:ext cx="3505200" cy="1323975"/>
           </a:xfrm>
           <a:prstGeom prst="roundRect">
-            <a:avLst/>
+            <a:avLst>
+              <a:gd name="adj" fmla="val 10071"/>
+            </a:avLst>
           </a:prstGeom>
           <a:solidFill>
-            <a:srgbClr val="F5F7FA"/>
+            <a:srgbClr val="F8FAFC"/>
           </a:solidFill>
           <a:ln>
-            <a:solidFill>
-              <a:srgbClr val="D9E1F2"/>
-            </a:solidFill>
+            <a:noFill/>
           </a:ln>
+          <a:effectLst/>
         </p:spPr>
         <p:style>
           <a:lnRef idx="1">
@@ -4301,83 +7738,640 @@
           </a:fontRef>
         </p:style>
         <p:txBody>
-          <a:bodyPr rtlCol="0" anchor="ctr" wrap="square" lIns="365760" tIns="365760"/>
-          <a:lstStyle/>
-          <a:p>
-            <a:pPr algn="ctr">
-              <a:spcAft>
-                <a:spcPts val="1000"/>
-              </a:spcAft>
-              <a:defRPr sz="1700" b="1">
-                <a:solidFill>
-                  <a:srgbClr val="1F4E79"/>
-                </a:solidFill>
-              </a:defRPr>
+          <a:bodyPr rtlCol="0" anchor="ctr"/>
+          <a:lstStyle/>
+          <a:p>
+            <a:pPr algn="ctr"/>
+          </a:p>
+        </p:txBody>
+      </p:sp>
+      <p:sp>
+        <p:nvSpPr>
+          <p:cNvPr id="4" name="Rounded Rectangle 3"/>
+          <p:cNvSpPr/>
+          <p:nvPr/>
+        </p:nvSpPr>
+        <p:spPr>
+          <a:xfrm>
+            <a:off x="4343400" y="4128045"/>
+            <a:ext cx="3505200" cy="1323975"/>
+          </a:xfrm>
+          <a:prstGeom prst="roundRect">
+            <a:avLst>
+              <a:gd name="adj" fmla="val 10071"/>
+            </a:avLst>
+          </a:prstGeom>
+          <a:solidFill>
+            <a:srgbClr val="F8FAFC"/>
+          </a:solidFill>
+          <a:ln>
+            <a:noFill/>
+          </a:ln>
+          <a:effectLst/>
+        </p:spPr>
+        <p:style>
+          <a:lnRef idx="1">
+            <a:schemeClr val="accent1"/>
+          </a:lnRef>
+          <a:fillRef idx="3">
+            <a:schemeClr val="accent1"/>
+          </a:fillRef>
+          <a:effectRef idx="2">
+            <a:schemeClr val="accent1"/>
+          </a:effectRef>
+          <a:fontRef idx="minor">
+            <a:schemeClr val="lt1"/>
+          </a:fontRef>
+        </p:style>
+        <p:txBody>
+          <a:bodyPr rtlCol="0" anchor="ctr"/>
+          <a:lstStyle/>
+          <a:p>
+            <a:pPr algn="ctr"/>
+          </a:p>
+        </p:txBody>
+      </p:sp>
+      <p:sp>
+        <p:nvSpPr>
+          <p:cNvPr id="5" name="Rounded Rectangle 4"/>
+          <p:cNvSpPr/>
+          <p:nvPr/>
+        </p:nvSpPr>
+        <p:spPr>
+          <a:xfrm>
+            <a:off x="8077200" y="4128045"/>
+            <a:ext cx="3505200" cy="1323975"/>
+          </a:xfrm>
+          <a:prstGeom prst="roundRect">
+            <a:avLst>
+              <a:gd name="adj" fmla="val 10071"/>
+            </a:avLst>
+          </a:prstGeom>
+          <a:solidFill>
+            <a:srgbClr val="F8FAFC"/>
+          </a:solidFill>
+          <a:ln>
+            <a:noFill/>
+          </a:ln>
+          <a:effectLst/>
+        </p:spPr>
+        <p:style>
+          <a:lnRef idx="1">
+            <a:schemeClr val="accent1"/>
+          </a:lnRef>
+          <a:fillRef idx="3">
+            <a:schemeClr val="accent1"/>
+          </a:fillRef>
+          <a:effectRef idx="2">
+            <a:schemeClr val="accent1"/>
+          </a:effectRef>
+          <a:fontRef idx="minor">
+            <a:schemeClr val="lt1"/>
+          </a:fontRef>
+        </p:style>
+        <p:txBody>
+          <a:bodyPr rtlCol="0" anchor="ctr"/>
+          <a:lstStyle/>
+          <a:p>
+            <a:pPr algn="ctr"/>
+          </a:p>
+        </p:txBody>
+      </p:sp>
+      <p:sp>
+        <p:nvSpPr>
+          <p:cNvPr id="6" name="TextBox 5"/>
+          <p:cNvSpPr txBox="1"/>
+          <p:nvPr/>
+        </p:nvSpPr>
+        <p:spPr>
+          <a:xfrm>
+            <a:off x="609600" y="457200"/>
+            <a:ext cx="11582400" cy="171450"/>
+          </a:xfrm>
+          <a:prstGeom prst="rect">
+            <a:avLst/>
+          </a:prstGeom>
+          <a:noFill/>
+        </p:spPr>
+        <p:txBody>
+          <a:bodyPr wrap="none" lIns="0" rIns="0" tIns="0" bIns="0" anchor="t">
+            <a:spAutoFit/>
+          </a:bodyPr>
+          <a:lstStyle/>
+          <a:p>
+            <a:pPr algn="l"/>
+            <a:r>
+              <a:rPr b="1" sz="1050" i="0" u="none">
+                <a:solidFill>
+                  <a:srgbClr val="E11D48"/>
+                </a:solidFill>
+                <a:latin typeface="Plus Jakarta Sans"/>
+              </a:rPr>
+              <a:t>MÉTODO NUMÉRICO 1</a:t>
+            </a:r>
+          </a:p>
+        </p:txBody>
+      </p:sp>
+      <p:sp>
+        <p:nvSpPr>
+          <p:cNvPr id="7" name="TextBox 6"/>
+          <p:cNvSpPr txBox="1"/>
+          <p:nvPr/>
+        </p:nvSpPr>
+        <p:spPr>
+          <a:xfrm>
+            <a:off x="609600" y="685800"/>
+            <a:ext cx="11582400" cy="388590"/>
+          </a:xfrm>
+          <a:prstGeom prst="rect">
+            <a:avLst/>
+          </a:prstGeom>
+          <a:noFill/>
+        </p:spPr>
+        <p:txBody>
+          <a:bodyPr wrap="none" lIns="0" rIns="0" tIns="0" bIns="0" anchor="t">
+            <a:spAutoFit/>
+          </a:bodyPr>
+          <a:lstStyle/>
+          <a:p>
+            <a:pPr algn="l">
+              <a:lnSpc>
+                <a:spcPts val="3060"/>
+              </a:lnSpc>
             </a:pPr>
             <a:r>
-              <a:t>Resultados Comparados</a:t>
-            </a:r>
-          </a:p>
-          <a:p>
-            <a:pPr>
-              <a:defRPr sz="1200">
-                <a:solidFill>
-                  <a:srgbClr val="282828"/>
-                </a:solidFill>
-              </a:defRPr>
+              <a:rPr b="1" sz="2550" i="0" u="none">
+                <a:solidFill>
+                  <a:srgbClr val="0F172A"/>
+                </a:solidFill>
+                <a:latin typeface="Space Grotesk"/>
+              </a:rPr>
+              <a:t>Ajuste de Curvas por Mínimos Cuadrados</a:t>
+            </a:r>
+          </a:p>
+        </p:txBody>
+      </p:sp>
+      <p:sp>
+        <p:nvSpPr>
+          <p:cNvPr id="8" name="TextBox 7"/>
+          <p:cNvSpPr txBox="1"/>
+          <p:nvPr/>
+        </p:nvSpPr>
+        <p:spPr>
+          <a:xfrm>
+            <a:off x="990600" y="1645890"/>
+            <a:ext cx="11201400" cy="171450"/>
+          </a:xfrm>
+          <a:prstGeom prst="rect">
+            <a:avLst/>
+          </a:prstGeom>
+          <a:noFill/>
+        </p:spPr>
+        <p:txBody>
+          <a:bodyPr wrap="none" lIns="0" rIns="0" tIns="0" bIns="0" anchor="t">
+            <a:spAutoFit/>
+          </a:bodyPr>
+          <a:lstStyle/>
+          <a:p>
+            <a:pPr algn="l"/>
+            <a:r>
+              <a:rPr b="1" sz="1050" i="0" u="none">
+                <a:solidFill>
+                  <a:srgbClr val="FB7185"/>
+                </a:solidFill>
+                <a:latin typeface="Plus Jakarta Sans"/>
+              </a:rPr>
+              <a:t>MODELO CONTINUO CÚBICO OBTENIDO</a:t>
+            </a:r>
+          </a:p>
+        </p:txBody>
+      </p:sp>
+      <p:sp>
+        <p:nvSpPr>
+          <p:cNvPr id="9" name="TextBox 8"/>
+          <p:cNvSpPr txBox="1"/>
+          <p:nvPr/>
+        </p:nvSpPr>
+        <p:spPr>
+          <a:xfrm>
+            <a:off x="990600" y="1931640"/>
+            <a:ext cx="11201400" cy="323850"/>
+          </a:xfrm>
+          <a:prstGeom prst="rect">
+            <a:avLst/>
+          </a:prstGeom>
+          <a:noFill/>
+        </p:spPr>
+        <p:txBody>
+          <a:bodyPr wrap="none" lIns="0" rIns="0" tIns="0" bIns="0" anchor="t">
+            <a:spAutoFit/>
+          </a:bodyPr>
+          <a:lstStyle/>
+          <a:p>
+            <a:pPr algn="l"/>
+            <a:r>
+              <a:rPr b="1" sz="1950" i="0" u="none">
+                <a:solidFill>
+                  <a:srgbClr val="F8FAFC"/>
+                </a:solidFill>
+                <a:latin typeface="Space Grotesk"/>
+              </a:rPr>
+              <a:t>S(t) = -0.000839 · t³ + 0.076977 · t² + 1.081162 · t + 2.072898</a:t>
+            </a:r>
+          </a:p>
+        </p:txBody>
+      </p:sp>
+      <p:sp>
+        <p:nvSpPr>
+          <p:cNvPr id="10" name="TextBox 9"/>
+          <p:cNvSpPr txBox="1"/>
+          <p:nvPr/>
+        </p:nvSpPr>
+        <p:spPr>
+          <a:xfrm>
+            <a:off x="990600" y="2407890"/>
+            <a:ext cx="11201400" cy="200025"/>
+          </a:xfrm>
+          <a:prstGeom prst="rect">
+            <a:avLst/>
+          </a:prstGeom>
+          <a:noFill/>
+        </p:spPr>
+        <p:txBody>
+          <a:bodyPr wrap="none" lIns="0" rIns="0" tIns="0" bIns="0" anchor="t">
+            <a:spAutoFit/>
+          </a:bodyPr>
+          <a:lstStyle/>
+          <a:p>
+            <a:pPr algn="l"/>
+            <a:r>
+              <a:rPr b="0" sz="1200" i="0" u="none">
+                <a:solidFill>
+                  <a:srgbClr val="94A3B8"/>
+                </a:solidFill>
+                <a:latin typeface="Plus Jakarta Sans"/>
+              </a:rPr>
+              <a:t>Permite representar la concavidad de aceleración inicial y la posterior estabilización anual.</a:t>
+            </a:r>
+          </a:p>
+        </p:txBody>
+      </p:sp>
+      <p:sp>
+        <p:nvSpPr>
+          <p:cNvPr id="40" name="Gauss"/>
+          <p:cNvSpPr txBox="1"/>
+          <p:nvPr/>
+        </p:nvSpPr>
+        <p:spPr>
+          <a:xfrm>
+            <a:off x="612648" y="3200400"/>
+            <a:ext cx="10972800" cy="548640"/>
+          </a:xfrm>
+          <a:prstGeom prst="rect">
+            <a:avLst/>
+          </a:prstGeom>
+          <a:noFill/>
+        </p:spPr>
+        <p:txBody>
+          <a:bodyPr wrap="square" lIns="0" rIns="0" tIns="0" bIns="0" anchor="t"/>
+          <a:lstStyle/>
+          <a:p>
+            <a:pPr algn="l"/>
+            <a:r>
+              <a:rPr b="0" sz="1200" i="0" u="none">
+                <a:solidFill>
+                  <a:srgbClr val="475569"/>
+                </a:solidFill>
+                <a:latin typeface="Plus Jakarta Sans"/>
+              </a:rPr>
+              <a:t>Las ecuaciones normales (sistema 4×4) se resolvieron con eliminación gaussiana programada a mano: triangulación y sustitución hacia atrás. Los coeficientes coinciden con NumPy hasta 10⁻¹².</a:t>
+            </a:r>
+          </a:p>
+        </p:txBody>
+      </p:sp>
+      <p:sp>
+        <p:nvSpPr>
+          <p:cNvPr id="11" name="TextBox 10"/>
+          <p:cNvSpPr txBox="1"/>
+          <p:nvPr/>
+        </p:nvSpPr>
+        <p:spPr>
+          <a:xfrm>
+            <a:off x="838200" y="4356645"/>
+            <a:ext cx="3810000" cy="171450"/>
+          </a:xfrm>
+          <a:prstGeom prst="rect">
+            <a:avLst/>
+          </a:prstGeom>
+          <a:noFill/>
+        </p:spPr>
+        <p:txBody>
+          <a:bodyPr wrap="none" lIns="0" rIns="0" tIns="0" bIns="0" anchor="t">
+            <a:spAutoFit/>
+          </a:bodyPr>
+          <a:lstStyle/>
+          <a:p>
+            <a:pPr algn="l"/>
+            <a:r>
+              <a:rPr b="1" sz="1050" i="0" u="none">
+                <a:solidFill>
+                  <a:srgbClr val="64748B"/>
+                </a:solidFill>
+                <a:latin typeface="Plus Jakarta Sans"/>
+              </a:rPr>
+              <a:t>BONDAD DE AJUSTE</a:t>
+            </a:r>
+          </a:p>
+        </p:txBody>
+      </p:sp>
+      <p:sp>
+        <p:nvSpPr>
+          <p:cNvPr id="12" name="TextBox 11"/>
+          <p:cNvSpPr txBox="1"/>
+          <p:nvPr/>
+        </p:nvSpPr>
+        <p:spPr>
+          <a:xfrm>
+            <a:off x="838200" y="4585245"/>
+            <a:ext cx="3810000" cy="381000"/>
+          </a:xfrm>
+          <a:prstGeom prst="rect">
+            <a:avLst/>
+          </a:prstGeom>
+          <a:noFill/>
+        </p:spPr>
+        <p:txBody>
+          <a:bodyPr wrap="none" lIns="0" rIns="0" tIns="0" bIns="0" anchor="t">
+            <a:spAutoFit/>
+          </a:bodyPr>
+          <a:lstStyle/>
+          <a:p>
+            <a:pPr algn="l">
+              <a:lnSpc>
+                <a:spcPts val="3000"/>
+              </a:lnSpc>
             </a:pPr>
             <a:r>
-              <a:t>1. Método de Bisección (Método Cerrado):</a:t>
-            </a:r>
-            <a:br/>
-            <a:r>
-              <a:t>• Intervalo inicial: [35.0, 36.0]</a:t>
-            </a:r>
-            <a:br/>
-            <a:r>
-              <a:t>• Convergencia lineal (factor 0.5 por paso).</a:t>
-            </a:r>
-            <a:br/>
-            <a:r>
-              <a:t>• 15 iteraciones requeridas.</a:t>
-            </a:r>
-            <a:br/>
-            <a:r>
-              <a:t>• Raíz hallada: t* = 35.520172 semanas.</a:t>
-            </a:r>
-            <a:br/>
-            <a:br/>
-            <a:r>
-              <a:t>2. Método de Newton-Raphson (Método Abierto):</a:t>
-            </a:r>
-            <a:br/>
-            <a:r>
-              <a:t>• Estimación inicial: t₀ = 35.0 semanas.</a:t>
-            </a:r>
-            <a:br/>
-            <a:r>
-              <a:t>• Derivada f'(t) = -0.002517·t² + 0.153954·t + 1.081162</a:t>
-            </a:r>
-            <a:br/>
-            <a:r>
-              <a:t>• Convergencia cuadrática.</a:t>
-            </a:r>
-            <a:br/>
-            <a:r>
-              <a:t>• 3 iteraciones requeridas (5 veces más rápido).</a:t>
-            </a:r>
-            <a:br/>
-            <a:r>
-              <a:t>• Raíz hallada: t* = 35.520148 semanas.</a:t>
-            </a:r>
-            <a:br/>
-            <a:br/>
-            <a:r>
-              <a:t>Control por interpolación lineal: t = 35.127 sem.</a:t>
-            </a:r>
-            <a:br/>
-            <a:r>
-              <a:t>Diferencia: 2.75 días (error de ajuste ±0.93 M).</a:t>
+              <a:rPr b="1" sz="3000" i="0" u="none">
+                <a:solidFill>
+                  <a:srgbClr val="E11D48"/>
+                </a:solidFill>
+                <a:latin typeface="Plus Jakarta Sans"/>
+              </a:rPr>
+              <a:t>99.95%</a:t>
+            </a:r>
+          </a:p>
+        </p:txBody>
+      </p:sp>
+      <p:sp>
+        <p:nvSpPr>
+          <p:cNvPr id="13" name="TextBox 12"/>
+          <p:cNvSpPr txBox="1"/>
+          <p:nvPr/>
+        </p:nvSpPr>
+        <p:spPr>
+          <a:xfrm>
+            <a:off x="838200" y="5023395"/>
+            <a:ext cx="3810000" cy="200025"/>
+          </a:xfrm>
+          <a:prstGeom prst="rect">
+            <a:avLst/>
+          </a:prstGeom>
+          <a:noFill/>
+        </p:spPr>
+        <p:txBody>
+          <a:bodyPr wrap="none" lIns="0" rIns="0" tIns="0" bIns="0" anchor="t">
+            <a:spAutoFit/>
+          </a:bodyPr>
+          <a:lstStyle/>
+          <a:p>
+            <a:pPr algn="l"/>
+            <a:r>
+              <a:rPr b="1" sz="1200" i="0" u="none">
+                <a:solidFill>
+                  <a:srgbClr val="334155"/>
+                </a:solidFill>
+                <a:latin typeface="Plus Jakarta Sans"/>
+              </a:rPr>
+              <a:t>R² = 0.999533</a:t>
+            </a:r>
+          </a:p>
+        </p:txBody>
+      </p:sp>
+      <p:sp>
+        <p:nvSpPr>
+          <p:cNvPr id="14" name="TextBox 13"/>
+          <p:cNvSpPr txBox="1"/>
+          <p:nvPr/>
+        </p:nvSpPr>
+        <p:spPr>
+          <a:xfrm>
+            <a:off x="4572000" y="4356645"/>
+            <a:ext cx="3810000" cy="171450"/>
+          </a:xfrm>
+          <a:prstGeom prst="rect">
+            <a:avLst/>
+          </a:prstGeom>
+          <a:noFill/>
+        </p:spPr>
+        <p:txBody>
+          <a:bodyPr wrap="none" lIns="0" rIns="0" tIns="0" bIns="0" anchor="t">
+            <a:spAutoFit/>
+          </a:bodyPr>
+          <a:lstStyle/>
+          <a:p>
+            <a:pPr algn="l"/>
+            <a:r>
+              <a:rPr b="1" sz="1050" i="0" u="none">
+                <a:solidFill>
+                  <a:srgbClr val="64748B"/>
+                </a:solidFill>
+                <a:latin typeface="Plus Jakarta Sans"/>
+              </a:rPr>
+              <a:t>ERROR ESTÁNDAR</a:t>
+            </a:r>
+          </a:p>
+        </p:txBody>
+      </p:sp>
+      <p:sp>
+        <p:nvSpPr>
+          <p:cNvPr id="15" name="TextBox 14"/>
+          <p:cNvSpPr txBox="1"/>
+          <p:nvPr/>
+        </p:nvSpPr>
+        <p:spPr>
+          <a:xfrm>
+            <a:off x="4572000" y="4585245"/>
+            <a:ext cx="3810000" cy="381000"/>
+          </a:xfrm>
+          <a:prstGeom prst="rect">
+            <a:avLst/>
+          </a:prstGeom>
+          <a:noFill/>
+        </p:spPr>
+        <p:txBody>
+          <a:bodyPr wrap="none" lIns="0" rIns="0" tIns="0" bIns="0" anchor="t">
+            <a:spAutoFit/>
+          </a:bodyPr>
+          <a:lstStyle/>
+          <a:p>
+            <a:pPr algn="l">
+              <a:lnSpc>
+                <a:spcPts val="3000"/>
+              </a:lnSpc>
+            </a:pPr>
+            <a:r>
+              <a:rPr b="1" sz="3000" i="0" u="none">
+                <a:solidFill>
+                  <a:srgbClr val="0F172A"/>
+                </a:solidFill>
+                <a:latin typeface="Plus Jakarta Sans"/>
+              </a:rPr>
+              <a:t>0.927 M</a:t>
+            </a:r>
+          </a:p>
+        </p:txBody>
+      </p:sp>
+      <p:sp>
+        <p:nvSpPr>
+          <p:cNvPr id="16" name="TextBox 15"/>
+          <p:cNvSpPr txBox="1"/>
+          <p:nvPr/>
+        </p:nvSpPr>
+        <p:spPr>
+          <a:xfrm>
+            <a:off x="4572000" y="5023395"/>
+            <a:ext cx="3810000" cy="200025"/>
+          </a:xfrm>
+          <a:prstGeom prst="rect">
+            <a:avLst/>
+          </a:prstGeom>
+          <a:noFill/>
+        </p:spPr>
+        <p:txBody>
+          <a:bodyPr wrap="none" lIns="0" rIns="0" tIns="0" bIns="0" anchor="t">
+            <a:spAutoFit/>
+          </a:bodyPr>
+          <a:lstStyle/>
+          <a:p>
+            <a:pPr algn="l"/>
+            <a:r>
+              <a:rPr b="1" sz="1200" i="0" u="none">
+                <a:solidFill>
+                  <a:srgbClr val="334155"/>
+                </a:solidFill>
+                <a:latin typeface="Plus Jakarta Sans"/>
+              </a:rPr>
+              <a:t>S_y/x de estimación</a:t>
+            </a:r>
+          </a:p>
+        </p:txBody>
+      </p:sp>
+      <p:sp>
+        <p:nvSpPr>
+          <p:cNvPr id="17" name="TextBox 16"/>
+          <p:cNvSpPr txBox="1"/>
+          <p:nvPr/>
+        </p:nvSpPr>
+        <p:spPr>
+          <a:xfrm>
+            <a:off x="8305800" y="4356645"/>
+            <a:ext cx="3810000" cy="171450"/>
+          </a:xfrm>
+          <a:prstGeom prst="rect">
+            <a:avLst/>
+          </a:prstGeom>
+          <a:noFill/>
+        </p:spPr>
+        <p:txBody>
+          <a:bodyPr wrap="none" lIns="0" rIns="0" tIns="0" bIns="0" anchor="t">
+            <a:spAutoFit/>
+          </a:bodyPr>
+          <a:lstStyle/>
+          <a:p>
+            <a:pPr algn="l"/>
+            <a:r>
+              <a:rPr b="1" sz="1050" i="0" u="none">
+                <a:solidFill>
+                  <a:srgbClr val="64748B"/>
+                </a:solidFill>
+                <a:latin typeface="Plus Jakarta Sans"/>
+              </a:rPr>
+              <a:t>SUMA DE CUADRADOS</a:t>
+            </a:r>
+          </a:p>
+        </p:txBody>
+      </p:sp>
+      <p:sp>
+        <p:nvSpPr>
+          <p:cNvPr id="18" name="TextBox 17"/>
+          <p:cNvSpPr txBox="1"/>
+          <p:nvPr/>
+        </p:nvSpPr>
+        <p:spPr>
+          <a:xfrm>
+            <a:off x="8305800" y="4585245"/>
+            <a:ext cx="3810000" cy="381000"/>
+          </a:xfrm>
+          <a:prstGeom prst="rect">
+            <a:avLst/>
+          </a:prstGeom>
+          <a:noFill/>
+        </p:spPr>
+        <p:txBody>
+          <a:bodyPr wrap="none" lIns="0" rIns="0" tIns="0" bIns="0" anchor="t">
+            <a:spAutoFit/>
+          </a:bodyPr>
+          <a:lstStyle/>
+          <a:p>
+            <a:pPr algn="l">
+              <a:lnSpc>
+                <a:spcPts val="3000"/>
+              </a:lnSpc>
+            </a:pPr>
+            <a:r>
+              <a:rPr b="1" sz="3000" i="0" u="none">
+                <a:solidFill>
+                  <a:srgbClr val="0284C7"/>
+                </a:solidFill>
+                <a:latin typeface="Plus Jakarta Sans"/>
+              </a:rPr>
+              <a:t>36.94</a:t>
+            </a:r>
+          </a:p>
+        </p:txBody>
+      </p:sp>
+      <p:sp>
+        <p:nvSpPr>
+          <p:cNvPr id="19" name="TextBox 18"/>
+          <p:cNvSpPr txBox="1"/>
+          <p:nvPr/>
+        </p:nvSpPr>
+        <p:spPr>
+          <a:xfrm>
+            <a:off x="8305800" y="5023395"/>
+            <a:ext cx="3810000" cy="200025"/>
+          </a:xfrm>
+          <a:prstGeom prst="rect">
+            <a:avLst/>
+          </a:prstGeom>
+          <a:noFill/>
+        </p:spPr>
+        <p:txBody>
+          <a:bodyPr wrap="none" lIns="0" rIns="0" tIns="0" bIns="0" anchor="t">
+            <a:spAutoFit/>
+          </a:bodyPr>
+          <a:lstStyle/>
+          <a:p>
+            <a:pPr algn="l"/>
+            <a:r>
+              <a:rPr b="1" sz="1200" i="0" u="none">
+                <a:solidFill>
+                  <a:srgbClr val="334155"/>
+                </a:solidFill>
+                <a:latin typeface="Plus Jakarta Sans"/>
+              </a:rPr>
+              <a:t>S_r de los residuos</a:t>
             </a:r>
           </a:p>
         </p:txBody>
@@ -4393,6 +8387,14 @@
 <file path=ppt/slides/slide6.xml><?xml version="1.0" encoding="utf-8"?>
 <p:sld xmlns:a="http://schemas.openxmlformats.org/drawingml/2006/main" xmlns:p="http://schemas.openxmlformats.org/presentationml/2006/main" xmlns:r="http://schemas.openxmlformats.org/officeDocument/2006/relationships">
   <p:cSld>
+    <p:bg>
+      <p:bgPr>
+        <a:solidFill>
+          <a:srgbClr val="FFFFFF"/>
+        </a:solidFill>
+        <a:effectLst/>
+      </p:bgPr>
+    </p:bg>
     <p:spTree>
       <p:nvGrpSpPr>
         <p:cNvPr id="1" name=""/>
@@ -4402,165 +8404,977 @@
       <p:grpSpPr/>
       <p:sp>
         <p:nvSpPr>
-          <p:cNvPr id="2" name="TextBox 1"/>
-          <p:cNvSpPr txBox="1"/>
-          <p:nvPr/>
-        </p:nvSpPr>
-        <p:spPr>
-          <a:xfrm>
-            <a:off x="731520" y="365760"/>
-            <a:ext cx="10698480" cy="1005840"/>
-          </a:xfrm>
-          <a:prstGeom prst="rect">
-            <a:avLst/>
-          </a:prstGeom>
-          <a:noFill/>
-        </p:spPr>
-        <p:txBody>
-          <a:bodyPr wrap="square" lIns="0" tIns="0" rIns="0" bIns="0">
-            <a:spAutoFit/>
-          </a:bodyPr>
-          <a:lstStyle/>
-          <a:p>
-            <a:pPr>
-              <a:defRPr sz="1100" b="1">
-                <a:solidFill>
-                  <a:srgbClr val="E91E63"/>
-                </a:solidFill>
-                <a:latin typeface="Calibri"/>
-              </a:defRPr>
+          <p:cNvPr id="2" name="Rounded Rectangle 1"/>
+          <p:cNvSpPr/>
+          <p:nvPr/>
+        </p:nvSpPr>
+        <p:spPr>
+          <a:xfrm>
+            <a:off x="609600" y="2537370"/>
+            <a:ext cx="5334000" cy="2895600"/>
+          </a:xfrm>
+          <a:prstGeom prst="roundRect">
+            <a:avLst>
+              <a:gd name="adj" fmla="val 5263"/>
+            </a:avLst>
+          </a:prstGeom>
+          <a:solidFill>
+            <a:srgbClr val="F8FAFC"/>
+          </a:solidFill>
+          <a:ln>
+            <a:noFill/>
+          </a:ln>
+          <a:effectLst/>
+        </p:spPr>
+        <p:style>
+          <a:lnRef idx="1">
+            <a:schemeClr val="accent1"/>
+          </a:lnRef>
+          <a:fillRef idx="3">
+            <a:schemeClr val="accent1"/>
+          </a:fillRef>
+          <a:effectRef idx="2">
+            <a:schemeClr val="accent1"/>
+          </a:effectRef>
+          <a:fontRef idx="minor">
+            <a:schemeClr val="lt1"/>
+          </a:fontRef>
+        </p:style>
+        <p:txBody>
+          <a:bodyPr rtlCol="0" anchor="ctr"/>
+          <a:lstStyle/>
+          <a:p>
+            <a:pPr algn="ctr"/>
+          </a:p>
+        </p:txBody>
+      </p:sp>
+      <p:sp>
+        <p:nvSpPr>
+          <p:cNvPr id="3" name="Rounded Rectangle 2"/>
+          <p:cNvSpPr/>
+          <p:nvPr/>
+        </p:nvSpPr>
+        <p:spPr>
+          <a:xfrm>
+            <a:off x="6248400" y="2532608"/>
+            <a:ext cx="5334000" cy="2905125"/>
+          </a:xfrm>
+          <a:prstGeom prst="roundRect">
+            <a:avLst>
+              <a:gd name="adj" fmla="val 5245"/>
+            </a:avLst>
+          </a:prstGeom>
+          <a:solidFill>
+            <a:srgbClr val="FFF1F2"/>
+          </a:solidFill>
+          <a:ln>
+            <a:noFill/>
+          </a:ln>
+          <a:effectLst/>
+        </p:spPr>
+        <p:style>
+          <a:lnRef idx="1">
+            <a:schemeClr val="accent1"/>
+          </a:lnRef>
+          <a:fillRef idx="3">
+            <a:schemeClr val="accent1"/>
+          </a:fillRef>
+          <a:effectRef idx="2">
+            <a:schemeClr val="accent1"/>
+          </a:effectRef>
+          <a:fontRef idx="minor">
+            <a:schemeClr val="lt1"/>
+          </a:fontRef>
+        </p:style>
+        <p:txBody>
+          <a:bodyPr rtlCol="0" anchor="ctr"/>
+          <a:lstStyle/>
+          <a:p>
+            <a:pPr algn="ctr"/>
+          </a:p>
+        </p:txBody>
+      </p:sp>
+      <p:sp>
+        <p:nvSpPr>
+          <p:cNvPr id="4" name="Rectangle 3"/>
+          <p:cNvSpPr/>
+          <p:nvPr/>
+        </p:nvSpPr>
+        <p:spPr>
+          <a:xfrm>
+            <a:off x="914400" y="4766220"/>
+            <a:ext cx="4724400" cy="361950"/>
+          </a:xfrm>
+          <a:prstGeom prst="rect">
+            <a:avLst/>
+          </a:prstGeom>
+          <a:noFill/>
+          <a:ln>
+            <a:noFill/>
+          </a:ln>
+          <a:effectLst/>
+        </p:spPr>
+        <p:style>
+          <a:lnRef idx="1">
+            <a:schemeClr val="accent1"/>
+          </a:lnRef>
+          <a:fillRef idx="3">
+            <a:schemeClr val="accent1"/>
+          </a:fillRef>
+          <a:effectRef idx="2">
+            <a:schemeClr val="accent1"/>
+          </a:effectRef>
+          <a:fontRef idx="minor">
+            <a:schemeClr val="lt1"/>
+          </a:fontRef>
+        </p:style>
+        <p:txBody>
+          <a:bodyPr rtlCol="0" anchor="ctr"/>
+          <a:lstStyle/>
+          <a:p>
+            <a:pPr algn="ctr"/>
+          </a:p>
+        </p:txBody>
+      </p:sp>
+      <p:sp>
+        <p:nvSpPr>
+          <p:cNvPr id="5" name="Rectangle 4"/>
+          <p:cNvSpPr/>
+          <p:nvPr/>
+        </p:nvSpPr>
+        <p:spPr>
+          <a:xfrm>
+            <a:off x="6553200" y="4770983"/>
+            <a:ext cx="4724400" cy="361950"/>
+          </a:xfrm>
+          <a:prstGeom prst="rect">
+            <a:avLst/>
+          </a:prstGeom>
+          <a:noFill/>
+          <a:ln>
+            <a:noFill/>
+          </a:ln>
+          <a:effectLst/>
+        </p:spPr>
+        <p:style>
+          <a:lnRef idx="1">
+            <a:schemeClr val="accent1"/>
+          </a:lnRef>
+          <a:fillRef idx="3">
+            <a:schemeClr val="accent1"/>
+          </a:fillRef>
+          <a:effectRef idx="2">
+            <a:schemeClr val="accent1"/>
+          </a:effectRef>
+          <a:fontRef idx="minor">
+            <a:schemeClr val="lt1"/>
+          </a:fontRef>
+        </p:style>
+        <p:txBody>
+          <a:bodyPr rtlCol="0" anchor="ctr"/>
+          <a:lstStyle/>
+          <a:p>
+            <a:pPr algn="ctr"/>
+          </a:p>
+        </p:txBody>
+      </p:sp>
+      <p:sp>
+        <p:nvSpPr>
+          <p:cNvPr id="6" name="Rounded Rectangle 5"/>
+          <p:cNvSpPr/>
+          <p:nvPr/>
+        </p:nvSpPr>
+        <p:spPr>
+          <a:xfrm>
+            <a:off x="4876800" y="2865983"/>
+            <a:ext cx="762000" cy="247650"/>
+          </a:xfrm>
+          <a:prstGeom prst="roundRect">
+            <a:avLst>
+              <a:gd name="adj" fmla="val 30769"/>
+            </a:avLst>
+          </a:prstGeom>
+          <a:solidFill>
+            <a:srgbClr val="E2E8F0"/>
+          </a:solidFill>
+          <a:ln>
+            <a:noFill/>
+          </a:ln>
+          <a:effectLst/>
+        </p:spPr>
+        <p:style>
+          <a:lnRef idx="1">
+            <a:schemeClr val="accent1"/>
+          </a:lnRef>
+          <a:fillRef idx="3">
+            <a:schemeClr val="accent1"/>
+          </a:fillRef>
+          <a:effectRef idx="2">
+            <a:schemeClr val="accent1"/>
+          </a:effectRef>
+          <a:fontRef idx="minor">
+            <a:schemeClr val="lt1"/>
+          </a:fontRef>
+        </p:style>
+        <p:txBody>
+          <a:bodyPr rtlCol="0" anchor="ctr"/>
+          <a:lstStyle/>
+          <a:p>
+            <a:pPr algn="ctr"/>
+          </a:p>
+        </p:txBody>
+      </p:sp>
+      <p:sp>
+        <p:nvSpPr>
+          <p:cNvPr id="7" name="Rectangle 6"/>
+          <p:cNvSpPr/>
+          <p:nvPr/>
+        </p:nvSpPr>
+        <p:spPr>
+          <a:xfrm>
+            <a:off x="914400" y="4766220"/>
+            <a:ext cx="4724400" cy="9525"/>
+          </a:xfrm>
+          <a:prstGeom prst="rect">
+            <a:avLst/>
+          </a:prstGeom>
+          <a:solidFill>
+            <a:srgbClr val="E2E8F0"/>
+          </a:solidFill>
+          <a:ln>
+            <a:noFill/>
+          </a:ln>
+          <a:effectLst/>
+        </p:spPr>
+        <p:style>
+          <a:lnRef idx="1">
+            <a:schemeClr val="accent1"/>
+          </a:lnRef>
+          <a:fillRef idx="3">
+            <a:schemeClr val="accent1"/>
+          </a:fillRef>
+          <a:effectRef idx="2">
+            <a:schemeClr val="accent1"/>
+          </a:effectRef>
+          <a:fontRef idx="minor">
+            <a:schemeClr val="lt1"/>
+          </a:fontRef>
+        </p:style>
+        <p:txBody>
+          <a:bodyPr rtlCol="0" anchor="ctr"/>
+          <a:lstStyle/>
+          <a:p>
+            <a:pPr algn="ctr"/>
+          </a:p>
+        </p:txBody>
+      </p:sp>
+      <p:sp>
+        <p:nvSpPr>
+          <p:cNvPr id="8" name="Rounded Rectangle 7"/>
+          <p:cNvSpPr/>
+          <p:nvPr/>
+        </p:nvSpPr>
+        <p:spPr>
+          <a:xfrm>
+            <a:off x="10553700" y="2861220"/>
+            <a:ext cx="723900" cy="247650"/>
+          </a:xfrm>
+          <a:prstGeom prst="roundRect">
+            <a:avLst>
+              <a:gd name="adj" fmla="val 30769"/>
+            </a:avLst>
+          </a:prstGeom>
+          <a:solidFill>
+            <a:srgbClr val="FECDD3"/>
+          </a:solidFill>
+          <a:ln>
+            <a:noFill/>
+          </a:ln>
+          <a:effectLst/>
+        </p:spPr>
+        <p:style>
+          <a:lnRef idx="1">
+            <a:schemeClr val="accent1"/>
+          </a:lnRef>
+          <a:fillRef idx="3">
+            <a:schemeClr val="accent1"/>
+          </a:fillRef>
+          <a:effectRef idx="2">
+            <a:schemeClr val="accent1"/>
+          </a:effectRef>
+          <a:fontRef idx="minor">
+            <a:schemeClr val="lt1"/>
+          </a:fontRef>
+        </p:style>
+        <p:txBody>
+          <a:bodyPr rtlCol="0" anchor="ctr"/>
+          <a:lstStyle/>
+          <a:p>
+            <a:pPr algn="ctr"/>
+          </a:p>
+        </p:txBody>
+      </p:sp>
+      <p:sp>
+        <p:nvSpPr>
+          <p:cNvPr id="9" name="Rectangle 8"/>
+          <p:cNvSpPr/>
+          <p:nvPr/>
+        </p:nvSpPr>
+        <p:spPr>
+          <a:xfrm>
+            <a:off x="6553200" y="4770983"/>
+            <a:ext cx="4724400" cy="9525"/>
+          </a:xfrm>
+          <a:prstGeom prst="rect">
+            <a:avLst/>
+          </a:prstGeom>
+          <a:solidFill>
+            <a:srgbClr val="FECDD3"/>
+          </a:solidFill>
+          <a:ln>
+            <a:noFill/>
+          </a:ln>
+          <a:effectLst/>
+        </p:spPr>
+        <p:style>
+          <a:lnRef idx="1">
+            <a:schemeClr val="accent1"/>
+          </a:lnRef>
+          <a:fillRef idx="3">
+            <a:schemeClr val="accent1"/>
+          </a:fillRef>
+          <a:effectRef idx="2">
+            <a:schemeClr val="accent1"/>
+          </a:effectRef>
+          <a:fontRef idx="minor">
+            <a:schemeClr val="lt1"/>
+          </a:fontRef>
+        </p:style>
+        <p:txBody>
+          <a:bodyPr rtlCol="0" anchor="ctr"/>
+          <a:lstStyle/>
+          <a:p>
+            <a:pPr algn="ctr"/>
+          </a:p>
+        </p:txBody>
+      </p:sp>
+      <p:sp>
+        <p:nvSpPr>
+          <p:cNvPr id="10" name="TextBox 9"/>
+          <p:cNvSpPr txBox="1"/>
+          <p:nvPr/>
+        </p:nvSpPr>
+        <p:spPr>
+          <a:xfrm>
+            <a:off x="609600" y="457200"/>
+            <a:ext cx="11582400" cy="171450"/>
+          </a:xfrm>
+          <a:prstGeom prst="rect">
+            <a:avLst/>
+          </a:prstGeom>
+          <a:noFill/>
+        </p:spPr>
+        <p:txBody>
+          <a:bodyPr wrap="none" lIns="0" rIns="0" tIns="0" bIns="0" anchor="t">
+            <a:spAutoFit/>
+          </a:bodyPr>
+          <a:lstStyle/>
+          <a:p>
+            <a:pPr algn="l"/>
+            <a:r>
+              <a:rPr b="1" sz="1050" i="0" u="none">
+                <a:solidFill>
+                  <a:srgbClr val="E11D48"/>
+                </a:solidFill>
+                <a:latin typeface="Plus Jakarta Sans"/>
+              </a:rPr>
+              <a:t>MÉTODO NUMÉRICO 2</a:t>
+            </a:r>
+          </a:p>
+        </p:txBody>
+      </p:sp>
+      <p:sp>
+        <p:nvSpPr>
+          <p:cNvPr id="11" name="TextBox 10"/>
+          <p:cNvSpPr txBox="1"/>
+          <p:nvPr/>
+        </p:nvSpPr>
+        <p:spPr>
+          <a:xfrm>
+            <a:off x="609600" y="685800"/>
+            <a:ext cx="11582400" cy="388590"/>
+          </a:xfrm>
+          <a:prstGeom prst="rect">
+            <a:avLst/>
+          </a:prstGeom>
+          <a:noFill/>
+        </p:spPr>
+        <p:txBody>
+          <a:bodyPr wrap="none" lIns="0" rIns="0" tIns="0" bIns="0" anchor="t">
+            <a:spAutoFit/>
+          </a:bodyPr>
+          <a:lstStyle/>
+          <a:p>
+            <a:pPr algn="l">
+              <a:lnSpc>
+                <a:spcPts val="3060"/>
+              </a:lnSpc>
             </a:pPr>
             <a:r>
-              <a:t>CONVERGENCIA</a:t>
-            </a:r>
-          </a:p>
-          <a:p>
-            <a:pPr>
-              <a:defRPr sz="2300" b="1">
-                <a:solidFill>
-                  <a:srgbClr val="1F4E79"/>
-                </a:solidFill>
-                <a:latin typeface="Calibri"/>
-              </a:defRPr>
-            </a:pPr>
-            <a:r>
-              <a:t>Comparativa: Bisección (Lineal) vs. Newton-Raphson (Cuadrática)</a:t>
-            </a:r>
-          </a:p>
-        </p:txBody>
-      </p:sp>
-      <p:sp>
-        <p:nvSpPr>
-          <p:cNvPr id="3" name="TextBox 2"/>
-          <p:cNvSpPr txBox="1"/>
-          <p:nvPr/>
-        </p:nvSpPr>
-        <p:spPr>
-          <a:xfrm>
-            <a:off x="731520" y="1645920"/>
-            <a:ext cx="4663440" cy="4663440"/>
-          </a:xfrm>
-          <a:prstGeom prst="rect">
-            <a:avLst/>
-          </a:prstGeom>
-          <a:noFill/>
-        </p:spPr>
-        <p:txBody>
-          <a:bodyPr wrap="square">
-            <a:spAutoFit/>
-          </a:bodyPr>
-          <a:lstStyle/>
-          <a:p>
-            <a:pPr>
-              <a:spcAft>
-                <a:spcPts val="1000"/>
-              </a:spcAft>
-              <a:defRPr sz="1600" b="1">
-                <a:solidFill>
-                  <a:srgbClr val="1F4E79"/>
-                </a:solidFill>
-              </a:defRPr>
-            </a:pPr>
-            <a:r>
-              <a:t>Análisis de Convergencia:</a:t>
-            </a:r>
-          </a:p>
-          <a:p>
-            <a:pPr>
-              <a:defRPr sz="1250">
-                <a:solidFill>
-                  <a:srgbClr val="282828"/>
-                </a:solidFill>
-              </a:defRPr>
-            </a:pPr>
-            <a:r>
-              <a:t>• Bisección: 15 iteraciones.</a:t>
-            </a:r>
-            <a:br/>
-            <a:r>
-              <a:t>  - Método cerrado, muy robusto.</a:t>
-            </a:r>
-            <a:br/>
-            <a:r>
-              <a:t>  - Incondicionalmente convergente si Bolzano se cumple.</a:t>
-            </a:r>
-            <a:br/>
-            <a:r>
-              <a:t>  - Orden lineal: divide el intervalo a la mitad en cada ciclo.</a:t>
-            </a:r>
-            <a:br/>
-            <a:br/>
-            <a:r>
-              <a:t>• Newton-Raphson: 3 iteraciones.</a:t>
-            </a:r>
-            <a:br/>
-            <a:r>
-              <a:t>  - Método abierto por tangentes sucesivas.</a:t>
-            </a:r>
-            <a:br/>
-            <a:r>
-              <a:t>  - Orden cuadrático: duplica aproximadamente los dígitos exactos en cada paso.</a:t>
-            </a:r>
-            <a:br/>
-            <a:r>
-              <a:t>  - Requiere derivada analítica y una buena aproximación inicial.</a:t>
-            </a:r>
-            <a:br/>
-            <a:br/>
-            <a:r>
-              <a:t>• Coincidencia en la raíz: t* ≈ 35.520 semanas.</a:t>
-            </a:r>
-            <a:br/>
-            <a:r>
-              <a:t>  - Fecha estimada: fines de septiembre / 1 de octubre de 2023.</a:t>
-            </a:r>
-          </a:p>
-        </p:txBody>
-      </p:sp>
-      <p:pic>
-        <p:nvPicPr>
-          <p:cNvPr id="4" name="Picture 3" descr="grafico_2_convergencia_biseccion_vs_newton.png"/>
-          <p:cNvPicPr>
-            <a:picLocks noChangeAspect="1"/>
-          </p:cNvPicPr>
-          <p:nvPr/>
-        </p:nvPicPr>
-        <p:blipFill>
-          <a:blip r:embed="rId2"/>
-          <a:stretch>
-            <a:fillRect/>
-          </a:stretch>
-        </p:blipFill>
-        <p:spPr>
-          <a:xfrm>
-            <a:off x="5577840" y="1645920"/>
-            <a:ext cx="5852160" cy="3511296"/>
-          </a:xfrm>
-          <a:prstGeom prst="rect">
-            <a:avLst/>
-          </a:prstGeom>
-        </p:spPr>
-      </p:pic>
+              <a:rPr b="1" sz="2550" i="0" u="none">
+                <a:solidFill>
+                  <a:srgbClr val="0F172A"/>
+                </a:solidFill>
+                <a:latin typeface="Space Grotesk"/>
+              </a:rPr>
+              <a:t>Determinación del Hito de 100 Millones</a:t>
+            </a:r>
+          </a:p>
+        </p:txBody>
+      </p:sp>
+      <p:sp>
+        <p:nvSpPr>
+          <p:cNvPr id="12" name="TextBox 11"/>
+          <p:cNvSpPr txBox="1"/>
+          <p:nvPr/>
+        </p:nvSpPr>
+        <p:spPr>
+          <a:xfrm>
+            <a:off x="609600" y="1112490"/>
+            <a:ext cx="11582400" cy="228600"/>
+          </a:xfrm>
+          <a:prstGeom prst="rect">
+            <a:avLst/>
+          </a:prstGeom>
+          <a:noFill/>
+        </p:spPr>
+        <p:txBody>
+          <a:bodyPr wrap="none" lIns="0" rIns="0" tIns="0" bIns="0" anchor="t">
+            <a:spAutoFit/>
+          </a:bodyPr>
+          <a:lstStyle/>
+          <a:p>
+            <a:pPr algn="l"/>
+            <a:r>
+              <a:rPr b="0" sz="1350" i="0" u="none">
+                <a:solidFill>
+                  <a:srgbClr val="64748B"/>
+                </a:solidFill>
+                <a:latin typeface="Plus Jakarta Sans"/>
+              </a:rPr>
+              <a:t>Planteo de raíz f(t) = S(t) - 100 = 0 con tolerancia exigida |Ea%| &lt; 10⁻⁴ %</a:t>
+            </a:r>
+          </a:p>
+        </p:txBody>
+      </p:sp>
+      <p:sp>
+        <p:nvSpPr>
+          <p:cNvPr id="13" name="TextBox 12"/>
+          <p:cNvSpPr txBox="1"/>
+          <p:nvPr/>
+        </p:nvSpPr>
+        <p:spPr>
+          <a:xfrm>
+            <a:off x="914400" y="3289845"/>
+            <a:ext cx="5905500" cy="219075"/>
+          </a:xfrm>
+          <a:prstGeom prst="rect">
+            <a:avLst/>
+          </a:prstGeom>
+          <a:noFill/>
+        </p:spPr>
+        <p:txBody>
+          <a:bodyPr wrap="none" lIns="0" rIns="0" tIns="0" bIns="0" anchor="t">
+            <a:spAutoFit/>
+          </a:bodyPr>
+          <a:lstStyle/>
+          <a:p>
+            <a:pPr algn="l"/>
+            <a:r>
+              <a:rPr b="0" sz="1350" i="0" u="none">
+                <a:solidFill>
+                  <a:srgbClr val="334155"/>
+                </a:solidFill>
+                <a:latin typeface="Plus Jakarta Sans"/>
+              </a:rPr>
+              <a:t>Intervalo inicial: </a:t>
+            </a:r>
+            <a:r>
+              <a:rPr b="1" sz="1350" i="0" u="none">
+                <a:solidFill>
+                  <a:srgbClr val="334155"/>
+                </a:solidFill>
+                <a:latin typeface="Plus Jakarta Sans"/>
+              </a:rPr>
+              <a:t>[35.0, 36.0]</a:t>
+            </a:r>
+          </a:p>
+        </p:txBody>
+      </p:sp>
+      <p:sp>
+        <p:nvSpPr>
+          <p:cNvPr id="14" name="TextBox 13"/>
+          <p:cNvSpPr txBox="1"/>
+          <p:nvPr/>
+        </p:nvSpPr>
+        <p:spPr>
+          <a:xfrm>
+            <a:off x="914400" y="4394745"/>
+            <a:ext cx="5905500" cy="219075"/>
+          </a:xfrm>
+          <a:prstGeom prst="rect">
+            <a:avLst/>
+          </a:prstGeom>
+          <a:noFill/>
+        </p:spPr>
+        <p:txBody>
+          <a:bodyPr wrap="none" lIns="0" rIns="0" tIns="0" bIns="0" anchor="t">
+            <a:spAutoFit/>
+          </a:bodyPr>
+          <a:lstStyle/>
+          <a:p>
+            <a:pPr algn="l"/>
+            <a:r>
+              <a:rPr b="0" sz="1350" i="0" u="none">
+                <a:solidFill>
+                  <a:srgbClr val="475569"/>
+                </a:solidFill>
+                <a:latin typeface="Plus Jakarta Sans"/>
+              </a:rPr>
+              <a:t>Convergencia lineal estable con factor 0.5.</a:t>
+            </a:r>
+          </a:p>
+        </p:txBody>
+      </p:sp>
+      <p:sp>
+        <p:nvSpPr>
+          <p:cNvPr id="15" name="TextBox 14"/>
+          <p:cNvSpPr txBox="1"/>
+          <p:nvPr/>
+        </p:nvSpPr>
+        <p:spPr>
+          <a:xfrm>
+            <a:off x="6553200" y="3285083"/>
+            <a:ext cx="5638800" cy="228600"/>
+          </a:xfrm>
+          <a:prstGeom prst="rect">
+            <a:avLst/>
+          </a:prstGeom>
+          <a:noFill/>
+        </p:spPr>
+        <p:txBody>
+          <a:bodyPr wrap="none" lIns="0" rIns="0" tIns="0" bIns="0" anchor="t">
+            <a:spAutoFit/>
+          </a:bodyPr>
+          <a:lstStyle/>
+          <a:p>
+            <a:pPr algn="l"/>
+            <a:r>
+              <a:rPr b="0" sz="1350" i="0" u="none">
+                <a:solidFill>
+                  <a:srgbClr val="334155"/>
+                </a:solidFill>
+                <a:latin typeface="Plus Jakarta Sans"/>
+              </a:rPr>
+              <a:t>Semilla inicial: </a:t>
+            </a:r>
+            <a:r>
+              <a:rPr b="1" sz="1350" i="0" u="none">
+                <a:solidFill>
+                  <a:srgbClr val="334155"/>
+                </a:solidFill>
+                <a:latin typeface="Plus Jakarta Sans"/>
+              </a:rPr>
+              <a:t>t₀ = 35.0 semanas</a:t>
+            </a:r>
+          </a:p>
+        </p:txBody>
+      </p:sp>
+      <p:sp>
+        <p:nvSpPr>
+          <p:cNvPr id="16" name="TextBox 15"/>
+          <p:cNvSpPr txBox="1"/>
+          <p:nvPr/>
+        </p:nvSpPr>
+        <p:spPr>
+          <a:xfrm>
+            <a:off x="6553200" y="4399508"/>
+            <a:ext cx="5638800" cy="219075"/>
+          </a:xfrm>
+          <a:prstGeom prst="rect">
+            <a:avLst/>
+          </a:prstGeom>
+          <a:noFill/>
+        </p:spPr>
+        <p:txBody>
+          <a:bodyPr wrap="none" lIns="0" rIns="0" tIns="0" bIns="0" anchor="t">
+            <a:spAutoFit/>
+          </a:bodyPr>
+          <a:lstStyle/>
+          <a:p>
+            <a:pPr algn="l"/>
+            <a:r>
+              <a:rPr b="0" sz="1350" i="0" u="none">
+                <a:solidFill>
+                  <a:srgbClr val="475569"/>
+                </a:solidFill>
+                <a:latin typeface="Plus Jakarta Sans"/>
+              </a:rPr>
+              <a:t>Convergencia cuadrática acelerada por tangentes.</a:t>
+            </a:r>
+          </a:p>
+        </p:txBody>
+      </p:sp>
+      <p:sp>
+        <p:nvSpPr>
+          <p:cNvPr id="17" name="TextBox 16"/>
+          <p:cNvSpPr txBox="1"/>
+          <p:nvPr/>
+        </p:nvSpPr>
+        <p:spPr>
+          <a:xfrm>
+            <a:off x="914400" y="2842170"/>
+            <a:ext cx="1430178" cy="295275"/>
+          </a:xfrm>
+          <a:prstGeom prst="rect">
+            <a:avLst/>
+          </a:prstGeom>
+          <a:noFill/>
+        </p:spPr>
+        <p:txBody>
+          <a:bodyPr wrap="none" lIns="0" rIns="0" tIns="0" bIns="0" anchor="t">
+            <a:spAutoFit/>
+          </a:bodyPr>
+          <a:lstStyle/>
+          <a:p>
+            <a:pPr algn="l"/>
+            <a:r>
+              <a:rPr b="1" sz="1800" i="0" u="none">
+                <a:solidFill>
+                  <a:srgbClr val="0F172A"/>
+                </a:solidFill>
+                <a:latin typeface="Space Grotesk"/>
+              </a:rPr>
+              <a:t>Bisección</a:t>
+            </a:r>
+          </a:p>
+        </p:txBody>
+      </p:sp>
+      <p:sp>
+        <p:nvSpPr>
+          <p:cNvPr id="18" name="TextBox 17"/>
+          <p:cNvSpPr txBox="1"/>
+          <p:nvPr/>
+        </p:nvSpPr>
+        <p:spPr>
+          <a:xfrm>
+            <a:off x="4991100" y="2904083"/>
+            <a:ext cx="628650" cy="171450"/>
+          </a:xfrm>
+          <a:prstGeom prst="rect">
+            <a:avLst/>
+          </a:prstGeom>
+          <a:noFill/>
+        </p:spPr>
+        <p:txBody>
+          <a:bodyPr wrap="square" lIns="0" rIns="0" tIns="0" bIns="0" anchor="t">
+            <a:spAutoFit/>
+          </a:bodyPr>
+          <a:lstStyle/>
+          <a:p>
+            <a:pPr algn="l"/>
+            <a:r>
+              <a:rPr b="1" sz="1050" i="0" u="none">
+                <a:solidFill>
+                  <a:srgbClr val="475569"/>
+                </a:solidFill>
+                <a:latin typeface="Plus Jakarta Sans"/>
+              </a:rPr>
+              <a:t>Cerrado</a:t>
+            </a:r>
+          </a:p>
+        </p:txBody>
+      </p:sp>
+      <p:sp>
+        <p:nvSpPr>
+          <p:cNvPr id="19" name="TextBox 18"/>
+          <p:cNvSpPr txBox="1"/>
+          <p:nvPr/>
+        </p:nvSpPr>
+        <p:spPr>
+          <a:xfrm>
+            <a:off x="914400" y="3661320"/>
+            <a:ext cx="752475" cy="581025"/>
+          </a:xfrm>
+          <a:prstGeom prst="rect">
+            <a:avLst/>
+          </a:prstGeom>
+          <a:noFill/>
+        </p:spPr>
+        <p:txBody>
+          <a:bodyPr wrap="none" lIns="0" rIns="0" tIns="0" bIns="0" anchor="t">
+            <a:spAutoFit/>
+          </a:bodyPr>
+          <a:lstStyle/>
+          <a:p>
+            <a:pPr algn="l"/>
+            <a:r>
+              <a:rPr b="1" sz="3600" i="0" u="none">
+                <a:solidFill>
+                  <a:srgbClr val="0284C7"/>
+                </a:solidFill>
+                <a:latin typeface="Plus Jakarta Sans"/>
+              </a:rPr>
+              <a:t>15</a:t>
+            </a:r>
+          </a:p>
+        </p:txBody>
+      </p:sp>
+      <p:sp>
+        <p:nvSpPr>
+          <p:cNvPr id="20" name="TextBox 19"/>
+          <p:cNvSpPr txBox="1"/>
+          <p:nvPr/>
+        </p:nvSpPr>
+        <p:spPr>
+          <a:xfrm>
+            <a:off x="1457325" y="3956595"/>
+            <a:ext cx="1209675" cy="219075"/>
+          </a:xfrm>
+          <a:prstGeom prst="rect">
+            <a:avLst/>
+          </a:prstGeom>
+          <a:noFill/>
+        </p:spPr>
+        <p:txBody>
+          <a:bodyPr wrap="none" lIns="0" rIns="0" tIns="0" bIns="0" anchor="t">
+            <a:spAutoFit/>
+          </a:bodyPr>
+          <a:lstStyle/>
+          <a:p>
+            <a:pPr algn="l"/>
+            <a:r>
+              <a:rPr b="1" sz="1350" i="0" u="none">
+                <a:solidFill>
+                  <a:srgbClr val="64748B"/>
+                </a:solidFill>
+                <a:latin typeface="Plus Jakarta Sans"/>
+              </a:rPr>
+              <a:t>iteraciones</a:t>
+            </a:r>
+          </a:p>
+        </p:txBody>
+      </p:sp>
+      <p:sp>
+        <p:nvSpPr>
+          <p:cNvPr id="21" name="TextBox 20"/>
+          <p:cNvSpPr txBox="1"/>
+          <p:nvPr/>
+        </p:nvSpPr>
+        <p:spPr>
+          <a:xfrm>
+            <a:off x="914400" y="4909095"/>
+            <a:ext cx="5905500" cy="219075"/>
+          </a:xfrm>
+          <a:prstGeom prst="rect">
+            <a:avLst/>
+          </a:prstGeom>
+          <a:noFill/>
+        </p:spPr>
+        <p:txBody>
+          <a:bodyPr wrap="none" lIns="0" rIns="0" tIns="0" bIns="0" anchor="t">
+            <a:spAutoFit/>
+          </a:bodyPr>
+          <a:lstStyle/>
+          <a:p>
+            <a:pPr algn="l"/>
+            <a:r>
+              <a:rPr b="1" sz="1350" i="0" u="none">
+                <a:solidFill>
+                  <a:srgbClr val="0F172A"/>
+                </a:solidFill>
+                <a:latin typeface="Plus Jakarta Sans"/>
+              </a:rPr>
+              <a:t>Raíz de la regresión: t* = 35.520172 semanas</a:t>
+            </a:r>
+          </a:p>
+        </p:txBody>
+      </p:sp>
+      <p:sp>
+        <p:nvSpPr>
+          <p:cNvPr id="22" name="TextBox 21"/>
+          <p:cNvSpPr txBox="1"/>
+          <p:nvPr/>
+        </p:nvSpPr>
+        <p:spPr>
+          <a:xfrm>
+            <a:off x="6553200" y="2837408"/>
+            <a:ext cx="2525315" cy="295275"/>
+          </a:xfrm>
+          <a:prstGeom prst="rect">
+            <a:avLst/>
+          </a:prstGeom>
+          <a:noFill/>
+        </p:spPr>
+        <p:txBody>
+          <a:bodyPr wrap="none" lIns="0" rIns="0" tIns="0" bIns="0" anchor="t">
+            <a:spAutoFit/>
+          </a:bodyPr>
+          <a:lstStyle/>
+          <a:p>
+            <a:pPr algn="l"/>
+            <a:r>
+              <a:rPr b="1" sz="1800" i="0" u="none">
+                <a:solidFill>
+                  <a:srgbClr val="BE123C"/>
+                </a:solidFill>
+                <a:latin typeface="Space Grotesk"/>
+              </a:rPr>
+              <a:t>Newton-Raphson</a:t>
+            </a:r>
+          </a:p>
+        </p:txBody>
+      </p:sp>
+      <p:sp>
+        <p:nvSpPr>
+          <p:cNvPr id="23" name="TextBox 22"/>
+          <p:cNvSpPr txBox="1"/>
+          <p:nvPr/>
+        </p:nvSpPr>
+        <p:spPr>
+          <a:xfrm>
+            <a:off x="10668000" y="2899320"/>
+            <a:ext cx="590550" cy="171450"/>
+          </a:xfrm>
+          <a:prstGeom prst="rect">
+            <a:avLst/>
+          </a:prstGeom>
+          <a:noFill/>
+        </p:spPr>
+        <p:txBody>
+          <a:bodyPr wrap="square" lIns="0" rIns="0" tIns="0" bIns="0" anchor="t">
+            <a:spAutoFit/>
+          </a:bodyPr>
+          <a:lstStyle/>
+          <a:p>
+            <a:pPr algn="l"/>
+            <a:r>
+              <a:rPr b="1" sz="1050" i="0" u="none">
+                <a:solidFill>
+                  <a:srgbClr val="9F1239"/>
+                </a:solidFill>
+                <a:latin typeface="Plus Jakarta Sans"/>
+              </a:rPr>
+              <a:t>Abierto</a:t>
+            </a:r>
+          </a:p>
+        </p:txBody>
+      </p:sp>
+      <p:sp>
+        <p:nvSpPr>
+          <p:cNvPr id="24" name="TextBox 23"/>
+          <p:cNvSpPr txBox="1"/>
+          <p:nvPr/>
+        </p:nvSpPr>
+        <p:spPr>
+          <a:xfrm>
+            <a:off x="6553200" y="3666083"/>
+            <a:ext cx="561975" cy="581025"/>
+          </a:xfrm>
+          <a:prstGeom prst="rect">
+            <a:avLst/>
+          </a:prstGeom>
+          <a:noFill/>
+        </p:spPr>
+        <p:txBody>
+          <a:bodyPr wrap="none" lIns="0" rIns="0" tIns="0" bIns="0" anchor="t">
+            <a:spAutoFit/>
+          </a:bodyPr>
+          <a:lstStyle/>
+          <a:p>
+            <a:pPr algn="l"/>
+            <a:r>
+              <a:rPr b="1" sz="3600" i="0" u="none">
+                <a:solidFill>
+                  <a:srgbClr val="E11D48"/>
+                </a:solidFill>
+                <a:latin typeface="Plus Jakarta Sans"/>
+              </a:rPr>
+              <a:t>3</a:t>
+            </a:r>
+          </a:p>
+        </p:txBody>
+      </p:sp>
+      <p:sp>
+        <p:nvSpPr>
+          <p:cNvPr id="25" name="TextBox 24"/>
+          <p:cNvSpPr txBox="1"/>
+          <p:nvPr/>
+        </p:nvSpPr>
+        <p:spPr>
+          <a:xfrm>
+            <a:off x="6905625" y="3961358"/>
+            <a:ext cx="2643187" cy="219075"/>
+          </a:xfrm>
+          <a:prstGeom prst="rect">
+            <a:avLst/>
+          </a:prstGeom>
+          <a:noFill/>
+        </p:spPr>
+        <p:txBody>
+          <a:bodyPr wrap="none" lIns="0" rIns="0" tIns="0" bIns="0" anchor="t">
+            <a:spAutoFit/>
+          </a:bodyPr>
+          <a:lstStyle/>
+          <a:p>
+            <a:pPr algn="l"/>
+            <a:r>
+              <a:rPr b="1" sz="1350" i="0" u="none">
+                <a:solidFill>
+                  <a:srgbClr val="BE123C"/>
+                </a:solidFill>
+                <a:latin typeface="Plus Jakarta Sans"/>
+              </a:rPr>
+              <a:t>iteraciones (5× menos)</a:t>
+            </a:r>
+          </a:p>
+        </p:txBody>
+      </p:sp>
+      <p:sp>
+        <p:nvSpPr>
+          <p:cNvPr id="26" name="TextBox 25"/>
+          <p:cNvSpPr txBox="1"/>
+          <p:nvPr/>
+        </p:nvSpPr>
+        <p:spPr>
+          <a:xfrm>
+            <a:off x="6553200" y="4913858"/>
+            <a:ext cx="5638800" cy="219075"/>
+          </a:xfrm>
+          <a:prstGeom prst="rect">
+            <a:avLst/>
+          </a:prstGeom>
+          <a:noFill/>
+        </p:spPr>
+        <p:txBody>
+          <a:bodyPr wrap="none" lIns="0" rIns="0" tIns="0" bIns="0" anchor="t">
+            <a:spAutoFit/>
+          </a:bodyPr>
+          <a:lstStyle/>
+          <a:p>
+            <a:pPr algn="l"/>
+            <a:r>
+              <a:rPr b="1" sz="1350" i="0" u="none">
+                <a:solidFill>
+                  <a:srgbClr val="9F1239"/>
+                </a:solidFill>
+                <a:latin typeface="Plus Jakarta Sans"/>
+              </a:rPr>
+              <a:t>Raíz de la regresión: t* = 35.520148 semanas</a:t>
+            </a:r>
+          </a:p>
+        </p:txBody>
+      </p:sp>
     </p:spTree>
   </p:cSld>
   <p:clrMapOvr>
@@ -4572,6 +9386,14 @@
 <file path=ppt/slides/slide7.xml><?xml version="1.0" encoding="utf-8"?>
 <p:sld xmlns:a="http://schemas.openxmlformats.org/drawingml/2006/main" xmlns:p="http://schemas.openxmlformats.org/presentationml/2006/main" xmlns:r="http://schemas.openxmlformats.org/officeDocument/2006/relationships">
   <p:cSld>
+    <p:bg>
+      <p:bgPr>
+        <a:solidFill>
+          <a:srgbClr val="FFFFFF"/>
+        </a:solidFill>
+        <a:effectLst/>
+      </p:bgPr>
+    </p:bg>
     <p:spTree>
       <p:nvGrpSpPr>
         <p:cNvPr id="1" name=""/>
@@ -4579,151 +9401,9 @@
         <p:nvPr/>
       </p:nvGrpSpPr>
       <p:grpSpPr/>
-      <p:sp>
-        <p:nvSpPr>
-          <p:cNvPr id="2" name="TextBox 1"/>
-          <p:cNvSpPr txBox="1"/>
-          <p:nvPr/>
-        </p:nvSpPr>
-        <p:spPr>
-          <a:xfrm>
-            <a:off x="731520" y="365760"/>
-            <a:ext cx="10698480" cy="1005840"/>
-          </a:xfrm>
-          <a:prstGeom prst="rect">
-            <a:avLst/>
-          </a:prstGeom>
-          <a:noFill/>
-        </p:spPr>
-        <p:txBody>
-          <a:bodyPr wrap="square" lIns="0" tIns="0" rIns="0" bIns="0">
-            <a:spAutoFit/>
-          </a:bodyPr>
-          <a:lstStyle/>
-          <a:p>
-            <a:pPr>
-              <a:defRPr sz="1100" b="1">
-                <a:solidFill>
-                  <a:srgbClr val="E91E63"/>
-                </a:solidFill>
-                <a:latin typeface="Calibri"/>
-              </a:defRPr>
-            </a:pPr>
-            <a:r>
-              <a:t>DIFERENCIACIÓN NUMÉRICA</a:t>
-            </a:r>
-          </a:p>
-          <a:p>
-            <a:pPr>
-              <a:defRPr sz="2300" b="1">
-                <a:solidFill>
-                  <a:srgbClr val="1F4E79"/>
-                </a:solidFill>
-                <a:latin typeface="Calibri"/>
-              </a:defRPr>
-            </a:pPr>
-            <a:r>
-              <a:t>Método 3: Diferenciación Numérica y Pico de Demanda</a:t>
-            </a:r>
-          </a:p>
-        </p:txBody>
-      </p:sp>
-      <p:sp>
-        <p:nvSpPr>
-          <p:cNvPr id="3" name="TextBox 2"/>
-          <p:cNvSpPr txBox="1"/>
-          <p:nvPr/>
-        </p:nvSpPr>
-        <p:spPr>
-          <a:xfrm>
-            <a:off x="731520" y="1645920"/>
-            <a:ext cx="4663440" cy="4663440"/>
-          </a:xfrm>
-          <a:prstGeom prst="rect">
-            <a:avLst/>
-          </a:prstGeom>
-          <a:noFill/>
-        </p:spPr>
-        <p:txBody>
-          <a:bodyPr wrap="square">
-            <a:spAutoFit/>
-          </a:bodyPr>
-          <a:lstStyle/>
-          <a:p>
-            <a:pPr>
-              <a:spcAft>
-                <a:spcPts val="1000"/>
-              </a:spcAft>
-              <a:defRPr sz="1600" b="1">
-                <a:solidFill>
-                  <a:srgbClr val="1F4E79"/>
-                </a:solidFill>
-              </a:defRPr>
-            </a:pPr>
-            <a:r>
-              <a:t>Ritmo Semanal de Streams (dS/dt):</a:t>
-            </a:r>
-          </a:p>
-          <a:p>
-            <a:pPr>
-              <a:defRPr sz="1250">
-                <a:solidFill>
-                  <a:srgbClr val="282828"/>
-                </a:solidFill>
-              </a:defRPr>
-            </a:pPr>
-            <a:r>
-              <a:t>• Esquemas de diferencias finitas (h = 1 semana):</a:t>
-            </a:r>
-            <a:br/>
-            <a:r>
-              <a:t>  - Adelante y atrás: error O(h).</a:t>
-            </a:r>
-            <a:br/>
-            <a:r>
-              <a:t>  - Centrada: error O(h²), mejor aproximación teórica.</a:t>
-            </a:r>
-            <a:br/>
-            <a:br/>
-            <a:r>
-              <a:t>• Pico según el modelo (S''(t) = 0):</a:t>
-            </a:r>
-            <a:br/>
-            <a:r>
-              <a:t>  - t_pico = -b / (3a) = 30.59 semanas (fines de agosto 2023).</a:t>
-            </a:r>
-            <a:br/>
-            <a:r>
-              <a:t>  - Ritmo del modelo: 3.436 M streams/semana.</a:t>
-            </a:r>
-            <a:br/>
-            <a:br/>
-            <a:r>
-              <a:t>• Pico real en los datos observados:</a:t>
-            </a:r>
-            <a:br/>
-            <a:r>
-              <a:t>  - Semana 26 (27/07/2023): 4.171 M streams.</a:t>
-            </a:r>
-            <a:br/>
-            <a:r>
-              <a:t>  - Coincide con el auge de TikTok de julio 2023.</a:t>
-            </a:r>
-            <a:br/>
-            <a:br/>
-            <a:r>
-              <a:t>• Efecto de suavizado del modelo:</a:t>
-            </a:r>
-            <a:br/>
-            <a:r>
-              <a:t>  - El polinomio cúbico desplaza el pico ~4 semanas y atenúa su valor.</a:t>
-            </a:r>
-          </a:p>
-        </p:txBody>
-      </p:sp>
       <p:pic>
         <p:nvPicPr>
-          <p:cNvPr id="4" name="Picture 3" descr="grafico_3_derivada_tasa_viralidad.png"/>
+          <p:cNvPr id="2" name="Picture 1" descr="image.png"/>
           <p:cNvPicPr>
             <a:picLocks noChangeAspect="1"/>
           </p:cNvPicPr>
@@ -4737,14 +9417,228 @@
         </p:blipFill>
         <p:spPr>
           <a:xfrm>
-            <a:off x="5577840" y="1645920"/>
-            <a:ext cx="5852160" cy="3511296"/>
+            <a:off x="914400" y="2123033"/>
+            <a:ext cx="10363200" cy="3048000"/>
           </a:xfrm>
           <a:prstGeom prst="rect">
             <a:avLst/>
           </a:prstGeom>
         </p:spPr>
       </p:pic>
+      <p:sp>
+        <p:nvSpPr>
+          <p:cNvPr id="3" name="TextBox 2"/>
+          <p:cNvSpPr txBox="1"/>
+          <p:nvPr/>
+        </p:nvSpPr>
+        <p:spPr>
+          <a:xfrm>
+            <a:off x="609600" y="6200775"/>
+            <a:ext cx="4691062" cy="200025"/>
+          </a:xfrm>
+          <a:prstGeom prst="rect">
+            <a:avLst/>
+          </a:prstGeom>
+          <a:noFill/>
+        </p:spPr>
+        <p:txBody>
+          <a:bodyPr wrap="none" lIns="0" rIns="0" tIns="0" bIns="0" anchor="t">
+            <a:spAutoFit/>
+          </a:bodyPr>
+          <a:lstStyle/>
+          <a:p>
+            <a:pPr algn="l"/>
+            <a:r>
+              <a:rPr b="1" sz="1200" i="0" u="none">
+                <a:solidFill>
+                  <a:srgbClr val="0284C7"/>
+                </a:solidFill>
+                <a:latin typeface="Plus Jakarta Sans"/>
+              </a:rPr>
+              <a:t>Bisección: Robusto e incondicional (15 iteraciones).</a:t>
+            </a:r>
+          </a:p>
+        </p:txBody>
+      </p:sp>
+      <p:sp>
+        <p:nvSpPr>
+          <p:cNvPr id="4" name="TextBox 3"/>
+          <p:cNvSpPr txBox="1"/>
+          <p:nvPr/>
+        </p:nvSpPr>
+        <p:spPr>
+          <a:xfrm>
+            <a:off x="7124700" y="6200775"/>
+            <a:ext cx="5067300" cy="200025"/>
+          </a:xfrm>
+          <a:prstGeom prst="rect">
+            <a:avLst/>
+          </a:prstGeom>
+          <a:noFill/>
+        </p:spPr>
+        <p:txBody>
+          <a:bodyPr wrap="none" lIns="0" rIns="0" tIns="0" bIns="0" anchor="t">
+            <a:spAutoFit/>
+          </a:bodyPr>
+          <a:lstStyle/>
+          <a:p>
+            <a:pPr algn="l"/>
+            <a:r>
+              <a:rPr b="1" sz="1200" i="0" u="none">
+                <a:solidFill>
+                  <a:srgbClr val="E11D48"/>
+                </a:solidFill>
+                <a:latin typeface="Plus Jakarta Sans"/>
+              </a:rPr>
+              <a:t>Newton-Raphson: Convergencia cuadrática en solo 3 pasos.</a:t>
+            </a:r>
+          </a:p>
+        </p:txBody>
+      </p:sp>
+      <p:sp>
+        <p:nvSpPr>
+          <p:cNvPr id="5" name="TextBox 4"/>
+          <p:cNvSpPr txBox="1"/>
+          <p:nvPr/>
+        </p:nvSpPr>
+        <p:spPr>
+          <a:xfrm>
+            <a:off x="609600" y="457200"/>
+            <a:ext cx="7012781" cy="171450"/>
+          </a:xfrm>
+          <a:prstGeom prst="rect">
+            <a:avLst/>
+          </a:prstGeom>
+          <a:noFill/>
+        </p:spPr>
+        <p:txBody>
+          <a:bodyPr wrap="none" lIns="0" rIns="0" tIns="0" bIns="0" anchor="t">
+            <a:spAutoFit/>
+          </a:bodyPr>
+          <a:lstStyle/>
+          <a:p>
+            <a:pPr algn="l"/>
+            <a:r>
+              <a:rPr b="1" sz="1050" i="0" u="none">
+                <a:solidFill>
+                  <a:srgbClr val="E11D48"/>
+                </a:solidFill>
+                <a:latin typeface="Plus Jakarta Sans"/>
+              </a:rPr>
+              <a:t>EFICIENCIA NUMÉRICA</a:t>
+            </a:r>
+          </a:p>
+        </p:txBody>
+      </p:sp>
+      <p:sp>
+        <p:nvSpPr>
+          <p:cNvPr id="6" name="TextBox 5"/>
+          <p:cNvSpPr txBox="1"/>
+          <p:nvPr/>
+        </p:nvSpPr>
+        <p:spPr>
+          <a:xfrm>
+            <a:off x="609600" y="666750"/>
+            <a:ext cx="7363420" cy="388590"/>
+          </a:xfrm>
+          <a:prstGeom prst="rect">
+            <a:avLst/>
+          </a:prstGeom>
+          <a:noFill/>
+        </p:spPr>
+        <p:txBody>
+          <a:bodyPr wrap="none" lIns="0" rIns="0" tIns="0" bIns="0" anchor="t">
+            <a:spAutoFit/>
+          </a:bodyPr>
+          <a:lstStyle/>
+          <a:p>
+            <a:pPr algn="l">
+              <a:lnSpc>
+                <a:spcPts val="3060"/>
+              </a:lnSpc>
+            </a:pPr>
+            <a:r>
+              <a:rPr b="1" sz="2550" i="0" u="none">
+                <a:solidFill>
+                  <a:srgbClr val="0F172A"/>
+                </a:solidFill>
+                <a:latin typeface="Space Grotesk"/>
+              </a:rPr>
+              <a:t>Convergencia: Lineal vs. Cuadrática</a:t>
+            </a:r>
+          </a:p>
+        </p:txBody>
+      </p:sp>
+      <p:sp>
+        <p:nvSpPr>
+          <p:cNvPr id="7" name="TextBox 6"/>
+          <p:cNvSpPr txBox="1"/>
+          <p:nvPr/>
+        </p:nvSpPr>
+        <p:spPr>
+          <a:xfrm>
+            <a:off x="6373368" y="883890"/>
+            <a:ext cx="2276856" cy="171450"/>
+          </a:xfrm>
+          <a:prstGeom prst="rect">
+            <a:avLst/>
+          </a:prstGeom>
+          <a:noFill/>
+        </p:spPr>
+        <p:txBody>
+          <a:bodyPr wrap="none" lIns="0" rIns="0" tIns="0" bIns="0" anchor="t">
+            <a:spAutoFit/>
+          </a:bodyPr>
+          <a:lstStyle/>
+          <a:p>
+            <a:pPr algn="l"/>
+            <a:r>
+              <a:rPr b="1" sz="1050" i="0" u="none">
+                <a:solidFill>
+                  <a:srgbClr val="0284C7"/>
+                </a:solidFill>
+                <a:latin typeface="Plus Jakarta Sans"/>
+              </a:rPr>
+              <a:t>Bisección (15 iteraciones)</a:t>
+            </a:r>
+          </a:p>
+        </p:txBody>
+      </p:sp>
+      <p:sp>
+        <p:nvSpPr>
+          <p:cNvPr id="8" name="TextBox 7"/>
+          <p:cNvSpPr txBox="1"/>
+          <p:nvPr/>
+        </p:nvSpPr>
+        <p:spPr>
+          <a:xfrm>
+            <a:off x="8970264" y="883890"/>
+            <a:ext cx="2606039" cy="171450"/>
+          </a:xfrm>
+          <a:prstGeom prst="rect">
+            <a:avLst/>
+          </a:prstGeom>
+          <a:noFill/>
+        </p:spPr>
+        <p:txBody>
+          <a:bodyPr wrap="none" lIns="0" rIns="0" tIns="0" bIns="0" anchor="t">
+            <a:spAutoFit/>
+          </a:bodyPr>
+          <a:lstStyle/>
+          <a:p>
+            <a:pPr algn="l"/>
+            <a:r>
+              <a:rPr b="1" sz="1050" i="0" u="none">
+                <a:solidFill>
+                  <a:srgbClr val="E11D48"/>
+                </a:solidFill>
+                <a:latin typeface="Plus Jakarta Sans"/>
+              </a:rPr>
+              <a:t>Newton-Raphson (3 iteraciones)</a:t>
+            </a:r>
+          </a:p>
+        </p:txBody>
+      </p:sp>
     </p:spTree>
   </p:cSld>
   <p:clrMapOvr>
@@ -4756,6 +9650,14 @@
 <file path=ppt/slides/slide8.xml><?xml version="1.0" encoding="utf-8"?>
 <p:sld xmlns:a="http://schemas.openxmlformats.org/drawingml/2006/main" xmlns:p="http://schemas.openxmlformats.org/presentationml/2006/main" xmlns:r="http://schemas.openxmlformats.org/officeDocument/2006/relationships">
   <p:cSld>
+    <p:bg>
+      <p:bgPr>
+        <a:solidFill>
+          <a:srgbClr val="FFFFFF"/>
+        </a:solidFill>
+        <a:effectLst/>
+      </p:bgPr>
+    </p:bg>
     <p:spTree>
       <p:nvGrpSpPr>
         <p:cNvPr id="1" name=""/>
@@ -4765,153 +9667,99 @@
       <p:grpSpPr/>
       <p:sp>
         <p:nvSpPr>
-          <p:cNvPr id="2" name="TextBox 1"/>
-          <p:cNvSpPr txBox="1"/>
-          <p:nvPr/>
-        </p:nvSpPr>
-        <p:spPr>
-          <a:xfrm>
-            <a:off x="731520" y="365760"/>
-            <a:ext cx="10698480" cy="1005840"/>
-          </a:xfrm>
-          <a:prstGeom prst="rect">
-            <a:avLst/>
-          </a:prstGeom>
-          <a:noFill/>
-        </p:spPr>
-        <p:txBody>
-          <a:bodyPr wrap="square" lIns="0" tIns="0" rIns="0" bIns="0">
-            <a:spAutoFit/>
-          </a:bodyPr>
-          <a:lstStyle/>
-          <a:p>
-            <a:pPr>
-              <a:defRPr sz="1100" b="1">
-                <a:solidFill>
-                  <a:srgbClr val="E91E63"/>
-                </a:solidFill>
-                <a:latin typeface="Calibri"/>
-              </a:defRPr>
-            </a:pPr>
-            <a:r>
-              <a:t>VALIDACIÓN DEL MODELO Y GENERALIZACIÓN</a:t>
-            </a:r>
-          </a:p>
-          <a:p>
-            <a:pPr>
-              <a:defRPr sz="2300" b="1">
-                <a:solidFill>
-                  <a:srgbClr val="1F4E79"/>
-                </a:solidFill>
-                <a:latin typeface="Calibri"/>
-              </a:defRPr>
-            </a:pPr>
-            <a:r>
-              <a:t>Generalización: ¿sirve para cualquier canción?</a:t>
-            </a:r>
-          </a:p>
-        </p:txBody>
-      </p:sp>
-      <p:sp>
-        <p:nvSpPr>
-          <p:cNvPr id="3" name="TextBox 2"/>
-          <p:cNvSpPr txBox="1"/>
-          <p:nvPr/>
-        </p:nvSpPr>
-        <p:spPr>
-          <a:xfrm>
-            <a:off x="731520" y="1645920"/>
-            <a:ext cx="6400800" cy="4663440"/>
-          </a:xfrm>
-          <a:prstGeom prst="rect">
-            <a:avLst/>
-          </a:prstGeom>
-          <a:noFill/>
-        </p:spPr>
-        <p:txBody>
-          <a:bodyPr wrap="square">
-            <a:spAutoFit/>
-          </a:bodyPr>
-          <a:lstStyle/>
-          <a:p>
-            <a:pPr>
-              <a:spcAft>
-                <a:spcPts val="800"/>
-              </a:spcAft>
-              <a:defRPr sz="1500" b="1">
-                <a:solidFill>
-                  <a:srgbClr val="1F4E79"/>
-                </a:solidFill>
-              </a:defRPr>
-            </a:pPr>
-            <a:r>
-              <a:t>Evaluación en 3 Canciones (Resurgimiento vs. Estrenos):</a:t>
-            </a:r>
-          </a:p>
-          <a:p>
-            <a:pPr>
-              <a:defRPr sz="1100">
-                <a:solidFill>
-                  <a:srgbClr val="282828"/>
-                </a:solidFill>
-              </a:defRPr>
-            </a:pPr>
-            <a:r>
-              <a:t>• Regla matemática de validación:</a:t>
-            </a:r>
-            <a:br/>
-            <a:r>
-              <a:t>  - Punto de inflexión: t = -b / (3a). Es MÁXIMO del ritmo S'(t) sólo si a &lt; 0.</a:t>
-            </a:r>
-            <a:br/>
-            <a:r>
-              <a:t>  - Si a &gt; 0, es un MÍNIMO: la cúbica no puede representar el pico de demanda.</a:t>
-            </a:r>
-            <a:br/>
-            <a:br/>
-            <a:r>
-              <a:t>• Resurgimiento gradual vs. Estrenos masivos:</a:t>
-            </a:r>
-            <a:br/>
-            <a:r>
-              <a:t>  - Rosa Pastel: sube meses y baja (a = -0.000839 &lt; 0) → Aplica (pico en sem. 30.6).</a:t>
-            </a:r>
-            <a:br/>
-            <a:r>
-              <a:t>  - Estrenos (Ella Baila Sola, Tití): arrancan en pico y sólo bajan (a &gt; 0) → No aplica.</a:t>
-            </a:r>
-            <a:br/>
-            <a:r>
-              <a:t>    La derivada parabólica vuelve a subir al final (rebote irreal en el gráfico).</a:t>
-            </a:r>
-            <a:br/>
-            <a:br/>
-            <a:r>
-              <a:t>• Un R² alto no garantiza validez física:</a:t>
-            </a:r>
-            <a:br/>
-            <a:r>
-              <a:t>  - En los estrenos R² es casi perfecto (0.996 y 0.9997), pero el modelo falla para el pico.</a:t>
-            </a:r>
-            <a:br/>
-            <a:br/>
-            <a:r>
-              <a:t>• Herramienta general de ingeniería reutilizable:</a:t>
-            </a:r>
-            <a:br/>
-            <a:r>
-              <a:t>  - Hito 100M (Newton en 3 iteraciones) y pico de datos funcionan para todas.</a:t>
-            </a:r>
-            <a:br/>
-            <a:r>
-              <a:t>  - El programa avisa automáticamente cuándo no aplica en lugar de arrojar un resultado falso.</a:t>
-            </a:r>
+          <p:cNvPr id="2" name="Rounded Rectangle 1"/>
+          <p:cNvSpPr/>
+          <p:nvPr/>
+        </p:nvSpPr>
+        <p:spPr>
+          <a:xfrm>
+            <a:off x="609600" y="5895975"/>
+            <a:ext cx="5334000" cy="504825"/>
+          </a:xfrm>
+          <a:prstGeom prst="roundRect">
+            <a:avLst>
+              <a:gd name="adj" fmla="val 22641"/>
+            </a:avLst>
+          </a:prstGeom>
+          <a:solidFill>
+            <a:srgbClr val="F3E8FF"/>
+          </a:solidFill>
+          <a:ln>
+            <a:noFill/>
+          </a:ln>
+          <a:effectLst/>
+        </p:spPr>
+        <p:style>
+          <a:lnRef idx="1">
+            <a:schemeClr val="accent1"/>
+          </a:lnRef>
+          <a:fillRef idx="3">
+            <a:schemeClr val="accent1"/>
+          </a:fillRef>
+          <a:effectRef idx="2">
+            <a:schemeClr val="accent1"/>
+          </a:effectRef>
+          <a:fontRef idx="minor">
+            <a:schemeClr val="lt1"/>
+          </a:fontRef>
+        </p:style>
+        <p:txBody>
+          <a:bodyPr rtlCol="0" anchor="ctr"/>
+          <a:lstStyle/>
+          <a:p>
+            <a:pPr algn="ctr"/>
+          </a:p>
+        </p:txBody>
+      </p:sp>
+      <p:sp>
+        <p:nvSpPr>
+          <p:cNvPr id="3" name="Rounded Rectangle 2"/>
+          <p:cNvSpPr/>
+          <p:nvPr/>
+        </p:nvSpPr>
+        <p:spPr>
+          <a:xfrm>
+            <a:off x="6248400" y="5895975"/>
+            <a:ext cx="5334000" cy="504825"/>
+          </a:xfrm>
+          <a:prstGeom prst="roundRect">
+            <a:avLst>
+              <a:gd name="adj" fmla="val 22641"/>
+            </a:avLst>
+          </a:prstGeom>
+          <a:solidFill>
+            <a:srgbClr val="FEE2E2"/>
+          </a:solidFill>
+          <a:ln>
+            <a:noFill/>
+          </a:ln>
+          <a:effectLst/>
+        </p:spPr>
+        <p:style>
+          <a:lnRef idx="1">
+            <a:schemeClr val="accent1"/>
+          </a:lnRef>
+          <a:fillRef idx="3">
+            <a:schemeClr val="accent1"/>
+          </a:fillRef>
+          <a:effectRef idx="2">
+            <a:schemeClr val="accent1"/>
+          </a:effectRef>
+          <a:fontRef idx="minor">
+            <a:schemeClr val="lt1"/>
+          </a:fontRef>
+        </p:style>
+        <p:txBody>
+          <a:bodyPr rtlCol="0" anchor="ctr"/>
+          <a:lstStyle/>
+          <a:p>
+            <a:pPr algn="ctr"/>
           </a:p>
         </p:txBody>
       </p:sp>
       <p:pic>
         <p:nvPicPr>
-          <p:cNvPr id="4" name="Picture 3" descr="grafico_4_comparacion_canciones.png"/>
+          <p:cNvPr id="4" name="Picture 3" descr="image.png"/>
           <p:cNvPicPr>
             <a:picLocks noChangeAspect="1"/>
           </p:cNvPicPr>
@@ -4925,14 +9773,228 @@
         </p:blipFill>
         <p:spPr>
           <a:xfrm>
-            <a:off x="7406640" y="1645920"/>
-            <a:ext cx="3886200" cy="4663440"/>
+            <a:off x="914400" y="2065883"/>
+            <a:ext cx="10363200" cy="2857500"/>
           </a:xfrm>
           <a:prstGeom prst="rect">
             <a:avLst/>
           </a:prstGeom>
         </p:spPr>
       </p:pic>
+      <p:sp>
+        <p:nvSpPr>
+          <p:cNvPr id="5" name="TextBox 4"/>
+          <p:cNvSpPr txBox="1"/>
+          <p:nvPr/>
+        </p:nvSpPr>
+        <p:spPr>
+          <a:xfrm>
+            <a:off x="609600" y="457200"/>
+            <a:ext cx="8548687" cy="171450"/>
+          </a:xfrm>
+          <a:prstGeom prst="rect">
+            <a:avLst/>
+          </a:prstGeom>
+          <a:noFill/>
+        </p:spPr>
+        <p:txBody>
+          <a:bodyPr wrap="none" lIns="0" rIns="0" tIns="0" bIns="0" anchor="t">
+            <a:spAutoFit/>
+          </a:bodyPr>
+          <a:lstStyle/>
+          <a:p>
+            <a:pPr algn="l"/>
+            <a:r>
+              <a:rPr b="1" sz="1050" i="0" u="none">
+                <a:solidFill>
+                  <a:srgbClr val="7C3AED"/>
+                </a:solidFill>
+                <a:latin typeface="Plus Jakarta Sans"/>
+              </a:rPr>
+              <a:t>MÉTODO NUMÉRICO 3</a:t>
+            </a:r>
+          </a:p>
+        </p:txBody>
+      </p:sp>
+      <p:sp>
+        <p:nvSpPr>
+          <p:cNvPr id="6" name="TextBox 5"/>
+          <p:cNvSpPr txBox="1"/>
+          <p:nvPr/>
+        </p:nvSpPr>
+        <p:spPr>
+          <a:xfrm>
+            <a:off x="609600" y="666750"/>
+            <a:ext cx="8976121" cy="388590"/>
+          </a:xfrm>
+          <a:prstGeom prst="rect">
+            <a:avLst/>
+          </a:prstGeom>
+          <a:noFill/>
+        </p:spPr>
+        <p:txBody>
+          <a:bodyPr wrap="none" lIns="0" rIns="0" tIns="0" bIns="0" anchor="t">
+            <a:spAutoFit/>
+          </a:bodyPr>
+          <a:lstStyle/>
+          <a:p>
+            <a:pPr algn="l">
+              <a:lnSpc>
+                <a:spcPts val="3060"/>
+              </a:lnSpc>
+            </a:pPr>
+            <a:r>
+              <a:rPr b="1" sz="2550" i="0" u="none">
+                <a:solidFill>
+                  <a:srgbClr val="0F172A"/>
+                </a:solidFill>
+                <a:latin typeface="Space Grotesk"/>
+              </a:rPr>
+              <a:t>Ritmo de Demanda y Diferenciación (dS/dt)</a:t>
+            </a:r>
+          </a:p>
+        </p:txBody>
+      </p:sp>
+      <p:sp>
+        <p:nvSpPr>
+          <p:cNvPr id="7" name="TextBox 6"/>
+          <p:cNvSpPr txBox="1"/>
+          <p:nvPr/>
+        </p:nvSpPr>
+        <p:spPr>
+          <a:xfrm>
+            <a:off x="800100" y="6048375"/>
+            <a:ext cx="6191250" cy="200025"/>
+          </a:xfrm>
+          <a:prstGeom prst="rect">
+            <a:avLst/>
+          </a:prstGeom>
+          <a:noFill/>
+        </p:spPr>
+        <p:txBody>
+          <a:bodyPr wrap="none" lIns="0" rIns="0" tIns="0" bIns="0" anchor="t">
+            <a:spAutoFit/>
+          </a:bodyPr>
+          <a:lstStyle/>
+          <a:p>
+            <a:pPr algn="l"/>
+            <a:r>
+              <a:rPr b="1" sz="1200" i="0" u="none">
+                <a:solidFill>
+                  <a:srgbClr val="6B21A8"/>
+                </a:solidFill>
+                <a:latin typeface="Plus Jakarta Sans"/>
+              </a:rPr>
+              <a:t>Pico Real Observado: Semana 26 (4.171 M streams/semana)</a:t>
+            </a:r>
+          </a:p>
+        </p:txBody>
+      </p:sp>
+      <p:sp>
+        <p:nvSpPr>
+          <p:cNvPr id="8" name="TextBox 7"/>
+          <p:cNvSpPr txBox="1"/>
+          <p:nvPr/>
+        </p:nvSpPr>
+        <p:spPr>
+          <a:xfrm>
+            <a:off x="6438900" y="6048375"/>
+            <a:ext cx="5753100" cy="200025"/>
+          </a:xfrm>
+          <a:prstGeom prst="rect">
+            <a:avLst/>
+          </a:prstGeom>
+          <a:noFill/>
+        </p:spPr>
+        <p:txBody>
+          <a:bodyPr wrap="none" lIns="0" rIns="0" tIns="0" bIns="0" anchor="t">
+            <a:spAutoFit/>
+          </a:bodyPr>
+          <a:lstStyle/>
+          <a:p>
+            <a:pPr algn="l"/>
+            <a:r>
+              <a:rPr b="1" sz="1200" i="0" u="none">
+                <a:solidFill>
+                  <a:srgbClr val="991B1B"/>
+                </a:solidFill>
+                <a:latin typeface="Plus Jakarta Sans"/>
+              </a:rPr>
+              <a:t>Pico del Modelo Cúbico: Semana 30.59 (3.436 M streams/semana)</a:t>
+            </a:r>
+          </a:p>
+        </p:txBody>
+      </p:sp>
+      <p:sp>
+        <p:nvSpPr>
+          <p:cNvPr id="9" name="TextBox 8"/>
+          <p:cNvSpPr txBox="1"/>
+          <p:nvPr/>
+        </p:nvSpPr>
+        <p:spPr>
+          <a:xfrm>
+            <a:off x="612648" y="1207008"/>
+            <a:ext cx="2194560" cy="171450"/>
+          </a:xfrm>
+          <a:prstGeom prst="rect">
+            <a:avLst/>
+          </a:prstGeom>
+          <a:noFill/>
+        </p:spPr>
+        <p:txBody>
+          <a:bodyPr wrap="none" lIns="0" rIns="0" tIns="0" bIns="0" anchor="t">
+            <a:spAutoFit/>
+          </a:bodyPr>
+          <a:lstStyle/>
+          <a:p>
+            <a:pPr algn="l"/>
+            <a:r>
+              <a:rPr b="1" sz="1050" i="0" u="none">
+                <a:solidFill>
+                  <a:srgbClr val="8B5CF6"/>
+                </a:solidFill>
+                <a:latin typeface="Plus Jakarta Sans"/>
+              </a:rPr>
+              <a:t>Streams semanales medidos</a:t>
+            </a:r>
+          </a:p>
+        </p:txBody>
+      </p:sp>
+      <p:sp>
+        <p:nvSpPr>
+          <p:cNvPr id="10" name="TextBox 9"/>
+          <p:cNvSpPr txBox="1"/>
+          <p:nvPr/>
+        </p:nvSpPr>
+        <p:spPr>
+          <a:xfrm>
+            <a:off x="3127248" y="1207008"/>
+            <a:ext cx="2194560" cy="171450"/>
+          </a:xfrm>
+          <a:prstGeom prst="rect">
+            <a:avLst/>
+          </a:prstGeom>
+          <a:noFill/>
+        </p:spPr>
+        <p:txBody>
+          <a:bodyPr wrap="none" lIns="0" rIns="0" tIns="0" bIns="0" anchor="t">
+            <a:spAutoFit/>
+          </a:bodyPr>
+          <a:lstStyle/>
+          <a:p>
+            <a:pPr algn="l"/>
+            <a:r>
+              <a:rPr b="1" sz="1050" i="0" u="none">
+                <a:solidFill>
+                  <a:srgbClr val="6D28D9"/>
+                </a:solidFill>
+                <a:latin typeface="Plus Jakarta Sans"/>
+              </a:rPr>
+              <a:t>Derivada del modelo S'(t)</a:t>
+            </a:r>
+          </a:p>
+        </p:txBody>
+      </p:sp>
     </p:spTree>
   </p:cSld>
   <p:clrMapOvr>
@@ -4944,6 +10006,14 @@
 <file path=ppt/slides/slide9.xml><?xml version="1.0" encoding="utf-8"?>
 <p:sld xmlns:a="http://schemas.openxmlformats.org/drawingml/2006/main" xmlns:p="http://schemas.openxmlformats.org/presentationml/2006/main" xmlns:r="http://schemas.openxmlformats.org/officeDocument/2006/relationships">
   <p:cSld>
+    <p:bg>
+      <p:bgPr>
+        <a:solidFill>
+          <a:srgbClr val="FFFFFF"/>
+        </a:solidFill>
+        <a:effectLst/>
+      </p:bgPr>
+    </p:bg>
     <p:spTree>
       <p:nvGrpSpPr>
         <p:cNvPr id="1" name=""/>
@@ -4953,75 +10023,27 @@
       <p:grpSpPr/>
       <p:sp>
         <p:nvSpPr>
-          <p:cNvPr id="2" name="TextBox 1"/>
-          <p:cNvSpPr txBox="1"/>
-          <p:nvPr/>
-        </p:nvSpPr>
-        <p:spPr>
-          <a:xfrm>
-            <a:off x="731520" y="365760"/>
-            <a:ext cx="10698480" cy="1005840"/>
-          </a:xfrm>
-          <a:prstGeom prst="rect">
-            <a:avLst/>
-          </a:prstGeom>
-          <a:noFill/>
-        </p:spPr>
-        <p:txBody>
-          <a:bodyPr wrap="square" lIns="0" tIns="0" rIns="0" bIns="0">
-            <a:spAutoFit/>
-          </a:bodyPr>
-          <a:lstStyle/>
-          <a:p>
-            <a:pPr>
-              <a:defRPr sz="1100" b="1">
-                <a:solidFill>
-                  <a:srgbClr val="E91E63"/>
-                </a:solidFill>
-                <a:latin typeface="Calibri"/>
-              </a:defRPr>
-            </a:pPr>
-            <a:r>
-              <a:t>ANÁLISIS CRÍTICO</a:t>
-            </a:r>
-          </a:p>
-          <a:p>
-            <a:pPr>
-              <a:defRPr sz="2300" b="1">
-                <a:solidFill>
-                  <a:srgbClr val="1F4E79"/>
-                </a:solidFill>
-                <a:latin typeface="Calibri"/>
-              </a:defRPr>
-            </a:pPr>
-            <a:r>
-              <a:t>Limitaciones del Modelo Numérico</a:t>
-            </a:r>
-          </a:p>
-        </p:txBody>
-      </p:sp>
-      <p:sp>
-        <p:nvSpPr>
-          <p:cNvPr id="3" name="Rounded Rectangle 2"/>
+          <p:cNvPr id="2" name="Rounded Rectangle 1"/>
           <p:cNvSpPr/>
           <p:nvPr/>
         </p:nvSpPr>
         <p:spPr>
           <a:xfrm>
-            <a:off x="731520" y="1645920"/>
-            <a:ext cx="5120640" cy="2194560"/>
+            <a:off x="609600" y="2880270"/>
+            <a:ext cx="2571750" cy="2019300"/>
           </a:xfrm>
           <a:prstGeom prst="roundRect">
-            <a:avLst/>
+            <a:avLst>
+              <a:gd name="adj" fmla="val 7547"/>
+            </a:avLst>
           </a:prstGeom>
           <a:solidFill>
-            <a:srgbClr val="F5F7FA"/>
+            <a:srgbClr val="F8FAFC"/>
           </a:solidFill>
           <a:ln>
-            <a:solidFill>
-              <a:srgbClr val="D9E1F2"/>
-            </a:solidFill>
+            <a:noFill/>
           </a:ln>
+          <a:effectLst/>
         </p:spPr>
         <p:style>
           <a:lnRef idx="1">
@@ -5038,59 +10060,36 @@
           </a:fontRef>
         </p:style>
         <p:txBody>
-          <a:bodyPr rtlCol="0" anchor="ctr" wrap="square" lIns="274320" tIns="274320"/>
-          <a:lstStyle/>
-          <a:p>
-            <a:pPr algn="ctr">
-              <a:spcAft>
-                <a:spcPts val="600"/>
-              </a:spcAft>
-              <a:defRPr sz="1400" b="1">
-                <a:solidFill>
-                  <a:srgbClr val="1F4E79"/>
-                </a:solidFill>
-              </a:defRPr>
-            </a:pPr>
-            <a:r>
-              <a:t>1. Discrepancia con Datos Puntuales</a:t>
-            </a:r>
-          </a:p>
-          <a:p>
-            <a:pPr>
-              <a:defRPr sz="1150">
-                <a:solidFill>
-                  <a:srgbClr val="282828"/>
-                </a:solidFill>
-              </a:defRPr>
-            </a:pPr>
-            <a:r>
-              <a:t>La cúbica por mínimos cuadrados no pasa exactamente por los puntos. Por eso la raíz del modelo (t = 35.52) difiere ~2.75 días de la interpolación lineal directa entre las semanas 35 y 36 (t = 35.13).</a:t>
-            </a:r>
-          </a:p>
-        </p:txBody>
-      </p:sp>
-      <p:sp>
-        <p:nvSpPr>
-          <p:cNvPr id="4" name="Rounded Rectangle 3"/>
+          <a:bodyPr rtlCol="0" anchor="ctr"/>
+          <a:lstStyle/>
+          <a:p>
+            <a:pPr algn="ctr"/>
+          </a:p>
+        </p:txBody>
+      </p:sp>
+      <p:sp>
+        <p:nvSpPr>
+          <p:cNvPr id="3" name="Rounded Rectangle 2"/>
           <p:cNvSpPr/>
           <p:nvPr/>
         </p:nvSpPr>
         <p:spPr>
           <a:xfrm>
-            <a:off x="6309360" y="1645920"/>
-            <a:ext cx="5120640" cy="2194560"/>
+            <a:off x="3409950" y="2880270"/>
+            <a:ext cx="2571750" cy="2019300"/>
           </a:xfrm>
           <a:prstGeom prst="roundRect">
-            <a:avLst/>
+            <a:avLst>
+              <a:gd name="adj" fmla="val 7547"/>
+            </a:avLst>
           </a:prstGeom>
           <a:solidFill>
-            <a:srgbClr val="F5F7FA"/>
+            <a:srgbClr val="F8FAFC"/>
           </a:solidFill>
           <a:ln>
-            <a:solidFill>
-              <a:srgbClr val="D9E1F2"/>
-            </a:solidFill>
+            <a:noFill/>
           </a:ln>
+          <a:effectLst/>
         </p:spPr>
         <p:style>
           <a:lnRef idx="1">
@@ -5107,59 +10106,36 @@
           </a:fontRef>
         </p:style>
         <p:txBody>
-          <a:bodyPr rtlCol="0" anchor="ctr" wrap="square" lIns="274320" tIns="274320"/>
-          <a:lstStyle/>
-          <a:p>
-            <a:pPr algn="ctr">
-              <a:spcAft>
-                <a:spcPts val="600"/>
-              </a:spcAft>
-              <a:defRPr sz="1400" b="1">
-                <a:solidFill>
-                  <a:srgbClr val="1F4E79"/>
-                </a:solidFill>
-              </a:defRPr>
-            </a:pPr>
-            <a:r>
-              <a:t>2. Suavizado del Pico de Demanda</a:t>
-            </a:r>
-          </a:p>
-          <a:p>
-            <a:pPr>
-              <a:defRPr sz="1150">
-                <a:solidFill>
-                  <a:srgbClr val="282828"/>
-                </a:solidFill>
-              </a:defRPr>
-            </a:pPr>
-            <a:r>
-              <a:t>Al ajustar un único polinomio para 47 semanas, el modelo atenúa los cambios bruscos: desplaza el pico de la semana 26 a la semana 30.6 y subestima su magnitud máxima (3.44 vs. 4.17 M streams/sem).</a:t>
-            </a:r>
-          </a:p>
-        </p:txBody>
-      </p:sp>
-      <p:sp>
-        <p:nvSpPr>
-          <p:cNvPr id="5" name="Rounded Rectangle 4"/>
+          <a:bodyPr rtlCol="0" anchor="ctr"/>
+          <a:lstStyle/>
+          <a:p>
+            <a:pPr algn="ctr"/>
+          </a:p>
+        </p:txBody>
+      </p:sp>
+      <p:sp>
+        <p:nvSpPr>
+          <p:cNvPr id="4" name="Rounded Rectangle 3"/>
           <p:cNvSpPr/>
           <p:nvPr/>
         </p:nvSpPr>
         <p:spPr>
           <a:xfrm>
-            <a:off x="731520" y="4114800"/>
-            <a:ext cx="5120640" cy="2194560"/>
+            <a:off x="6210300" y="2880270"/>
+            <a:ext cx="2571750" cy="2019300"/>
           </a:xfrm>
           <a:prstGeom prst="roundRect">
-            <a:avLst/>
+            <a:avLst>
+              <a:gd name="adj" fmla="val 7547"/>
+            </a:avLst>
           </a:prstGeom>
           <a:solidFill>
-            <a:srgbClr val="F5F7FA"/>
+            <a:srgbClr val="F8FAFC"/>
           </a:solidFill>
           <a:ln>
-            <a:solidFill>
-              <a:srgbClr val="D9E1F2"/>
-            </a:solidFill>
+            <a:noFill/>
           </a:ln>
+          <a:effectLst/>
         </p:spPr>
         <p:style>
           <a:lnRef idx="1">
@@ -5176,59 +10152,36 @@
           </a:fontRef>
         </p:style>
         <p:txBody>
-          <a:bodyPr rtlCol="0" anchor="ctr" wrap="square" lIns="274320" tIns="274320"/>
-          <a:lstStyle/>
-          <a:p>
-            <a:pPr algn="ctr">
-              <a:spcAft>
-                <a:spcPts val="600"/>
-              </a:spcAft>
-              <a:defRPr sz="1400" b="1">
-                <a:solidFill>
-                  <a:srgbClr val="1F4E79"/>
-                </a:solidFill>
-              </a:defRPr>
-            </a:pPr>
-            <a:r>
-              <a:t>3. Alcance de los Datos Relevados</a:t>
-            </a:r>
-          </a:p>
-          <a:p>
-            <a:pPr>
-              <a:defRPr sz="1150">
-                <a:solidFill>
-                  <a:srgbClr val="282828"/>
-                </a:solidFill>
-              </a:defRPr>
-            </a:pPr>
-            <a:r>
-              <a:t>Los datos cubren únicamente los charts semanales del Top 200 de Spotify México (kworb.net). No contemplan otras plataformas (YouTube, Apple Music), otros países ni escuchas fuera del chart.</a:t>
-            </a:r>
-          </a:p>
-        </p:txBody>
-      </p:sp>
-      <p:sp>
-        <p:nvSpPr>
-          <p:cNvPr id="6" name="Rounded Rectangle 5"/>
+          <a:bodyPr rtlCol="0" anchor="ctr"/>
+          <a:lstStyle/>
+          <a:p>
+            <a:pPr algn="ctr"/>
+          </a:p>
+        </p:txBody>
+      </p:sp>
+      <p:sp>
+        <p:nvSpPr>
+          <p:cNvPr id="5" name="Rounded Rectangle 4"/>
           <p:cNvSpPr/>
           <p:nvPr/>
         </p:nvSpPr>
         <p:spPr>
           <a:xfrm>
-            <a:off x="6309360" y="4114800"/>
-            <a:ext cx="5120640" cy="2194560"/>
+            <a:off x="9010650" y="2880270"/>
+            <a:ext cx="2571750" cy="2019300"/>
           </a:xfrm>
           <a:prstGeom prst="roundRect">
-            <a:avLst/>
+            <a:avLst>
+              <a:gd name="adj" fmla="val 7547"/>
+            </a:avLst>
           </a:prstGeom>
           <a:solidFill>
-            <a:srgbClr val="F5F7FA"/>
+            <a:srgbClr val="F8FAFC"/>
           </a:solidFill>
           <a:ln>
-            <a:solidFill>
-              <a:srgbClr val="D9E1F2"/>
-            </a:solidFill>
+            <a:noFill/>
           </a:ln>
+          <a:effectLst/>
         </p:spPr>
         <p:style>
           <a:lnRef idx="1">
@@ -5245,33 +10198,555 @@
           </a:fontRef>
         </p:style>
         <p:txBody>
-          <a:bodyPr rtlCol="0" anchor="ctr" wrap="square" lIns="274320" tIns="274320"/>
-          <a:lstStyle/>
-          <a:p>
-            <a:pPr algn="ctr">
-              <a:spcAft>
-                <a:spcPts val="600"/>
-              </a:spcAft>
-              <a:defRPr sz="1400" b="1">
-                <a:solidFill>
-                  <a:srgbClr val="1F4E79"/>
-                </a:solidFill>
-              </a:defRPr>
+          <a:bodyPr rtlCol="0" anchor="ctr"/>
+          <a:lstStyle/>
+          <a:p>
+            <a:pPr algn="ctr"/>
+          </a:p>
+        </p:txBody>
+      </p:sp>
+      <p:pic>
+        <p:nvPicPr>
+          <p:cNvPr id="6" name="Picture 5" descr="image.png"/>
+          <p:cNvPicPr>
+            <a:picLocks noChangeAspect="1"/>
+          </p:cNvPicPr>
+          <p:nvPr/>
+        </p:nvPicPr>
+        <p:blipFill>
+          <a:blip r:embed="rId2"/>
+          <a:stretch>
+            <a:fillRect/>
+          </a:stretch>
+        </p:blipFill>
+        <p:spPr>
+          <a:xfrm>
+            <a:off x="838200" y="3146970"/>
+            <a:ext cx="381000" cy="381000"/>
+          </a:xfrm>
+          <a:prstGeom prst="rect">
+            <a:avLst/>
+          </a:prstGeom>
+        </p:spPr>
+      </p:pic>
+      <p:pic>
+        <p:nvPicPr>
+          <p:cNvPr id="7" name="Picture 6" descr="image.png"/>
+          <p:cNvPicPr>
+            <a:picLocks noChangeAspect="1"/>
+          </p:cNvPicPr>
+          <p:nvPr/>
+        </p:nvPicPr>
+        <p:blipFill>
+          <a:blip r:embed="rId3"/>
+          <a:stretch>
+            <a:fillRect/>
+          </a:stretch>
+        </p:blipFill>
+        <p:spPr>
+          <a:xfrm>
+            <a:off x="3638550" y="3146970"/>
+            <a:ext cx="381000" cy="381000"/>
+          </a:xfrm>
+          <a:prstGeom prst="rect">
+            <a:avLst/>
+          </a:prstGeom>
+        </p:spPr>
+      </p:pic>
+      <p:pic>
+        <p:nvPicPr>
+          <p:cNvPr id="8" name="Picture 7" descr="image.png"/>
+          <p:cNvPicPr>
+            <a:picLocks noChangeAspect="1"/>
+          </p:cNvPicPr>
+          <p:nvPr/>
+        </p:nvPicPr>
+        <p:blipFill>
+          <a:blip r:embed="rId4"/>
+          <a:stretch>
+            <a:fillRect/>
+          </a:stretch>
+        </p:blipFill>
+        <p:spPr>
+          <a:xfrm>
+            <a:off x="6438900" y="3146970"/>
+            <a:ext cx="381000" cy="381000"/>
+          </a:xfrm>
+          <a:prstGeom prst="rect">
+            <a:avLst/>
+          </a:prstGeom>
+        </p:spPr>
+      </p:pic>
+      <p:pic>
+        <p:nvPicPr>
+          <p:cNvPr id="9" name="Picture 8" descr="image.png"/>
+          <p:cNvPicPr>
+            <a:picLocks noChangeAspect="1"/>
+          </p:cNvPicPr>
+          <p:nvPr/>
+        </p:nvPicPr>
+        <p:blipFill>
+          <a:blip r:embed="rId5"/>
+          <a:stretch>
+            <a:fillRect/>
+          </a:stretch>
+        </p:blipFill>
+        <p:spPr>
+          <a:xfrm>
+            <a:off x="9239250" y="3146970"/>
+            <a:ext cx="381000" cy="381000"/>
+          </a:xfrm>
+          <a:prstGeom prst="rect">
+            <a:avLst/>
+          </a:prstGeom>
+        </p:spPr>
+      </p:pic>
+      <p:pic>
+        <p:nvPicPr>
+          <p:cNvPr id="10" name="Picture 9" descr="image.png"/>
+          <p:cNvPicPr>
+            <a:picLocks noChangeAspect="1"/>
+          </p:cNvPicPr>
+          <p:nvPr/>
+        </p:nvPicPr>
+        <p:blipFill>
+          <a:blip r:embed="rId6"/>
+          <a:stretch>
+            <a:fillRect/>
+          </a:stretch>
+        </p:blipFill>
+        <p:spPr>
+          <a:xfrm>
+            <a:off x="942975" y="3251745"/>
+            <a:ext cx="171450" cy="171450"/>
+          </a:xfrm>
+          <a:prstGeom prst="rect">
+            <a:avLst/>
+          </a:prstGeom>
+        </p:spPr>
+      </p:pic>
+      <p:pic>
+        <p:nvPicPr>
+          <p:cNvPr id="11" name="Picture 10" descr="image.png"/>
+          <p:cNvPicPr>
+            <a:picLocks noChangeAspect="1"/>
+          </p:cNvPicPr>
+          <p:nvPr/>
+        </p:nvPicPr>
+        <p:blipFill>
+          <a:blip r:embed="rId7"/>
+          <a:stretch>
+            <a:fillRect/>
+          </a:stretch>
+        </p:blipFill>
+        <p:spPr>
+          <a:xfrm>
+            <a:off x="3719512" y="3251745"/>
+            <a:ext cx="219075" cy="171450"/>
+          </a:xfrm>
+          <a:prstGeom prst="rect">
+            <a:avLst/>
+          </a:prstGeom>
+        </p:spPr>
+      </p:pic>
+      <p:pic>
+        <p:nvPicPr>
+          <p:cNvPr id="12" name="Picture 11" descr="image.png"/>
+          <p:cNvPicPr>
+            <a:picLocks noChangeAspect="1"/>
+          </p:cNvPicPr>
+          <p:nvPr/>
+        </p:nvPicPr>
+        <p:blipFill>
+          <a:blip r:embed="rId8"/>
+          <a:stretch>
+            <a:fillRect/>
+          </a:stretch>
+        </p:blipFill>
+        <p:spPr>
+          <a:xfrm>
+            <a:off x="6543675" y="3251745"/>
+            <a:ext cx="171450" cy="171450"/>
+          </a:xfrm>
+          <a:prstGeom prst="rect">
+            <a:avLst/>
+          </a:prstGeom>
+        </p:spPr>
+      </p:pic>
+      <p:pic>
+        <p:nvPicPr>
+          <p:cNvPr id="13" name="Picture 12" descr="image.png"/>
+          <p:cNvPicPr>
+            <a:picLocks noChangeAspect="1"/>
+          </p:cNvPicPr>
+          <p:nvPr/>
+        </p:nvPicPr>
+        <p:blipFill>
+          <a:blip r:embed="rId9"/>
+          <a:stretch>
+            <a:fillRect/>
+          </a:stretch>
+        </p:blipFill>
+        <p:spPr>
+          <a:xfrm>
+            <a:off x="9344025" y="3251745"/>
+            <a:ext cx="171450" cy="171450"/>
+          </a:xfrm>
+          <a:prstGeom prst="rect">
+            <a:avLst/>
+          </a:prstGeom>
+        </p:spPr>
+      </p:pic>
+      <p:sp>
+        <p:nvSpPr>
+          <p:cNvPr id="14" name="TextBox 13"/>
+          <p:cNvSpPr txBox="1"/>
+          <p:nvPr/>
+        </p:nvSpPr>
+        <p:spPr>
+          <a:xfrm>
+            <a:off x="609600" y="457200"/>
+            <a:ext cx="11582400" cy="171450"/>
+          </a:xfrm>
+          <a:prstGeom prst="rect">
+            <a:avLst/>
+          </a:prstGeom>
+          <a:noFill/>
+        </p:spPr>
+        <p:txBody>
+          <a:bodyPr wrap="none" lIns="0" rIns="0" tIns="0" bIns="0" anchor="t">
+            <a:spAutoFit/>
+          </a:bodyPr>
+          <a:lstStyle/>
+          <a:p>
+            <a:pPr algn="l"/>
+            <a:r>
+              <a:rPr b="1" sz="1050" i="0" u="none">
+                <a:solidFill>
+                  <a:srgbClr val="E11D48"/>
+                </a:solidFill>
+                <a:latin typeface="Plus Jakarta Sans"/>
+              </a:rPr>
+              <a:t>EVALUACIÓN TÉCNICA</a:t>
+            </a:r>
+          </a:p>
+        </p:txBody>
+      </p:sp>
+      <p:sp>
+        <p:nvSpPr>
+          <p:cNvPr id="15" name="TextBox 14"/>
+          <p:cNvSpPr txBox="1"/>
+          <p:nvPr/>
+        </p:nvSpPr>
+        <p:spPr>
+          <a:xfrm>
+            <a:off x="609600" y="685800"/>
+            <a:ext cx="11582400" cy="388590"/>
+          </a:xfrm>
+          <a:prstGeom prst="rect">
+            <a:avLst/>
+          </a:prstGeom>
+          <a:noFill/>
+        </p:spPr>
+        <p:txBody>
+          <a:bodyPr wrap="none" lIns="0" rIns="0" tIns="0" bIns="0" anchor="t">
+            <a:spAutoFit/>
+          </a:bodyPr>
+          <a:lstStyle/>
+          <a:p>
+            <a:pPr algn="l">
+              <a:lnSpc>
+                <a:spcPts val="3060"/>
+              </a:lnSpc>
             </a:pPr>
             <a:r>
-              <a:t>4. Imposibilidad de Extrapolación</a:t>
-            </a:r>
-          </a:p>
-          <a:p>
-            <a:pPr>
-              <a:defRPr sz="1150">
-                <a:solidFill>
-                  <a:srgbClr val="282828"/>
-                </a:solidFill>
-              </a:defRPr>
-            </a:pPr>
-            <a:r>
-              <a:t>El modelo cúbico solo es válido dentro del rango de 2023 (t ∈ [0, 46]). Dado que su coeficiente cúbico es negativo (a = -0.000839), extrapolar fuera del año haría tender los streams acumulados a -∞.</a:t>
+              <a:rPr b="1" sz="2550" i="0" u="none">
+                <a:solidFill>
+                  <a:srgbClr val="0F172A"/>
+                </a:solidFill>
+                <a:latin typeface="Space Grotesk"/>
+              </a:rPr>
+              <a:t>Límites y Condiciones de Borde</a:t>
+            </a:r>
+          </a:p>
+        </p:txBody>
+      </p:sp>
+      <p:sp>
+        <p:nvSpPr>
+          <p:cNvPr id="16" name="TextBox 15"/>
+          <p:cNvSpPr txBox="1"/>
+          <p:nvPr/>
+        </p:nvSpPr>
+        <p:spPr>
+          <a:xfrm>
+            <a:off x="838200" y="3642270"/>
+            <a:ext cx="2775346" cy="219075"/>
+          </a:xfrm>
+          <a:prstGeom prst="rect">
+            <a:avLst/>
+          </a:prstGeom>
+          <a:noFill/>
+        </p:spPr>
+        <p:txBody>
+          <a:bodyPr wrap="none" lIns="0" rIns="0" tIns="0" bIns="0" anchor="t">
+            <a:spAutoFit/>
+          </a:bodyPr>
+          <a:lstStyle/>
+          <a:p>
+            <a:pPr algn="l"/>
+            <a:r>
+              <a:rPr b="1" sz="1350" i="0" u="none">
+                <a:solidFill>
+                  <a:srgbClr val="0F172A"/>
+                </a:solidFill>
+                <a:latin typeface="Space Grotesk"/>
+              </a:rPr>
+              <a:t>Discrepancia Puntual</a:t>
+            </a:r>
+          </a:p>
+        </p:txBody>
+      </p:sp>
+      <p:sp>
+        <p:nvSpPr>
+          <p:cNvPr id="17" name="TextBox 16"/>
+          <p:cNvSpPr txBox="1"/>
+          <p:nvPr/>
+        </p:nvSpPr>
+        <p:spPr>
+          <a:xfrm>
+            <a:off x="838200" y="3975645"/>
+            <a:ext cx="2209800" cy="657225"/>
+          </a:xfrm>
+          <a:prstGeom prst="rect">
+            <a:avLst/>
+          </a:prstGeom>
+          <a:noFill/>
+        </p:spPr>
+        <p:txBody>
+          <a:bodyPr wrap="square" lIns="0" rIns="0" tIns="0" bIns="0" anchor="t">
+            <a:spAutoFit/>
+          </a:bodyPr>
+          <a:lstStyle/>
+          <a:p>
+            <a:pPr algn="l"/>
+            <a:r>
+              <a:rPr b="0" sz="1350" i="0" u="none">
+                <a:solidFill>
+                  <a:srgbClr val="475569"/>
+                </a:solidFill>
+                <a:latin typeface="Plus Jakarta Sans"/>
+              </a:rPr>
+              <a:t>Regresión: 2.77 d del cruce medido, más que Δt = ±1.92 d.</a:t>
+            </a:r>
+          </a:p>
+        </p:txBody>
+      </p:sp>
+      <p:sp>
+        <p:nvSpPr>
+          <p:cNvPr id="18" name="TextBox 17"/>
+          <p:cNvSpPr txBox="1"/>
+          <p:nvPr/>
+        </p:nvSpPr>
+        <p:spPr>
+          <a:xfrm>
+            <a:off x="3638550" y="3642270"/>
+            <a:ext cx="2775346" cy="219075"/>
+          </a:xfrm>
+          <a:prstGeom prst="rect">
+            <a:avLst/>
+          </a:prstGeom>
+          <a:noFill/>
+        </p:spPr>
+        <p:txBody>
+          <a:bodyPr wrap="none" lIns="0" rIns="0" tIns="0" bIns="0" anchor="t">
+            <a:spAutoFit/>
+          </a:bodyPr>
+          <a:lstStyle/>
+          <a:p>
+            <a:pPr algn="l"/>
+            <a:r>
+              <a:rPr b="1" sz="1350" i="0" u="none">
+                <a:solidFill>
+                  <a:srgbClr val="0F172A"/>
+                </a:solidFill>
+                <a:latin typeface="Space Grotesk"/>
+              </a:rPr>
+              <a:t>Suavizado del Pico</a:t>
+            </a:r>
+          </a:p>
+        </p:txBody>
+      </p:sp>
+      <p:sp>
+        <p:nvSpPr>
+          <p:cNvPr id="19" name="TextBox 18"/>
+          <p:cNvSpPr txBox="1"/>
+          <p:nvPr/>
+        </p:nvSpPr>
+        <p:spPr>
+          <a:xfrm>
+            <a:off x="3638550" y="3975645"/>
+            <a:ext cx="2209800" cy="657225"/>
+          </a:xfrm>
+          <a:prstGeom prst="rect">
+            <a:avLst/>
+          </a:prstGeom>
+          <a:noFill/>
+        </p:spPr>
+        <p:txBody>
+          <a:bodyPr wrap="square" lIns="0" rIns="0" tIns="0" bIns="0" anchor="t">
+            <a:spAutoFit/>
+          </a:bodyPr>
+          <a:lstStyle/>
+          <a:p>
+            <a:pPr algn="l"/>
+            <a:r>
+              <a:rPr b="0" sz="1350" i="0" u="none">
+                <a:solidFill>
+                  <a:srgbClr val="475569"/>
+                </a:solidFill>
+                <a:latin typeface="Plus Jakarta Sans"/>
+              </a:rPr>
+              <a:t>Atenúa el máximo un 18 % y lo desplaza 4.6 semanas.</a:t>
+            </a:r>
+          </a:p>
+        </p:txBody>
+      </p:sp>
+      <p:sp>
+        <p:nvSpPr>
+          <p:cNvPr id="20" name="TextBox 19"/>
+          <p:cNvSpPr txBox="1"/>
+          <p:nvPr/>
+        </p:nvSpPr>
+        <p:spPr>
+          <a:xfrm>
+            <a:off x="6438900" y="3642270"/>
+            <a:ext cx="2775346" cy="219075"/>
+          </a:xfrm>
+          <a:prstGeom prst="rect">
+            <a:avLst/>
+          </a:prstGeom>
+          <a:noFill/>
+        </p:spPr>
+        <p:txBody>
+          <a:bodyPr wrap="none" lIns="0" rIns="0" tIns="0" bIns="0" anchor="t">
+            <a:spAutoFit/>
+          </a:bodyPr>
+          <a:lstStyle/>
+          <a:p>
+            <a:pPr algn="l"/>
+            <a:r>
+              <a:rPr b="1" sz="1350" i="0" u="none">
+                <a:solidFill>
+                  <a:srgbClr val="0F172A"/>
+                </a:solidFill>
+                <a:latin typeface="Space Grotesk"/>
+              </a:rPr>
+              <a:t>Alcance Muestral</a:t>
+            </a:r>
+          </a:p>
+        </p:txBody>
+      </p:sp>
+      <p:sp>
+        <p:nvSpPr>
+          <p:cNvPr id="21" name="TextBox 20"/>
+          <p:cNvSpPr txBox="1"/>
+          <p:nvPr/>
+        </p:nvSpPr>
+        <p:spPr>
+          <a:xfrm>
+            <a:off x="6438900" y="3975645"/>
+            <a:ext cx="2209800" cy="657225"/>
+          </a:xfrm>
+          <a:prstGeom prst="rect">
+            <a:avLst/>
+          </a:prstGeom>
+          <a:noFill/>
+        </p:spPr>
+        <p:txBody>
+          <a:bodyPr wrap="square" lIns="0" rIns="0" tIns="0" bIns="0" anchor="t">
+            <a:spAutoFit/>
+          </a:bodyPr>
+          <a:lstStyle/>
+          <a:p>
+            <a:pPr algn="l"/>
+            <a:r>
+              <a:rPr b="0" sz="1350" i="0" u="none">
+                <a:solidFill>
+                  <a:srgbClr val="475569"/>
+                </a:solidFill>
+                <a:latin typeface="Plus Jakarta Sans"/>
+              </a:rPr>
+              <a:t>Restringido exclusivamente al Top 200 de Spotify México.</a:t>
+            </a:r>
+          </a:p>
+        </p:txBody>
+      </p:sp>
+      <p:sp>
+        <p:nvSpPr>
+          <p:cNvPr id="22" name="TextBox 21"/>
+          <p:cNvSpPr txBox="1"/>
+          <p:nvPr/>
+        </p:nvSpPr>
+        <p:spPr>
+          <a:xfrm>
+            <a:off x="9239250" y="3642270"/>
+            <a:ext cx="2775346" cy="219075"/>
+          </a:xfrm>
+          <a:prstGeom prst="rect">
+            <a:avLst/>
+          </a:prstGeom>
+          <a:noFill/>
+        </p:spPr>
+        <p:txBody>
+          <a:bodyPr wrap="none" lIns="0" rIns="0" tIns="0" bIns="0" anchor="t">
+            <a:spAutoFit/>
+          </a:bodyPr>
+          <a:lstStyle/>
+          <a:p>
+            <a:pPr algn="l"/>
+            <a:r>
+              <a:rPr b="1" sz="1350" i="0" u="none">
+                <a:solidFill>
+                  <a:srgbClr val="0F172A"/>
+                </a:solidFill>
+                <a:latin typeface="Space Grotesk"/>
+              </a:rPr>
+              <a:t>No Extrapolable</a:t>
+            </a:r>
+          </a:p>
+        </p:txBody>
+      </p:sp>
+      <p:sp>
+        <p:nvSpPr>
+          <p:cNvPr id="23" name="TextBox 22"/>
+          <p:cNvSpPr txBox="1"/>
+          <p:nvPr/>
+        </p:nvSpPr>
+        <p:spPr>
+          <a:xfrm>
+            <a:off x="9239250" y="3975645"/>
+            <a:ext cx="2209800" cy="657225"/>
+          </a:xfrm>
+          <a:prstGeom prst="rect">
+            <a:avLst/>
+          </a:prstGeom>
+          <a:noFill/>
+        </p:spPr>
+        <p:txBody>
+          <a:bodyPr wrap="square" lIns="0" rIns="0" tIns="0" bIns="0" anchor="t">
+            <a:spAutoFit/>
+          </a:bodyPr>
+          <a:lstStyle/>
+          <a:p>
+            <a:pPr algn="l"/>
+            <a:r>
+              <a:rPr b="0" sz="1350" i="0" u="none">
+                <a:solidFill>
+                  <a:srgbClr val="475569"/>
+                </a:solidFill>
+                <a:latin typeface="Plus Jakarta Sans"/>
+              </a:rPr>
+              <a:t>El término cúbico negativo colapsa fuera del intervalo anual.</a:t>
             </a:r>
           </a:p>
         </p:txBody>
